--- a/researchwrite/evaluation_presentation.pptx
+++ b/researchwrite/evaluation_presentation.pptx
@@ -15,6 +15,14 @@
     <p:sldId id="263" r:id="rId14"/>
     <p:sldId id="264" r:id="rId15"/>
     <p:sldId id="265" r:id="rId16"/>
+    <p:sldId id="266" r:id="rId17"/>
+    <p:sldId id="267" r:id="rId18"/>
+    <p:sldId id="268" r:id="rId19"/>
+    <p:sldId id="269" r:id="rId20"/>
+    <p:sldId id="270" r:id="rId21"/>
+    <p:sldId id="271" r:id="rId22"/>
+    <p:sldId id="272" r:id="rId23"/>
+    <p:sldId id="273" r:id="rId24"/>
   </p:sldIdLst>
   <p:sldSz cx="12191695" cy="6858000" type="screen4x3"/>
   <p:notesSz cx="6858000" cy="9144000"/>
@@ -3209,7 +3217,7 @@
           <a:p>
             <a:pPr algn="l">
               <a:spcAft>
-                <a:spcPts val="600"/>
+                <a:spcPts val="800"/>
               </a:spcAft>
             </a:pPr>
             <a:r>
@@ -3229,7 +3237,7 @@
               </a:spcAft>
             </a:pPr>
             <a:r>
-              <a:rPr sz="2000" b="0" i="0">
+              <a:rPr sz="2100" b="0" i="0">
                 <a:solidFill>
                   <a:srgbClr val="9FC5DD"/>
                 </a:solidFill>
@@ -3264,11 +3272,11 @@
           <a:p>
             <a:pPr algn="l">
               <a:spcAft>
-                <a:spcPts val="600"/>
-              </a:spcAft>
-            </a:pPr>
-            <a:r>
-              <a:rPr sz="1800" b="0" i="0">
+                <a:spcPts val="800"/>
+              </a:spcAft>
+            </a:pPr>
+            <a:r>
+              <a:rPr sz="1900" b="0" i="0">
                 <a:solidFill>
                   <a:srgbClr val="C9D6E0"/>
                 </a:solidFill>
@@ -3280,11 +3288,11 @@
           <a:p>
             <a:pPr algn="l">
               <a:spcAft>
-                <a:spcPts val="600"/>
-              </a:spcAft>
-            </a:pPr>
-            <a:r>
-              <a:rPr sz="1500" b="0" i="0">
+                <a:spcPts val="800"/>
+              </a:spcAft>
+            </a:pPr>
+            <a:r>
+              <a:rPr sz="1600" b="0" i="0">
                 <a:solidFill>
                   <a:srgbClr val="C9D6E0"/>
                 </a:solidFill>
@@ -3365,8 +3373,8 @@
         </p:nvSpPr>
         <p:spPr>
           <a:xfrm>
-            <a:off x="457200" y="109728"/>
-            <a:ext cx="11247120" cy="868680"/>
+            <a:off x="457200" y="91440"/>
+            <a:ext cx="11247120" cy="914400"/>
           </a:xfrm>
           <a:prstGeom prst="rect">
             <a:avLst/>
@@ -3381,31 +3389,71 @@
           <a:p>
             <a:pPr algn="l">
               <a:spcAft>
-                <a:spcPts val="600"/>
-              </a:spcAft>
-            </a:pPr>
-            <a:r>
-              <a:rPr sz="2700" b="1" i="0">
+                <a:spcPts val="800"/>
+              </a:spcAft>
+            </a:pPr>
+            <a:r>
+              <a:rPr sz="3000" b="1" i="0">
                 <a:solidFill>
                   <a:srgbClr val="FFFFFF"/>
                 </a:solidFill>
                 <a:latin typeface="Calibri"/>
               </a:rPr>
-              <a:t>General problems &amp; open risks</a:t>
-            </a:r>
-          </a:p>
-        </p:txBody>
-      </p:sp>
-      <p:sp>
-        <p:nvSpPr>
-          <p:cNvPr id="4" name="TextBox 3"/>
+              <a:t>Experiment 2 — a real barrel, no occlusion</a:t>
+            </a:r>
+          </a:p>
+          <a:p>
+            <a:pPr algn="l">
+              <a:spcAft>
+                <a:spcPts val="800"/>
+              </a:spcAft>
+            </a:pPr>
+            <a:r>
+              <a:rPr sz="1700" b="0" i="0">
+                <a:solidFill>
+                  <a:srgbClr val="D6E6F0"/>
+                </a:solidFill>
+                <a:latin typeface="Calibri"/>
+              </a:rPr>
+              <a:t>Small lab barrel (radius 4.25 cm) seen by a depth camera</a:t>
+            </a:r>
+          </a:p>
+        </p:txBody>
+      </p:sp>
+      <p:pic>
+        <p:nvPicPr>
+          <p:cNvPr id="4" name="Picture 3" descr="real_3d_det.png"/>
+          <p:cNvPicPr>
+            <a:picLocks noChangeAspect="1"/>
+          </p:cNvPicPr>
+          <p:nvPr/>
+        </p:nvPicPr>
+        <p:blipFill>
+          <a:blip r:embed="rId2"/>
+          <a:stretch>
+            <a:fillRect/>
+          </a:stretch>
+        </p:blipFill>
+        <p:spPr>
+          <a:xfrm>
+            <a:off x="1220562" y="1371600"/>
+            <a:ext cx="1765116" cy="4389120"/>
+          </a:xfrm>
+          <a:prstGeom prst="rect">
+            <a:avLst/>
+          </a:prstGeom>
+        </p:spPr>
+      </p:pic>
+      <p:sp>
+        <p:nvSpPr>
+          <p:cNvPr id="5" name="TextBox 4"/>
           <p:cNvSpPr txBox="1"/>
           <p:nvPr/>
         </p:nvSpPr>
         <p:spPr>
           <a:xfrm>
-            <a:off x="502920" y="1280160"/>
-            <a:ext cx="11247120" cy="5029200"/>
+            <a:off x="182880" y="5806440"/>
+            <a:ext cx="4023360" cy="365760"/>
           </a:xfrm>
           <a:prstGeom prst="rect">
             <a:avLst/>
@@ -3418,73 +3466,9 @@
           </a:bodyPr>
           <a:lstStyle/>
           <a:p>
-            <a:pPr algn="l">
-              <a:spcAft>
-                <a:spcPts val="600"/>
-              </a:spcAft>
-            </a:pPr>
-            <a:r>
-              <a:rPr sz="1600" b="1" i="0">
-                <a:solidFill>
-                  <a:srgbClr val="0B5C8A"/>
-                </a:solidFill>
-                <a:latin typeface="Calibri"/>
-              </a:rPr>
-              <a:t>• Accuracy degrades sharply with occlusion — a known pattern, not unique to us.</a:t>
-            </a:r>
-          </a:p>
-          <a:p>
-            <a:pPr algn="l" lvl="1">
-              <a:spcAft>
-                <a:spcPts val="600"/>
-              </a:spcAft>
-            </a:pPr>
-            <a:r>
-              <a:rPr sz="1300" b="0" i="0">
-                <a:solidFill>
-                  <a:srgbClr val="1F2D3D"/>
-                </a:solidFill>
-                <a:latin typeface="Calibri"/>
-              </a:rPr>
-              <a:t>– KITTI Easy/Mod/Hard: PointRCNN car AP 88.9 → 78.6 → 77.4 (~11.5 pt) [Shi'19, arXiv:1812.04244]. Controlled occlusion: LiDAR-only mAP 64.7 → 34.1 (−47%) [Kumar'25, arXiv:2511.04347].</a:t>
-            </a:r>
-          </a:p>
-          <a:p>
-            <a:pPr algn="l">
-              <a:spcAft>
-                <a:spcPts val="600"/>
-              </a:spcAft>
-            </a:pPr>
-            <a:r>
-              <a:rPr sz="1600" b="1" i="0">
-                <a:solidFill>
-                  <a:srgbClr val="0B5C8A"/>
-                </a:solidFill>
-                <a:latin typeface="Calibri"/>
-              </a:rPr>
-              <a:t>• LiDAR-only alone isn't robust enough for mission-critical use — motivates fusion.</a:t>
-            </a:r>
-          </a:p>
-          <a:p>
-            <a:pPr algn="l" lvl="1">
-              <a:spcAft>
-                <a:spcPts val="600"/>
-              </a:spcAft>
-            </a:pPr>
-            <a:r>
-              <a:rPr sz="1300" b="0" i="0">
-                <a:solidFill>
-                  <a:srgbClr val="1F2D3D"/>
-                </a:solidFill>
-                <a:latin typeface="Calibri"/>
-              </a:rPr>
-              <a:t>– Fusion beats LiDAR-only even on clean data (68.5 vs 64.7 mAP) and is far more robust to camera occlusion (−4 pt) than LiDAR-only is to LiDAR occlusion (−47 pt) — but still loses ~27 pt when the LiDAR leg itself is occluded [Kumar'25].</a:t>
-            </a:r>
-          </a:p>
-          <a:p>
-            <a:pPr algn="l">
-              <a:spcAft>
-                <a:spcPts val="600"/>
+            <a:pPr algn="ctr">
+              <a:spcAft>
+                <a:spcPts val="800"/>
               </a:spcAft>
             </a:pPr>
             <a:r>
@@ -3494,21 +3478,519 @@
                 </a:solidFill>
                 <a:latin typeface="Calibri"/>
               </a:rPr>
-              <a:t>• Project risks: sim-to-real gap (sim LiDAR is cleaner); the manipulation half of the title not yet started; annotation cost as a fairness concern for geometric-vs-learned; scope / timeline.</a:t>
-            </a:r>
-          </a:p>
-        </p:txBody>
-      </p:sp>
-      <p:sp>
-        <p:nvSpPr>
-          <p:cNvPr id="5" name="TextBox 4"/>
+              <a:t>camera points (coloured) with the fitted cylinder (red)</a:t>
+            </a:r>
+          </a:p>
+        </p:txBody>
+      </p:sp>
+      <p:graphicFrame>
+        <p:nvGraphicFramePr>
+          <p:cNvPr id="6" name="Table 5"/>
+          <p:cNvGraphicFramePr>
+            <a:graphicFrameLocks noGrp="1"/>
+          </p:cNvGraphicFramePr>
+          <p:nvPr/>
+        </p:nvGraphicFramePr>
+        <p:xfrm>
+          <a:off x="4206240" y="1600200"/>
+          <a:ext cx="7635240" cy="2651760"/>
+        </p:xfrm>
+        <a:graphic>
+          <a:graphicData uri="http://schemas.openxmlformats.org/drawingml/2006/table">
+            <a:tbl>
+              <a:tblPr firstRow="1" bandRow="1">
+                <a:tableStyleId>{5C22544A-7EE6-4342-B048-85BDC9FD1C3A}</a:tableStyleId>
+              </a:tblPr>
+              <a:tblGrid>
+                <a:gridCol w="2377440"/>
+                <a:gridCol w="2148840"/>
+                <a:gridCol w="1554480"/>
+                <a:gridCol w="1554480"/>
+              </a:tblGrid>
+              <a:tr h="530352">
+                <a:tc>
+                  <a:txBody>
+                    <a:bodyPr/>
+                    <a:lstStyle/>
+                    <a:p>
+                      <a:pPr algn="l"/>
+                      <a:r>
+                        <a:rPr sz="1600" b="1">
+                          <a:solidFill>
+                            <a:srgbClr val="FFFFFF"/>
+                          </a:solidFill>
+                          <a:latin typeface="Calibri"/>
+                        </a:rPr>
+                        <a:t>Method</a:t>
+                      </a:r>
+                    </a:p>
+                  </a:txBody>
+                  <a:tcPr anchor="ctr" marT="38100" marB="38100">
+                    <a:solidFill>
+                      <a:srgbClr val="0B5C8A"/>
+                    </a:solidFill>
+                  </a:tcPr>
+                </a:tc>
+                <a:tc>
+                  <a:txBody>
+                    <a:bodyPr/>
+                    <a:lstStyle/>
+                    <a:p>
+                      <a:pPr algn="ctr"/>
+                      <a:r>
+                        <a:rPr sz="1600" b="1">
+                          <a:solidFill>
+                            <a:srgbClr val="FFFFFF"/>
+                          </a:solidFill>
+                          <a:latin typeface="Calibri"/>
+                        </a:rPr>
+                        <a:t>Barrel found?</a:t>
+                      </a:r>
+                    </a:p>
+                  </a:txBody>
+                  <a:tcPr anchor="ctr" marT="38100" marB="38100">
+                    <a:solidFill>
+                      <a:srgbClr val="0B5C8A"/>
+                    </a:solidFill>
+                  </a:tcPr>
+                </a:tc>
+                <a:tc>
+                  <a:txBody>
+                    <a:bodyPr/>
+                    <a:lstStyle/>
+                    <a:p>
+                      <a:pPr algn="ctr"/>
+                      <a:r>
+                        <a:rPr sz="1600" b="1">
+                          <a:solidFill>
+                            <a:srgbClr val="FFFFFF"/>
+                          </a:solidFill>
+                          <a:latin typeface="Calibri"/>
+                        </a:rPr>
+                        <a:t>Radius error</a:t>
+                      </a:r>
+                    </a:p>
+                  </a:txBody>
+                  <a:tcPr anchor="ctr" marT="38100" marB="38100">
+                    <a:solidFill>
+                      <a:srgbClr val="0B5C8A"/>
+                    </a:solidFill>
+                  </a:tcPr>
+                </a:tc>
+                <a:tc>
+                  <a:txBody>
+                    <a:bodyPr/>
+                    <a:lstStyle/>
+                    <a:p>
+                      <a:pPr algn="ctr"/>
+                      <a:r>
+                        <a:rPr sz="1600" b="1">
+                          <a:solidFill>
+                            <a:srgbClr val="FFFFFF"/>
+                          </a:solidFill>
+                          <a:latin typeface="Calibri"/>
+                        </a:rPr>
+                        <a:t>Direction error</a:t>
+                      </a:r>
+                    </a:p>
+                  </a:txBody>
+                  <a:tcPr anchor="ctr" marT="38100" marB="38100">
+                    <a:solidFill>
+                      <a:srgbClr val="0B5C8A"/>
+                    </a:solidFill>
+                  </a:tcPr>
+                </a:tc>
+              </a:tr>
+              <a:tr h="530352">
+                <a:tc>
+                  <a:txBody>
+                    <a:bodyPr/>
+                    <a:lstStyle/>
+                    <a:p>
+                      <a:pPr algn="l"/>
+                      <a:r>
+                        <a:rPr sz="1500" b="0">
+                          <a:solidFill>
+                            <a:srgbClr val="1F2D3D"/>
+                          </a:solidFill>
+                          <a:latin typeface="Calibri"/>
+                        </a:rPr>
+                        <a:t>RANSAC fit</a:t>
+                      </a:r>
+                    </a:p>
+                  </a:txBody>
+                  <a:tcPr anchor="ctr" marT="38100" marB="38100">
+                    <a:solidFill>
+                      <a:srgbClr val="F2F5F8"/>
+                    </a:solidFill>
+                  </a:tcPr>
+                </a:tc>
+                <a:tc>
+                  <a:txBody>
+                    <a:bodyPr/>
+                    <a:lstStyle/>
+                    <a:p>
+                      <a:pPr algn="ctr"/>
+                      <a:r>
+                        <a:rPr sz="1500" b="0">
+                          <a:solidFill>
+                            <a:srgbClr val="1F2D3D"/>
+                          </a:solidFill>
+                          <a:latin typeface="Calibri"/>
+                        </a:rPr>
+                        <a:t>yes</a:t>
+                      </a:r>
+                    </a:p>
+                  </a:txBody>
+                  <a:tcPr anchor="ctr" marT="38100" marB="38100">
+                    <a:solidFill>
+                      <a:srgbClr val="F2F5F8"/>
+                    </a:solidFill>
+                  </a:tcPr>
+                </a:tc>
+                <a:tc>
+                  <a:txBody>
+                    <a:bodyPr/>
+                    <a:lstStyle/>
+                    <a:p>
+                      <a:pPr algn="ctr"/>
+                      <a:r>
+                        <a:rPr sz="1500" b="0">
+                          <a:solidFill>
+                            <a:srgbClr val="1F2D3D"/>
+                          </a:solidFill>
+                          <a:latin typeface="Calibri"/>
+                        </a:rPr>
+                        <a:t>0.38 cm</a:t>
+                      </a:r>
+                    </a:p>
+                  </a:txBody>
+                  <a:tcPr anchor="ctr" marT="38100" marB="38100">
+                    <a:solidFill>
+                      <a:srgbClr val="F2F5F8"/>
+                    </a:solidFill>
+                  </a:tcPr>
+                </a:tc>
+                <a:tc>
+                  <a:txBody>
+                    <a:bodyPr/>
+                    <a:lstStyle/>
+                    <a:p>
+                      <a:pPr algn="ctr"/>
+                      <a:r>
+                        <a:rPr sz="1500" b="0">
+                          <a:solidFill>
+                            <a:srgbClr val="1F2D3D"/>
+                          </a:solidFill>
+                          <a:latin typeface="Calibri"/>
+                        </a:rPr>
+                        <a:t>1.9°</a:t>
+                      </a:r>
+                    </a:p>
+                  </a:txBody>
+                  <a:tcPr anchor="ctr" marT="38100" marB="38100">
+                    <a:solidFill>
+                      <a:srgbClr val="F2F5F8"/>
+                    </a:solidFill>
+                  </a:tcPr>
+                </a:tc>
+              </a:tr>
+              <a:tr h="530352">
+                <a:tc>
+                  <a:txBody>
+                    <a:bodyPr/>
+                    <a:lstStyle/>
+                    <a:p>
+                      <a:pPr algn="l"/>
+                      <a:r>
+                        <a:rPr sz="1500" b="0">
+                          <a:solidFill>
+                            <a:srgbClr val="1F2D3D"/>
+                          </a:solidFill>
+                          <a:latin typeface="Calibri"/>
+                        </a:rPr>
+                        <a:t>Least-squares</a:t>
+                      </a:r>
+                    </a:p>
+                  </a:txBody>
+                  <a:tcPr anchor="ctr" marT="38100" marB="38100">
+                    <a:solidFill>
+                      <a:srgbClr val="FFFFFF"/>
+                    </a:solidFill>
+                  </a:tcPr>
+                </a:tc>
+                <a:tc>
+                  <a:txBody>
+                    <a:bodyPr/>
+                    <a:lstStyle/>
+                    <a:p>
+                      <a:pPr algn="ctr"/>
+                      <a:r>
+                        <a:rPr sz="1500" b="0">
+                          <a:solidFill>
+                            <a:srgbClr val="1F2D3D"/>
+                          </a:solidFill>
+                          <a:latin typeface="Calibri"/>
+                        </a:rPr>
+                        <a:t>yes</a:t>
+                      </a:r>
+                    </a:p>
+                  </a:txBody>
+                  <a:tcPr anchor="ctr" marT="38100" marB="38100">
+                    <a:solidFill>
+                      <a:srgbClr val="FFFFFF"/>
+                    </a:solidFill>
+                  </a:tcPr>
+                </a:tc>
+                <a:tc>
+                  <a:txBody>
+                    <a:bodyPr/>
+                    <a:lstStyle/>
+                    <a:p>
+                      <a:pPr algn="ctr"/>
+                      <a:r>
+                        <a:rPr sz="1500" b="0">
+                          <a:solidFill>
+                            <a:srgbClr val="1F2D3D"/>
+                          </a:solidFill>
+                          <a:latin typeface="Calibri"/>
+                        </a:rPr>
+                        <a:t>0.47 cm</a:t>
+                      </a:r>
+                    </a:p>
+                  </a:txBody>
+                  <a:tcPr anchor="ctr" marT="38100" marB="38100">
+                    <a:solidFill>
+                      <a:srgbClr val="FFFFFF"/>
+                    </a:solidFill>
+                  </a:tcPr>
+                </a:tc>
+                <a:tc>
+                  <a:txBody>
+                    <a:bodyPr/>
+                    <a:lstStyle/>
+                    <a:p>
+                      <a:pPr algn="ctr"/>
+                      <a:r>
+                        <a:rPr sz="1500" b="0">
+                          <a:solidFill>
+                            <a:srgbClr val="1F2D3D"/>
+                          </a:solidFill>
+                          <a:latin typeface="Calibri"/>
+                        </a:rPr>
+                        <a:t>1.6°</a:t>
+                      </a:r>
+                    </a:p>
+                  </a:txBody>
+                  <a:tcPr anchor="ctr" marT="38100" marB="38100">
+                    <a:solidFill>
+                      <a:srgbClr val="FFFFFF"/>
+                    </a:solidFill>
+                  </a:tcPr>
+                </a:tc>
+              </a:tr>
+              <a:tr h="530352">
+                <a:tc>
+                  <a:txBody>
+                    <a:bodyPr/>
+                    <a:lstStyle/>
+                    <a:p>
+                      <a:pPr algn="l"/>
+                      <a:r>
+                        <a:rPr sz="1500" b="0">
+                          <a:solidFill>
+                            <a:srgbClr val="1F2D3D"/>
+                          </a:solidFill>
+                          <a:latin typeface="Calibri"/>
+                        </a:rPr>
+                        <a:t>Efficient RANSAC</a:t>
+                      </a:r>
+                    </a:p>
+                  </a:txBody>
+                  <a:tcPr anchor="ctr" marT="38100" marB="38100">
+                    <a:solidFill>
+                      <a:srgbClr val="F2F5F8"/>
+                    </a:solidFill>
+                  </a:tcPr>
+                </a:tc>
+                <a:tc>
+                  <a:txBody>
+                    <a:bodyPr/>
+                    <a:lstStyle/>
+                    <a:p>
+                      <a:pPr algn="ctr"/>
+                      <a:r>
+                        <a:rPr sz="1500" b="0">
+                          <a:solidFill>
+                            <a:srgbClr val="1F2D3D"/>
+                          </a:solidFill>
+                          <a:latin typeface="Calibri"/>
+                        </a:rPr>
+                        <a:t>yes</a:t>
+                      </a:r>
+                    </a:p>
+                  </a:txBody>
+                  <a:tcPr anchor="ctr" marT="38100" marB="38100">
+                    <a:solidFill>
+                      <a:srgbClr val="F2F5F8"/>
+                    </a:solidFill>
+                  </a:tcPr>
+                </a:tc>
+                <a:tc>
+                  <a:txBody>
+                    <a:bodyPr/>
+                    <a:lstStyle/>
+                    <a:p>
+                      <a:pPr algn="ctr"/>
+                      <a:r>
+                        <a:rPr sz="1500" b="0">
+                          <a:solidFill>
+                            <a:srgbClr val="1F2D3D"/>
+                          </a:solidFill>
+                          <a:latin typeface="Calibri"/>
+                        </a:rPr>
+                        <a:t>0.94 cm</a:t>
+                      </a:r>
+                    </a:p>
+                  </a:txBody>
+                  <a:tcPr anchor="ctr" marT="38100" marB="38100">
+                    <a:solidFill>
+                      <a:srgbClr val="F2F5F8"/>
+                    </a:solidFill>
+                  </a:tcPr>
+                </a:tc>
+                <a:tc>
+                  <a:txBody>
+                    <a:bodyPr/>
+                    <a:lstStyle/>
+                    <a:p>
+                      <a:pPr algn="ctr"/>
+                      <a:r>
+                        <a:rPr sz="1500" b="0">
+                          <a:solidFill>
+                            <a:srgbClr val="1F2D3D"/>
+                          </a:solidFill>
+                          <a:latin typeface="Calibri"/>
+                        </a:rPr>
+                        <a:t>0.1°</a:t>
+                      </a:r>
+                    </a:p>
+                  </a:txBody>
+                  <a:tcPr anchor="ctr" marT="38100" marB="38100">
+                    <a:solidFill>
+                      <a:srgbClr val="F2F5F8"/>
+                    </a:solidFill>
+                  </a:tcPr>
+                </a:tc>
+              </a:tr>
+              <a:tr h="530352">
+                <a:tc>
+                  <a:txBody>
+                    <a:bodyPr/>
+                    <a:lstStyle/>
+                    <a:p>
+                      <a:pPr algn="l"/>
+                      <a:r>
+                        <a:rPr sz="1500" b="0">
+                          <a:solidFill>
+                            <a:srgbClr val="1F2D3D"/>
+                          </a:solidFill>
+                          <a:latin typeface="Calibri"/>
+                        </a:rPr>
+                        <a:t>3DTK Hough</a:t>
+                      </a:r>
+                    </a:p>
+                  </a:txBody>
+                  <a:tcPr anchor="ctr" marT="38100" marB="38100">
+                    <a:solidFill>
+                      <a:srgbClr val="FFFFFF"/>
+                    </a:solidFill>
+                  </a:tcPr>
+                </a:tc>
+                <a:tc>
+                  <a:txBody>
+                    <a:bodyPr/>
+                    <a:lstStyle/>
+                    <a:p>
+                      <a:pPr algn="ctr"/>
+                      <a:r>
+                        <a:rPr sz="1500" b="0">
+                          <a:solidFill>
+                            <a:srgbClr val="1F2D3D"/>
+                          </a:solidFill>
+                          <a:latin typeface="Calibri"/>
+                        </a:rPr>
+                        <a:t>yes + 1 false alarm</a:t>
+                      </a:r>
+                    </a:p>
+                  </a:txBody>
+                  <a:tcPr anchor="ctr" marT="38100" marB="38100">
+                    <a:solidFill>
+                      <a:srgbClr val="FFFFFF"/>
+                    </a:solidFill>
+                  </a:tcPr>
+                </a:tc>
+                <a:tc>
+                  <a:txBody>
+                    <a:bodyPr/>
+                    <a:lstStyle/>
+                    <a:p>
+                      <a:pPr algn="ctr"/>
+                      <a:r>
+                        <a:rPr sz="1500" b="0">
+                          <a:solidFill>
+                            <a:srgbClr val="1F2D3D"/>
+                          </a:solidFill>
+                          <a:latin typeface="Calibri"/>
+                        </a:rPr>
+                        <a:t>0.09 cm</a:t>
+                      </a:r>
+                    </a:p>
+                  </a:txBody>
+                  <a:tcPr anchor="ctr" marT="38100" marB="38100">
+                    <a:solidFill>
+                      <a:srgbClr val="FFFFFF"/>
+                    </a:solidFill>
+                  </a:tcPr>
+                </a:tc>
+                <a:tc>
+                  <a:txBody>
+                    <a:bodyPr/>
+                    <a:lstStyle/>
+                    <a:p>
+                      <a:pPr algn="ctr"/>
+                      <a:r>
+                        <a:rPr sz="1500" b="0">
+                          <a:solidFill>
+                            <a:srgbClr val="1F2D3D"/>
+                          </a:solidFill>
+                          <a:latin typeface="Calibri"/>
+                        </a:rPr>
+                        <a:t>1.5°</a:t>
+                      </a:r>
+                    </a:p>
+                  </a:txBody>
+                  <a:tcPr anchor="ctr" marT="38100" marB="38100">
+                    <a:solidFill>
+                      <a:srgbClr val="FFFFFF"/>
+                    </a:solidFill>
+                  </a:tcPr>
+                </a:tc>
+              </a:tr>
+            </a:tbl>
+          </a:graphicData>
+        </a:graphic>
+      </p:graphicFrame>
+      <p:sp>
+        <p:nvSpPr>
+          <p:cNvPr id="7" name="TextBox 6"/>
           <p:cNvSpPr txBox="1"/>
           <p:nvPr/>
         </p:nvSpPr>
         <p:spPr>
           <a:xfrm>
-            <a:off x="365760" y="6446520"/>
-            <a:ext cx="10972800" cy="320040"/>
+            <a:off x="4297680" y="4480560"/>
+            <a:ext cx="7498079" cy="1280160"/>
           </a:xfrm>
           <a:prstGeom prst="rect">
             <a:avLst/>
@@ -3523,31 +4005,47 @@
           <a:p>
             <a:pPr algn="l">
               <a:spcAft>
-                <a:spcPts val="600"/>
-              </a:spcAft>
-            </a:pPr>
-            <a:r>
-              <a:rPr sz="900" b="0" i="0">
-                <a:solidFill>
-                  <a:srgbClr val="555555"/>
-                </a:solidFill>
-                <a:latin typeface="Calibri"/>
-              </a:rPr>
-              <a:t>Detection and Robotic Manipulation of Partially Occluded Object(s)</a:t>
-            </a:r>
-          </a:p>
-        </p:txBody>
-      </p:sp>
-      <p:sp>
-        <p:nvSpPr>
-          <p:cNvPr id="6" name="TextBox 5"/>
+                <a:spcPts val="1000"/>
+              </a:spcAft>
+            </a:pPr>
+            <a:r>
+              <a:rPr sz="1900" b="1" i="0">
+                <a:solidFill>
+                  <a:srgbClr val="2E7D32"/>
+                </a:solidFill>
+                <a:latin typeface="Calibri"/>
+              </a:rPr>
+              <a:t>• All four methods find the barrel.</a:t>
+            </a:r>
+          </a:p>
+          <a:p>
+            <a:pPr algn="l">
+              <a:spcAft>
+                <a:spcPts val="1000"/>
+              </a:spcAft>
+            </a:pPr>
+            <a:r>
+              <a:rPr sz="1800" b="0" i="0">
+                <a:solidFill>
+                  <a:srgbClr val="B76E00"/>
+                </a:solidFill>
+                <a:latin typeface="Calibri"/>
+              </a:rPr>
+              <a:t>• Errors are ~6–8× larger than on synthetic data — real sensor noise is not the clean noise we simulate.</a:t>
+            </a:r>
+          </a:p>
+        </p:txBody>
+      </p:sp>
+      <p:sp>
+        <p:nvSpPr>
+          <p:cNvPr id="8" name="TextBox 7"/>
           <p:cNvSpPr txBox="1"/>
           <p:nvPr/>
         </p:nvSpPr>
         <p:spPr>
           <a:xfrm>
-            <a:off x="11521440" y="6446520"/>
-            <a:ext cx="548640" cy="320040"/>
+            <a:off x="365760" y="6473952"/>
+            <a:ext cx="10972800" cy="320040"/>
           </a:xfrm>
           <a:prstGeom prst="rect">
             <a:avLst/>
@@ -3560,9 +4058,397 @@
           </a:bodyPr>
           <a:lstStyle/>
           <a:p>
+            <a:pPr algn="l">
+              <a:spcAft>
+                <a:spcPts val="800"/>
+              </a:spcAft>
+            </a:pPr>
+            <a:r>
+              <a:rPr sz="1000" b="0" i="0">
+                <a:solidFill>
+                  <a:srgbClr val="555555"/>
+                </a:solidFill>
+                <a:latin typeface="Calibri"/>
+              </a:rPr>
+              <a:t>Detection and Robotic Manipulation of Partially Occluded Object(s)</a:t>
+            </a:r>
+          </a:p>
+        </p:txBody>
+      </p:sp>
+      <p:sp>
+        <p:nvSpPr>
+          <p:cNvPr id="9" name="TextBox 8"/>
+          <p:cNvSpPr txBox="1"/>
+          <p:nvPr/>
+        </p:nvSpPr>
+        <p:spPr>
+          <a:xfrm>
+            <a:off x="11521440" y="6473952"/>
+            <a:ext cx="548640" cy="320040"/>
+          </a:xfrm>
+          <a:prstGeom prst="rect">
+            <a:avLst/>
+          </a:prstGeom>
+          <a:noFill/>
+        </p:spPr>
+        <p:txBody>
+          <a:bodyPr wrap="square">
+            <a:spAutoFit/>
+          </a:bodyPr>
+          <a:lstStyle/>
+          <a:p>
             <a:pPr algn="r">
               <a:spcAft>
-                <a:spcPts val="600"/>
+                <a:spcPts val="800"/>
+              </a:spcAft>
+            </a:pPr>
+            <a:r>
+              <a:rPr sz="1100" b="0" i="0">
+                <a:solidFill>
+                  <a:srgbClr val="555555"/>
+                </a:solidFill>
+                <a:latin typeface="Calibri"/>
+              </a:rPr>
+              <a:t>9</a:t>
+            </a:r>
+          </a:p>
+        </p:txBody>
+      </p:sp>
+    </p:spTree>
+  </p:cSld>
+  <p:clrMapOvr>
+    <a:masterClrMapping/>
+  </p:clrMapOvr>
+</p:sld>
+</file>
+
+<file path=ppt/slides/slide11.xml><?xml version="1.0" encoding="utf-8"?>
+<p:sld xmlns:a="http://schemas.openxmlformats.org/drawingml/2006/main" xmlns:p="http://schemas.openxmlformats.org/presentationml/2006/main" xmlns:r="http://schemas.openxmlformats.org/officeDocument/2006/relationships">
+  <p:cSld>
+    <p:spTree>
+      <p:nvGrpSpPr>
+        <p:cNvPr id="1" name=""/>
+        <p:cNvGrpSpPr/>
+        <p:nvPr/>
+      </p:nvGrpSpPr>
+      <p:grpSpPr/>
+      <p:sp>
+        <p:nvSpPr>
+          <p:cNvPr id="2" name="Rectangle 1"/>
+          <p:cNvSpPr/>
+          <p:nvPr/>
+        </p:nvSpPr>
+        <p:spPr>
+          <a:xfrm>
+            <a:off x="0" y="0"/>
+            <a:ext cx="12191695" cy="1051560"/>
+          </a:xfrm>
+          <a:prstGeom prst="rect">
+            <a:avLst/>
+          </a:prstGeom>
+          <a:solidFill>
+            <a:srgbClr val="0B5C8A"/>
+          </a:solidFill>
+          <a:ln>
+            <a:noFill/>
+          </a:ln>
+          <a:effectLst/>
+        </p:spPr>
+        <p:style>
+          <a:lnRef idx="1">
+            <a:schemeClr val="accent1"/>
+          </a:lnRef>
+          <a:fillRef idx="3">
+            <a:schemeClr val="accent1"/>
+          </a:fillRef>
+          <a:effectRef idx="2">
+            <a:schemeClr val="accent1"/>
+          </a:effectRef>
+          <a:fontRef idx="minor">
+            <a:schemeClr val="lt1"/>
+          </a:fontRef>
+        </p:style>
+        <p:txBody>
+          <a:bodyPr rtlCol="0" anchor="ctr"/>
+          <a:lstStyle/>
+          <a:p>
+            <a:pPr algn="ctr"/>
+          </a:p>
+        </p:txBody>
+      </p:sp>
+      <p:sp>
+        <p:nvSpPr>
+          <p:cNvPr id="3" name="TextBox 2"/>
+          <p:cNvSpPr txBox="1"/>
+          <p:nvPr/>
+        </p:nvSpPr>
+        <p:spPr>
+          <a:xfrm>
+            <a:off x="457200" y="91440"/>
+            <a:ext cx="11247120" cy="914400"/>
+          </a:xfrm>
+          <a:prstGeom prst="rect">
+            <a:avLst/>
+          </a:prstGeom>
+          <a:noFill/>
+        </p:spPr>
+        <p:txBody>
+          <a:bodyPr wrap="square">
+            <a:spAutoFit/>
+          </a:bodyPr>
+          <a:lstStyle/>
+          <a:p>
+            <a:pPr algn="l">
+              <a:spcAft>
+                <a:spcPts val="800"/>
+              </a:spcAft>
+            </a:pPr>
+            <a:r>
+              <a:rPr sz="3000" b="1" i="0">
+                <a:solidFill>
+                  <a:srgbClr val="FFFFFF"/>
+                </a:solidFill>
+                <a:latin typeface="Calibri"/>
+              </a:rPr>
+              <a:t>Experiment 3 — a real occluded drum from the pile</a:t>
+            </a:r>
+          </a:p>
+          <a:p>
+            <a:pPr algn="l">
+              <a:spcAft>
+                <a:spcPts val="800"/>
+              </a:spcAft>
+            </a:pPr>
+            <a:r>
+              <a:rPr sz="1700" b="0" i="0">
+                <a:solidFill>
+                  <a:srgbClr val="D6E6F0"/>
+                </a:solidFill>
+                <a:latin typeface="Calibri"/>
+              </a:rPr>
+              <a:t>One tilted, half-buried 200 L drum cut out of the survey scan</a:t>
+            </a:r>
+          </a:p>
+        </p:txBody>
+      </p:sp>
+      <p:pic>
+        <p:nvPicPr>
+          <p:cNvPr id="4" name="Picture 3" descr="real_fits_on_cloud.png"/>
+          <p:cNvPicPr>
+            <a:picLocks noChangeAspect="1"/>
+          </p:cNvPicPr>
+          <p:nvPr/>
+        </p:nvPicPr>
+        <p:blipFill>
+          <a:blip r:embed="rId2"/>
+          <a:stretch>
+            <a:fillRect/>
+          </a:stretch>
+        </p:blipFill>
+        <p:spPr>
+          <a:xfrm>
+            <a:off x="424543" y="1371600"/>
+            <a:ext cx="6466114" cy="4114800"/>
+          </a:xfrm>
+          <a:prstGeom prst="rect">
+            <a:avLst/>
+          </a:prstGeom>
+        </p:spPr>
+      </p:pic>
+      <p:sp>
+        <p:nvSpPr>
+          <p:cNvPr id="5" name="TextBox 4"/>
+          <p:cNvSpPr txBox="1"/>
+          <p:nvPr/>
+        </p:nvSpPr>
+        <p:spPr>
+          <a:xfrm>
+            <a:off x="320040" y="5504688"/>
+            <a:ext cx="6675120" cy="365760"/>
+          </a:xfrm>
+          <a:prstGeom prst="rect">
+            <a:avLst/>
+          </a:prstGeom>
+          <a:noFill/>
+        </p:spPr>
+        <p:txBody>
+          <a:bodyPr wrap="square">
+            <a:spAutoFit/>
+          </a:bodyPr>
+          <a:lstStyle/>
+          <a:p>
+            <a:pPr algn="ctr">
+              <a:spcAft>
+                <a:spcPts val="800"/>
+              </a:spcAft>
+            </a:pPr>
+            <a:r>
+              <a:rPr sz="1400" b="0" i="0">
+                <a:solidFill>
+                  <a:srgbClr val="555555"/>
+                </a:solidFill>
+                <a:latin typeface="Calibri"/>
+              </a:rPr>
+              <a:t>true drum (green) vs fitted cylinders on the real points</a:t>
+            </a:r>
+          </a:p>
+        </p:txBody>
+      </p:sp>
+      <p:sp>
+        <p:nvSpPr>
+          <p:cNvPr id="6" name="TextBox 5"/>
+          <p:cNvSpPr txBox="1"/>
+          <p:nvPr/>
+        </p:nvSpPr>
+        <p:spPr>
+          <a:xfrm>
+            <a:off x="7223760" y="1508760"/>
+            <a:ext cx="4663440" cy="4206240"/>
+          </a:xfrm>
+          <a:prstGeom prst="rect">
+            <a:avLst/>
+          </a:prstGeom>
+          <a:noFill/>
+        </p:spPr>
+        <p:txBody>
+          <a:bodyPr wrap="square">
+            <a:spAutoFit/>
+          </a:bodyPr>
+          <a:lstStyle/>
+          <a:p>
+            <a:pPr algn="l">
+              <a:spcAft>
+                <a:spcPts val="1000"/>
+              </a:spcAft>
+            </a:pPr>
+            <a:r>
+              <a:rPr sz="1900" b="1" i="0">
+                <a:solidFill>
+                  <a:srgbClr val="B02A2A"/>
+                </a:solidFill>
+                <a:latin typeface="Calibri"/>
+              </a:rPr>
+              <a:t>• All four methods fail the accuracy gate here.</a:t>
+            </a:r>
+          </a:p>
+          <a:p>
+            <a:pPr algn="l">
+              <a:spcAft>
+                <a:spcPts val="1000"/>
+              </a:spcAft>
+            </a:pPr>
+            <a:r>
+              <a:rPr sz="1800" b="0" i="0">
+                <a:solidFill>
+                  <a:srgbClr val="1F2D3D"/>
+                </a:solidFill>
+                <a:latin typeface="Calibri"/>
+              </a:rPr>
+              <a:t>• Best attempt (least-squares): direction good (17°), centre off by 11.1 cm — misses the 10 cm gate by 1.1 cm.</a:t>
+            </a:r>
+          </a:p>
+          <a:p>
+            <a:pPr algn="l">
+              <a:spcAft>
+                <a:spcPts val="1000"/>
+              </a:spcAft>
+            </a:pPr>
+            <a:r>
+              <a:rPr sz="1800" b="0" i="0">
+                <a:solidFill>
+                  <a:srgbClr val="1F2D3D"/>
+                </a:solidFill>
+                <a:latin typeface="Calibri"/>
+              </a:rPr>
+              <a:t>• The others: direction far off, or no detection at all.</a:t>
+            </a:r>
+          </a:p>
+        </p:txBody>
+      </p:sp>
+      <p:sp>
+        <p:nvSpPr>
+          <p:cNvPr id="7" name="Rectangle 6"/>
+          <p:cNvSpPr/>
+          <p:nvPr/>
+        </p:nvSpPr>
+        <p:spPr>
+          <a:xfrm>
+            <a:off x="365760" y="5925312"/>
+            <a:ext cx="11475720" cy="502920"/>
+          </a:xfrm>
+          <a:prstGeom prst="rect">
+            <a:avLst/>
+          </a:prstGeom>
+          <a:solidFill>
+            <a:srgbClr val="E3EEF5"/>
+          </a:solidFill>
+          <a:ln w="19050">
+            <a:solidFill>
+              <a:srgbClr val="B76E00"/>
+            </a:solidFill>
+          </a:ln>
+          <a:effectLst/>
+        </p:spPr>
+        <p:style>
+          <a:lnRef idx="1">
+            <a:schemeClr val="accent1"/>
+          </a:lnRef>
+          <a:fillRef idx="3">
+            <a:schemeClr val="accent1"/>
+          </a:fillRef>
+          <a:effectRef idx="2">
+            <a:schemeClr val="accent1"/>
+          </a:effectRef>
+          <a:fontRef idx="minor">
+            <a:schemeClr val="lt1"/>
+          </a:fontRef>
+        </p:style>
+        <p:txBody>
+          <a:bodyPr rtlCol="0" anchor="ctr" wrap="square" tIns="25400" bIns="25400"/>
+          <a:lstStyle/>
+          <a:p>
+            <a:pPr algn="ctr">
+              <a:spcAft>
+                <a:spcPts val="800"/>
+              </a:spcAft>
+            </a:pPr>
+            <a:r>
+              <a:rPr sz="2000" b="1" i="0">
+                <a:solidFill>
+                  <a:srgbClr val="B76E00"/>
+                </a:solidFill>
+                <a:latin typeface="Calibri"/>
+              </a:rPr>
+              <a:t>Occlusion is exactly where the classical methods break — motivating a learned method.</a:t>
+            </a:r>
+          </a:p>
+        </p:txBody>
+      </p:sp>
+      <p:sp>
+        <p:nvSpPr>
+          <p:cNvPr id="8" name="TextBox 7"/>
+          <p:cNvSpPr txBox="1"/>
+          <p:nvPr/>
+        </p:nvSpPr>
+        <p:spPr>
+          <a:xfrm>
+            <a:off x="365760" y="6473952"/>
+            <a:ext cx="10972800" cy="320040"/>
+          </a:xfrm>
+          <a:prstGeom prst="rect">
+            <a:avLst/>
+          </a:prstGeom>
+          <a:noFill/>
+        </p:spPr>
+        <p:txBody>
+          <a:bodyPr wrap="square">
+            <a:spAutoFit/>
+          </a:bodyPr>
+          <a:lstStyle/>
+          <a:p>
+            <a:pPr algn="l">
+              <a:spcAft>
+                <a:spcPts val="800"/>
               </a:spcAft>
             </a:pPr>
             <a:r>
@@ -3572,7 +4458,2445 @@
                 </a:solidFill>
                 <a:latin typeface="Calibri"/>
               </a:rPr>
-              <a:t>9</a:t>
+              <a:t>Detection and Robotic Manipulation of Partially Occluded Object(s)</a:t>
+            </a:r>
+          </a:p>
+        </p:txBody>
+      </p:sp>
+      <p:sp>
+        <p:nvSpPr>
+          <p:cNvPr id="9" name="TextBox 8"/>
+          <p:cNvSpPr txBox="1"/>
+          <p:nvPr/>
+        </p:nvSpPr>
+        <p:spPr>
+          <a:xfrm>
+            <a:off x="11521440" y="6473952"/>
+            <a:ext cx="548640" cy="320040"/>
+          </a:xfrm>
+          <a:prstGeom prst="rect">
+            <a:avLst/>
+          </a:prstGeom>
+          <a:noFill/>
+        </p:spPr>
+        <p:txBody>
+          <a:bodyPr wrap="square">
+            <a:spAutoFit/>
+          </a:bodyPr>
+          <a:lstStyle/>
+          <a:p>
+            <a:pPr algn="r">
+              <a:spcAft>
+                <a:spcPts val="800"/>
+              </a:spcAft>
+            </a:pPr>
+            <a:r>
+              <a:rPr sz="1100" b="0" i="0">
+                <a:solidFill>
+                  <a:srgbClr val="555555"/>
+                </a:solidFill>
+                <a:latin typeface="Calibri"/>
+              </a:rPr>
+              <a:t>10</a:t>
+            </a:r>
+          </a:p>
+        </p:txBody>
+      </p:sp>
+    </p:spTree>
+  </p:cSld>
+  <p:clrMapOvr>
+    <a:masterClrMapping/>
+  </p:clrMapOvr>
+</p:sld>
+</file>
+
+<file path=ppt/slides/slide12.xml><?xml version="1.0" encoding="utf-8"?>
+<p:sld xmlns:a="http://schemas.openxmlformats.org/drawingml/2006/main" xmlns:p="http://schemas.openxmlformats.org/presentationml/2006/main" xmlns:r="http://schemas.openxmlformats.org/officeDocument/2006/relationships">
+  <p:cSld>
+    <p:spTree>
+      <p:nvGrpSpPr>
+        <p:cNvPr id="1" name=""/>
+        <p:cNvGrpSpPr/>
+        <p:nvPr/>
+      </p:nvGrpSpPr>
+      <p:grpSpPr/>
+      <p:sp>
+        <p:nvSpPr>
+          <p:cNvPr id="2" name="Rectangle 1"/>
+          <p:cNvSpPr/>
+          <p:nvPr/>
+        </p:nvSpPr>
+        <p:spPr>
+          <a:xfrm>
+            <a:off x="0" y="0"/>
+            <a:ext cx="12191695" cy="1051560"/>
+          </a:xfrm>
+          <a:prstGeom prst="rect">
+            <a:avLst/>
+          </a:prstGeom>
+          <a:solidFill>
+            <a:srgbClr val="0B5C8A"/>
+          </a:solidFill>
+          <a:ln>
+            <a:noFill/>
+          </a:ln>
+          <a:effectLst/>
+        </p:spPr>
+        <p:style>
+          <a:lnRef idx="1">
+            <a:schemeClr val="accent1"/>
+          </a:lnRef>
+          <a:fillRef idx="3">
+            <a:schemeClr val="accent1"/>
+          </a:fillRef>
+          <a:effectRef idx="2">
+            <a:schemeClr val="accent1"/>
+          </a:effectRef>
+          <a:fontRef idx="minor">
+            <a:schemeClr val="lt1"/>
+          </a:fontRef>
+        </p:style>
+        <p:txBody>
+          <a:bodyPr rtlCol="0" anchor="ctr"/>
+          <a:lstStyle/>
+          <a:p>
+            <a:pPr algn="ctr"/>
+          </a:p>
+        </p:txBody>
+      </p:sp>
+      <p:sp>
+        <p:nvSpPr>
+          <p:cNvPr id="3" name="TextBox 2"/>
+          <p:cNvSpPr txBox="1"/>
+          <p:nvPr/>
+        </p:nvSpPr>
+        <p:spPr>
+          <a:xfrm>
+            <a:off x="457200" y="91440"/>
+            <a:ext cx="11247120" cy="914400"/>
+          </a:xfrm>
+          <a:prstGeom prst="rect">
+            <a:avLst/>
+          </a:prstGeom>
+          <a:noFill/>
+        </p:spPr>
+        <p:txBody>
+          <a:bodyPr wrap="square">
+            <a:spAutoFit/>
+          </a:bodyPr>
+          <a:lstStyle/>
+          <a:p>
+            <a:pPr algn="l">
+              <a:spcAft>
+                <a:spcPts val="800"/>
+              </a:spcAft>
+            </a:pPr>
+            <a:r>
+              <a:rPr sz="3000" b="1" i="0">
+                <a:solidFill>
+                  <a:srgbClr val="FFFFFF"/>
+                </a:solidFill>
+                <a:latin typeface="Calibri"/>
+              </a:rPr>
+              <a:t>New: BarrelNet — our first learning-based method</a:t>
+            </a:r>
+          </a:p>
+          <a:p>
+            <a:pPr algn="l">
+              <a:spcAft>
+                <a:spcPts val="800"/>
+              </a:spcAft>
+            </a:pPr>
+            <a:r>
+              <a:rPr sz="1700" b="0" i="0">
+                <a:solidFill>
+                  <a:srgbClr val="D6E6F0"/>
+                </a:solidFill>
+                <a:latin typeface="Calibri"/>
+              </a:rPr>
+              <a:t>A neural network that gets the points of ONE drum and outputs its pose (centre + direction)</a:t>
+            </a:r>
+          </a:p>
+        </p:txBody>
+      </p:sp>
+      <p:pic>
+        <p:nvPicPr>
+          <p:cNvPr id="4" name="Picture 3" descr="synth_patches_sample.png"/>
+          <p:cNvPicPr>
+            <a:picLocks noChangeAspect="1"/>
+          </p:cNvPicPr>
+          <p:nvPr/>
+        </p:nvPicPr>
+        <p:blipFill>
+          <a:blip r:embed="rId2"/>
+          <a:stretch>
+            <a:fillRect/>
+          </a:stretch>
+        </p:blipFill>
+        <p:spPr>
+          <a:xfrm>
+            <a:off x="365760" y="1559738"/>
+            <a:ext cx="11475720" cy="3098444"/>
+          </a:xfrm>
+          <a:prstGeom prst="rect">
+            <a:avLst/>
+          </a:prstGeom>
+        </p:spPr>
+      </p:pic>
+      <p:sp>
+        <p:nvSpPr>
+          <p:cNvPr id="5" name="TextBox 4"/>
+          <p:cNvSpPr txBox="1"/>
+          <p:nvPr/>
+        </p:nvSpPr>
+        <p:spPr>
+          <a:xfrm>
+            <a:off x="365760" y="4709160"/>
+            <a:ext cx="11475720" cy="365760"/>
+          </a:xfrm>
+          <a:prstGeom prst="rect">
+            <a:avLst/>
+          </a:prstGeom>
+          <a:noFill/>
+        </p:spPr>
+        <p:txBody>
+          <a:bodyPr wrap="square">
+            <a:spAutoFit/>
+          </a:bodyPr>
+          <a:lstStyle/>
+          <a:p>
+            <a:pPr algn="ctr">
+              <a:spcAft>
+                <a:spcPts val="800"/>
+              </a:spcAft>
+            </a:pPr>
+            <a:r>
+              <a:rPr sz="1400" b="0" i="0">
+                <a:solidFill>
+                  <a:srgbClr val="555555"/>
+                </a:solidFill>
+                <a:latin typeface="Calibri"/>
+              </a:rPr>
+              <a:t>four examples of the computer-generated training data: simulated LiDAR points (red) on a drum surface (blue)</a:t>
+            </a:r>
+          </a:p>
+        </p:txBody>
+      </p:sp>
+      <p:sp>
+        <p:nvSpPr>
+          <p:cNvPr id="6" name="TextBox 5"/>
+          <p:cNvSpPr txBox="1"/>
+          <p:nvPr/>
+        </p:nvSpPr>
+        <p:spPr>
+          <a:xfrm>
+            <a:off x="548640" y="5074920"/>
+            <a:ext cx="11155680" cy="822960"/>
+          </a:xfrm>
+          <a:prstGeom prst="rect">
+            <a:avLst/>
+          </a:prstGeom>
+          <a:noFill/>
+        </p:spPr>
+        <p:txBody>
+          <a:bodyPr wrap="square">
+            <a:spAutoFit/>
+          </a:bodyPr>
+          <a:lstStyle/>
+          <a:p>
+            <a:pPr algn="l">
+              <a:spcAft>
+                <a:spcPts val="1000"/>
+              </a:spcAft>
+            </a:pPr>
+            <a:r>
+              <a:rPr sz="1900" b="0" i="0">
+                <a:solidFill>
+                  <a:srgbClr val="1F2D3D"/>
+                </a:solidFill>
+                <a:latin typeface="Calibri"/>
+              </a:rPr>
+              <a:t>• Trained on 12,000 randomly generated partial drums — buried, tilted, noisy, incomplete.</a:t>
+            </a:r>
+          </a:p>
+        </p:txBody>
+      </p:sp>
+      <p:sp>
+        <p:nvSpPr>
+          <p:cNvPr id="7" name="Rectangle 6"/>
+          <p:cNvSpPr/>
+          <p:nvPr/>
+        </p:nvSpPr>
+        <p:spPr>
+          <a:xfrm>
+            <a:off x="365760" y="5943600"/>
+            <a:ext cx="11475720" cy="502920"/>
+          </a:xfrm>
+          <a:prstGeom prst="rect">
+            <a:avLst/>
+          </a:prstGeom>
+          <a:solidFill>
+            <a:srgbClr val="E3EEF5"/>
+          </a:solidFill>
+          <a:ln w="19050">
+            <a:solidFill>
+              <a:srgbClr val="2E7D32"/>
+            </a:solidFill>
+          </a:ln>
+          <a:effectLst/>
+        </p:spPr>
+        <p:style>
+          <a:lnRef idx="1">
+            <a:schemeClr val="accent1"/>
+          </a:lnRef>
+          <a:fillRef idx="3">
+            <a:schemeClr val="accent1"/>
+          </a:fillRef>
+          <a:effectRef idx="2">
+            <a:schemeClr val="accent1"/>
+          </a:effectRef>
+          <a:fontRef idx="minor">
+            <a:schemeClr val="lt1"/>
+          </a:fontRef>
+        </p:style>
+        <p:txBody>
+          <a:bodyPr rtlCol="0" anchor="ctr" wrap="square" tIns="25400" bIns="25400"/>
+          <a:lstStyle/>
+          <a:p>
+            <a:pPr algn="ctr">
+              <a:spcAft>
+                <a:spcPts val="800"/>
+              </a:spcAft>
+            </a:pPr>
+            <a:r>
+              <a:rPr sz="2000" b="1" i="0">
+                <a:solidFill>
+                  <a:srgbClr val="2E7D32"/>
+                </a:solidFill>
+                <a:latin typeface="Calibri"/>
+              </a:rPr>
+              <a:t>No real data in training: the 21 hand-verified real drums are kept aside as an honest test.</a:t>
+            </a:r>
+          </a:p>
+        </p:txBody>
+      </p:sp>
+      <p:sp>
+        <p:nvSpPr>
+          <p:cNvPr id="8" name="TextBox 7"/>
+          <p:cNvSpPr txBox="1"/>
+          <p:nvPr/>
+        </p:nvSpPr>
+        <p:spPr>
+          <a:xfrm>
+            <a:off x="365760" y="6473952"/>
+            <a:ext cx="10972800" cy="320040"/>
+          </a:xfrm>
+          <a:prstGeom prst="rect">
+            <a:avLst/>
+          </a:prstGeom>
+          <a:noFill/>
+        </p:spPr>
+        <p:txBody>
+          <a:bodyPr wrap="square">
+            <a:spAutoFit/>
+          </a:bodyPr>
+          <a:lstStyle/>
+          <a:p>
+            <a:pPr algn="l">
+              <a:spcAft>
+                <a:spcPts val="800"/>
+              </a:spcAft>
+            </a:pPr>
+            <a:r>
+              <a:rPr sz="1000" b="0" i="0">
+                <a:solidFill>
+                  <a:srgbClr val="555555"/>
+                </a:solidFill>
+                <a:latin typeface="Calibri"/>
+              </a:rPr>
+              <a:t>Detection and Robotic Manipulation of Partially Occluded Object(s)</a:t>
+            </a:r>
+          </a:p>
+        </p:txBody>
+      </p:sp>
+      <p:sp>
+        <p:nvSpPr>
+          <p:cNvPr id="9" name="TextBox 8"/>
+          <p:cNvSpPr txBox="1"/>
+          <p:nvPr/>
+        </p:nvSpPr>
+        <p:spPr>
+          <a:xfrm>
+            <a:off x="11521440" y="6473952"/>
+            <a:ext cx="548640" cy="320040"/>
+          </a:xfrm>
+          <a:prstGeom prst="rect">
+            <a:avLst/>
+          </a:prstGeom>
+          <a:noFill/>
+        </p:spPr>
+        <p:txBody>
+          <a:bodyPr wrap="square">
+            <a:spAutoFit/>
+          </a:bodyPr>
+          <a:lstStyle/>
+          <a:p>
+            <a:pPr algn="r">
+              <a:spcAft>
+                <a:spcPts val="800"/>
+              </a:spcAft>
+            </a:pPr>
+            <a:r>
+              <a:rPr sz="1100" b="0" i="0">
+                <a:solidFill>
+                  <a:srgbClr val="555555"/>
+                </a:solidFill>
+                <a:latin typeface="Calibri"/>
+              </a:rPr>
+              <a:t>11</a:t>
+            </a:r>
+          </a:p>
+        </p:txBody>
+      </p:sp>
+    </p:spTree>
+  </p:cSld>
+  <p:clrMapOvr>
+    <a:masterClrMapping/>
+  </p:clrMapOvr>
+</p:sld>
+</file>
+
+<file path=ppt/slides/slide13.xml><?xml version="1.0" encoding="utf-8"?>
+<p:sld xmlns:a="http://schemas.openxmlformats.org/drawingml/2006/main" xmlns:p="http://schemas.openxmlformats.org/presentationml/2006/main" xmlns:r="http://schemas.openxmlformats.org/officeDocument/2006/relationships">
+  <p:cSld>
+    <p:spTree>
+      <p:nvGrpSpPr>
+        <p:cNvPr id="1" name=""/>
+        <p:cNvGrpSpPr/>
+        <p:nvPr/>
+      </p:nvGrpSpPr>
+      <p:grpSpPr/>
+      <p:sp>
+        <p:nvSpPr>
+          <p:cNvPr id="2" name="Rectangle 1"/>
+          <p:cNvSpPr/>
+          <p:nvPr/>
+        </p:nvSpPr>
+        <p:spPr>
+          <a:xfrm>
+            <a:off x="0" y="0"/>
+            <a:ext cx="12191695" cy="1051560"/>
+          </a:xfrm>
+          <a:prstGeom prst="rect">
+            <a:avLst/>
+          </a:prstGeom>
+          <a:solidFill>
+            <a:srgbClr val="0B5C8A"/>
+          </a:solidFill>
+          <a:ln>
+            <a:noFill/>
+          </a:ln>
+          <a:effectLst/>
+        </p:spPr>
+        <p:style>
+          <a:lnRef idx="1">
+            <a:schemeClr val="accent1"/>
+          </a:lnRef>
+          <a:fillRef idx="3">
+            <a:schemeClr val="accent1"/>
+          </a:fillRef>
+          <a:effectRef idx="2">
+            <a:schemeClr val="accent1"/>
+          </a:effectRef>
+          <a:fontRef idx="minor">
+            <a:schemeClr val="lt1"/>
+          </a:fontRef>
+        </p:style>
+        <p:txBody>
+          <a:bodyPr rtlCol="0" anchor="ctr"/>
+          <a:lstStyle/>
+          <a:p>
+            <a:pPr algn="ctr"/>
+          </a:p>
+        </p:txBody>
+      </p:sp>
+      <p:sp>
+        <p:nvSpPr>
+          <p:cNvPr id="3" name="TextBox 2"/>
+          <p:cNvSpPr txBox="1"/>
+          <p:nvPr/>
+        </p:nvSpPr>
+        <p:spPr>
+          <a:xfrm>
+            <a:off x="457200" y="91440"/>
+            <a:ext cx="11247120" cy="914400"/>
+          </a:xfrm>
+          <a:prstGeom prst="rect">
+            <a:avLst/>
+          </a:prstGeom>
+          <a:noFill/>
+        </p:spPr>
+        <p:txBody>
+          <a:bodyPr wrap="square">
+            <a:spAutoFit/>
+          </a:bodyPr>
+          <a:lstStyle/>
+          <a:p>
+            <a:pPr algn="l">
+              <a:spcAft>
+                <a:spcPts val="800"/>
+              </a:spcAft>
+            </a:pPr>
+            <a:r>
+              <a:rPr sz="3000" b="1" i="0">
+                <a:solidFill>
+                  <a:srgbClr val="FFFFFF"/>
+                </a:solidFill>
+                <a:latin typeface="Calibri"/>
+              </a:rPr>
+              <a:t>BarrelNet — how the score develops during training</a:t>
+            </a:r>
+          </a:p>
+          <a:p>
+            <a:pPr algn="l">
+              <a:spcAft>
+                <a:spcPts val="800"/>
+              </a:spcAft>
+            </a:pPr>
+            <a:r>
+              <a:rPr sz="1700" b="0" i="0">
+                <a:solidFill>
+                  <a:srgbClr val="D6E6F0"/>
+                </a:solidFill>
+                <a:latin typeface="Calibri"/>
+              </a:rPr>
+              <a:t>Same network trained twice: laptop CPU (stopped early) vs GPU server (full schedule)</a:t>
+            </a:r>
+          </a:p>
+        </p:txBody>
+      </p:sp>
+      <p:pic>
+        <p:nvPicPr>
+          <p:cNvPr id="4" name="Picture 3" descr="barrelnet_epochs.png"/>
+          <p:cNvPicPr>
+            <a:picLocks noChangeAspect="1"/>
+          </p:cNvPicPr>
+          <p:nvPr/>
+        </p:nvPicPr>
+        <p:blipFill>
+          <a:blip r:embed="rId2"/>
+          <a:stretch>
+            <a:fillRect/>
+          </a:stretch>
+        </p:blipFill>
+        <p:spPr>
+          <a:xfrm>
+            <a:off x="274320" y="1452055"/>
+            <a:ext cx="11658600" cy="3633849"/>
+          </a:xfrm>
+          <a:prstGeom prst="rect">
+            <a:avLst/>
+          </a:prstGeom>
+        </p:spPr>
+      </p:pic>
+      <p:sp>
+        <p:nvSpPr>
+          <p:cNvPr id="5" name="TextBox 4"/>
+          <p:cNvSpPr txBox="1"/>
+          <p:nvPr/>
+        </p:nvSpPr>
+        <p:spPr>
+          <a:xfrm>
+            <a:off x="548640" y="5120640"/>
+            <a:ext cx="11155680" cy="1280160"/>
+          </a:xfrm>
+          <a:prstGeom prst="rect">
+            <a:avLst/>
+          </a:prstGeom>
+          <a:noFill/>
+        </p:spPr>
+        <p:txBody>
+          <a:bodyPr wrap="square">
+            <a:spAutoFit/>
+          </a:bodyPr>
+          <a:lstStyle/>
+          <a:p>
+            <a:pPr algn="l">
+              <a:spcAft>
+                <a:spcPts val="1000"/>
+              </a:spcAft>
+            </a:pPr>
+            <a:r>
+              <a:rPr sz="1900" b="1" i="0">
+                <a:solidFill>
+                  <a:srgbClr val="2E7D32"/>
+                </a:solidFill>
+                <a:latin typeface="Calibri"/>
+              </a:rPr>
+              <a:t>• Finishing the full training schedule nearly doubled the score: 7 → 12 of 21 real drums.</a:t>
+            </a:r>
+          </a:p>
+          <a:p>
+            <a:pPr algn="l">
+              <a:spcAft>
+                <a:spcPts val="1000"/>
+              </a:spcAft>
+            </a:pPr>
+            <a:r>
+              <a:rPr sz="1800" b="0" i="0">
+                <a:solidFill>
+                  <a:srgbClr val="1F2D3D"/>
+                </a:solidFill>
+                <a:latin typeface="Calibri"/>
+              </a:rPr>
+              <a:t>• The direction is learned early; the centre position improves late — it crosses the 10 cm gate only near the end.</a:t>
+            </a:r>
+          </a:p>
+        </p:txBody>
+      </p:sp>
+      <p:sp>
+        <p:nvSpPr>
+          <p:cNvPr id="6" name="TextBox 5"/>
+          <p:cNvSpPr txBox="1"/>
+          <p:nvPr/>
+        </p:nvSpPr>
+        <p:spPr>
+          <a:xfrm>
+            <a:off x="365760" y="6473952"/>
+            <a:ext cx="10972800" cy="320040"/>
+          </a:xfrm>
+          <a:prstGeom prst="rect">
+            <a:avLst/>
+          </a:prstGeom>
+          <a:noFill/>
+        </p:spPr>
+        <p:txBody>
+          <a:bodyPr wrap="square">
+            <a:spAutoFit/>
+          </a:bodyPr>
+          <a:lstStyle/>
+          <a:p>
+            <a:pPr algn="l">
+              <a:spcAft>
+                <a:spcPts val="800"/>
+              </a:spcAft>
+            </a:pPr>
+            <a:r>
+              <a:rPr sz="1000" b="0" i="0">
+                <a:solidFill>
+                  <a:srgbClr val="555555"/>
+                </a:solidFill>
+                <a:latin typeface="Calibri"/>
+              </a:rPr>
+              <a:t>Detection and Robotic Manipulation of Partially Occluded Object(s)</a:t>
+            </a:r>
+          </a:p>
+        </p:txBody>
+      </p:sp>
+      <p:sp>
+        <p:nvSpPr>
+          <p:cNvPr id="7" name="TextBox 6"/>
+          <p:cNvSpPr txBox="1"/>
+          <p:nvPr/>
+        </p:nvSpPr>
+        <p:spPr>
+          <a:xfrm>
+            <a:off x="11521440" y="6473952"/>
+            <a:ext cx="548640" cy="320040"/>
+          </a:xfrm>
+          <a:prstGeom prst="rect">
+            <a:avLst/>
+          </a:prstGeom>
+          <a:noFill/>
+        </p:spPr>
+        <p:txBody>
+          <a:bodyPr wrap="square">
+            <a:spAutoFit/>
+          </a:bodyPr>
+          <a:lstStyle/>
+          <a:p>
+            <a:pPr algn="r">
+              <a:spcAft>
+                <a:spcPts val="800"/>
+              </a:spcAft>
+            </a:pPr>
+            <a:r>
+              <a:rPr sz="1100" b="0" i="0">
+                <a:solidFill>
+                  <a:srgbClr val="555555"/>
+                </a:solidFill>
+                <a:latin typeface="Calibri"/>
+              </a:rPr>
+              <a:t>12</a:t>
+            </a:r>
+          </a:p>
+        </p:txBody>
+      </p:sp>
+    </p:spTree>
+  </p:cSld>
+  <p:clrMapOvr>
+    <a:masterClrMapping/>
+  </p:clrMapOvr>
+</p:sld>
+</file>
+
+<file path=ppt/slides/slide14.xml><?xml version="1.0" encoding="utf-8"?>
+<p:sld xmlns:a="http://schemas.openxmlformats.org/drawingml/2006/main" xmlns:p="http://schemas.openxmlformats.org/presentationml/2006/main" xmlns:r="http://schemas.openxmlformats.org/officeDocument/2006/relationships">
+  <p:cSld>
+    <p:spTree>
+      <p:nvGrpSpPr>
+        <p:cNvPr id="1" name=""/>
+        <p:cNvGrpSpPr/>
+        <p:nvPr/>
+      </p:nvGrpSpPr>
+      <p:grpSpPr/>
+      <p:sp>
+        <p:nvSpPr>
+          <p:cNvPr id="2" name="Rectangle 1"/>
+          <p:cNvSpPr/>
+          <p:nvPr/>
+        </p:nvSpPr>
+        <p:spPr>
+          <a:xfrm>
+            <a:off x="0" y="0"/>
+            <a:ext cx="12191695" cy="1051560"/>
+          </a:xfrm>
+          <a:prstGeom prst="rect">
+            <a:avLst/>
+          </a:prstGeom>
+          <a:solidFill>
+            <a:srgbClr val="0B5C8A"/>
+          </a:solidFill>
+          <a:ln>
+            <a:noFill/>
+          </a:ln>
+          <a:effectLst/>
+        </p:spPr>
+        <p:style>
+          <a:lnRef idx="1">
+            <a:schemeClr val="accent1"/>
+          </a:lnRef>
+          <a:fillRef idx="3">
+            <a:schemeClr val="accent1"/>
+          </a:fillRef>
+          <a:effectRef idx="2">
+            <a:schemeClr val="accent1"/>
+          </a:effectRef>
+          <a:fontRef idx="minor">
+            <a:schemeClr val="lt1"/>
+          </a:fontRef>
+        </p:style>
+        <p:txBody>
+          <a:bodyPr rtlCol="0" anchor="ctr"/>
+          <a:lstStyle/>
+          <a:p>
+            <a:pPr algn="ctr"/>
+          </a:p>
+        </p:txBody>
+      </p:sp>
+      <p:sp>
+        <p:nvSpPr>
+          <p:cNvPr id="3" name="TextBox 2"/>
+          <p:cNvSpPr txBox="1"/>
+          <p:nvPr/>
+        </p:nvSpPr>
+        <p:spPr>
+          <a:xfrm>
+            <a:off x="457200" y="91440"/>
+            <a:ext cx="11247120" cy="914400"/>
+          </a:xfrm>
+          <a:prstGeom prst="rect">
+            <a:avLst/>
+          </a:prstGeom>
+          <a:noFill/>
+        </p:spPr>
+        <p:txBody>
+          <a:bodyPr wrap="square">
+            <a:spAutoFit/>
+          </a:bodyPr>
+          <a:lstStyle/>
+          <a:p>
+            <a:pPr algn="l">
+              <a:spcAft>
+                <a:spcPts val="800"/>
+              </a:spcAft>
+            </a:pPr>
+            <a:r>
+              <a:rPr sz="3000" b="1" i="0">
+                <a:solidFill>
+                  <a:srgbClr val="FFFFFF"/>
+                </a:solidFill>
+                <a:latin typeface="Calibri"/>
+              </a:rPr>
+              <a:t>BarrelNet on the real drum pile</a:t>
+            </a:r>
+          </a:p>
+          <a:p>
+            <a:pPr algn="l">
+              <a:spcAft>
+                <a:spcPts val="800"/>
+              </a:spcAft>
+            </a:pPr>
+            <a:r>
+              <a:rPr sz="1700" b="0" i="0">
+                <a:solidFill>
+                  <a:srgbClr val="D6E6F0"/>
+                </a:solidFill>
+                <a:latin typeface="Calibri"/>
+              </a:rPr>
+              <a:t>Trained purely on synthetic drums, tested on the 21 real ones</a:t>
+            </a:r>
+          </a:p>
+        </p:txBody>
+      </p:sp>
+      <p:pic>
+        <p:nvPicPr>
+          <p:cNvPr id="4" name="Picture 3" descr="station_detection.png"/>
+          <p:cNvPicPr>
+            <a:picLocks noChangeAspect="1"/>
+          </p:cNvPicPr>
+          <p:nvPr/>
+        </p:nvPicPr>
+        <p:blipFill>
+          <a:blip r:embed="rId2"/>
+          <a:stretch>
+            <a:fillRect/>
+          </a:stretch>
+        </p:blipFill>
+        <p:spPr>
+          <a:xfrm>
+            <a:off x="975359" y="1325880"/>
+            <a:ext cx="6096000" cy="4572000"/>
+          </a:xfrm>
+          <a:prstGeom prst="rect">
+            <a:avLst/>
+          </a:prstGeom>
+        </p:spPr>
+      </p:pic>
+      <p:sp>
+        <p:nvSpPr>
+          <p:cNvPr id="5" name="TextBox 4"/>
+          <p:cNvSpPr txBox="1"/>
+          <p:nvPr/>
+        </p:nvSpPr>
+        <p:spPr>
+          <a:xfrm>
+            <a:off x="274320" y="5943600"/>
+            <a:ext cx="7498079" cy="365760"/>
+          </a:xfrm>
+          <a:prstGeom prst="rect">
+            <a:avLst/>
+          </a:prstGeom>
+          <a:noFill/>
+        </p:spPr>
+        <p:txBody>
+          <a:bodyPr wrap="square">
+            <a:spAutoFit/>
+          </a:bodyPr>
+          <a:lstStyle/>
+          <a:p>
+            <a:pPr algn="ctr">
+              <a:spcAft>
+                <a:spcPts val="800"/>
+              </a:spcAft>
+            </a:pPr>
+            <a:r>
+              <a:rPr sz="1400" b="0" i="0">
+                <a:solidFill>
+                  <a:srgbClr val="555555"/>
+                </a:solidFill>
+                <a:latin typeface="Calibri"/>
+              </a:rPr>
+              <a:t>annotated drums coloured; predicted cylinders: green = within gate, red = miss</a:t>
+            </a:r>
+          </a:p>
+        </p:txBody>
+      </p:sp>
+      <p:sp>
+        <p:nvSpPr>
+          <p:cNvPr id="6" name="TextBox 5"/>
+          <p:cNvSpPr txBox="1"/>
+          <p:nvPr/>
+        </p:nvSpPr>
+        <p:spPr>
+          <a:xfrm>
+            <a:off x="8001000" y="1508760"/>
+            <a:ext cx="3931920" cy="4572000"/>
+          </a:xfrm>
+          <a:prstGeom prst="rect">
+            <a:avLst/>
+          </a:prstGeom>
+          <a:noFill/>
+        </p:spPr>
+        <p:txBody>
+          <a:bodyPr wrap="square">
+            <a:spAutoFit/>
+          </a:bodyPr>
+          <a:lstStyle/>
+          <a:p>
+            <a:pPr algn="l">
+              <a:spcAft>
+                <a:spcPts val="1000"/>
+              </a:spcAft>
+            </a:pPr>
+            <a:r>
+              <a:rPr sz="1900" b="1" i="0">
+                <a:solidFill>
+                  <a:srgbClr val="2E7D32"/>
+                </a:solidFill>
+                <a:latin typeface="Calibri"/>
+              </a:rPr>
+              <a:t>• 12 of 21 real drums located within the accuracy gate.</a:t>
+            </a:r>
+          </a:p>
+          <a:p>
+            <a:pPr algn="l">
+              <a:spcAft>
+                <a:spcPts val="1000"/>
+              </a:spcAft>
+            </a:pPr>
+            <a:r>
+              <a:rPr sz="1900" b="0" i="0">
+                <a:solidFill>
+                  <a:srgbClr val="1F2D3D"/>
+                </a:solidFill>
+                <a:latin typeface="Calibri"/>
+              </a:rPr>
+              <a:t>• Direction right on 16 of 21 drums.</a:t>
+            </a:r>
+          </a:p>
+          <a:p>
+            <a:pPr algn="l">
+              <a:spcAft>
+                <a:spcPts val="1000"/>
+              </a:spcAft>
+            </a:pPr>
+            <a:r>
+              <a:rPr sz="1900" b="0" i="0">
+                <a:solidFill>
+                  <a:srgbClr val="1F2D3D"/>
+                </a:solidFill>
+                <a:latin typeface="Calibri"/>
+              </a:rPr>
+              <a:t>• The geometric methods scored 0 on this kind of drum.</a:t>
+            </a:r>
+          </a:p>
+          <a:p>
+            <a:pPr algn="l">
+              <a:spcAft>
+                <a:spcPts val="1000"/>
+              </a:spcAft>
+            </a:pPr>
+            <a:r>
+              <a:rPr sz="1700" b="0" i="0">
+                <a:solidFill>
+                  <a:srgbClr val="555555"/>
+                </a:solidFill>
+                <a:latin typeface="Calibri"/>
+              </a:rPr>
+              <a:t>• Open point: BarrelNet estimates the pose of a drum it is given — finding the drums in the pile still needs a separate first step.</a:t>
+            </a:r>
+          </a:p>
+        </p:txBody>
+      </p:sp>
+      <p:sp>
+        <p:nvSpPr>
+          <p:cNvPr id="7" name="TextBox 6"/>
+          <p:cNvSpPr txBox="1"/>
+          <p:nvPr/>
+        </p:nvSpPr>
+        <p:spPr>
+          <a:xfrm>
+            <a:off x="365760" y="6473952"/>
+            <a:ext cx="10972800" cy="320040"/>
+          </a:xfrm>
+          <a:prstGeom prst="rect">
+            <a:avLst/>
+          </a:prstGeom>
+          <a:noFill/>
+        </p:spPr>
+        <p:txBody>
+          <a:bodyPr wrap="square">
+            <a:spAutoFit/>
+          </a:bodyPr>
+          <a:lstStyle/>
+          <a:p>
+            <a:pPr algn="l">
+              <a:spcAft>
+                <a:spcPts val="800"/>
+              </a:spcAft>
+            </a:pPr>
+            <a:r>
+              <a:rPr sz="1000" b="0" i="0">
+                <a:solidFill>
+                  <a:srgbClr val="555555"/>
+                </a:solidFill>
+                <a:latin typeface="Calibri"/>
+              </a:rPr>
+              <a:t>Detection and Robotic Manipulation of Partially Occluded Object(s)</a:t>
+            </a:r>
+          </a:p>
+        </p:txBody>
+      </p:sp>
+      <p:sp>
+        <p:nvSpPr>
+          <p:cNvPr id="8" name="TextBox 7"/>
+          <p:cNvSpPr txBox="1"/>
+          <p:nvPr/>
+        </p:nvSpPr>
+        <p:spPr>
+          <a:xfrm>
+            <a:off x="11521440" y="6473952"/>
+            <a:ext cx="548640" cy="320040"/>
+          </a:xfrm>
+          <a:prstGeom prst="rect">
+            <a:avLst/>
+          </a:prstGeom>
+          <a:noFill/>
+        </p:spPr>
+        <p:txBody>
+          <a:bodyPr wrap="square">
+            <a:spAutoFit/>
+          </a:bodyPr>
+          <a:lstStyle/>
+          <a:p>
+            <a:pPr algn="r">
+              <a:spcAft>
+                <a:spcPts val="800"/>
+              </a:spcAft>
+            </a:pPr>
+            <a:r>
+              <a:rPr sz="1100" b="0" i="0">
+                <a:solidFill>
+                  <a:srgbClr val="555555"/>
+                </a:solidFill>
+                <a:latin typeface="Calibri"/>
+              </a:rPr>
+              <a:t>13</a:t>
+            </a:r>
+          </a:p>
+        </p:txBody>
+      </p:sp>
+    </p:spTree>
+  </p:cSld>
+  <p:clrMapOvr>
+    <a:masterClrMapping/>
+  </p:clrMapOvr>
+</p:sld>
+</file>
+
+<file path=ppt/slides/slide15.xml><?xml version="1.0" encoding="utf-8"?>
+<p:sld xmlns:a="http://schemas.openxmlformats.org/drawingml/2006/main" xmlns:p="http://schemas.openxmlformats.org/presentationml/2006/main" xmlns:r="http://schemas.openxmlformats.org/officeDocument/2006/relationships">
+  <p:cSld>
+    <p:spTree>
+      <p:nvGrpSpPr>
+        <p:cNvPr id="1" name=""/>
+        <p:cNvGrpSpPr/>
+        <p:nvPr/>
+      </p:nvGrpSpPr>
+      <p:grpSpPr/>
+      <p:sp>
+        <p:nvSpPr>
+          <p:cNvPr id="2" name="Rectangle 1"/>
+          <p:cNvSpPr/>
+          <p:nvPr/>
+        </p:nvSpPr>
+        <p:spPr>
+          <a:xfrm>
+            <a:off x="0" y="0"/>
+            <a:ext cx="12191695" cy="1051560"/>
+          </a:xfrm>
+          <a:prstGeom prst="rect">
+            <a:avLst/>
+          </a:prstGeom>
+          <a:solidFill>
+            <a:srgbClr val="0B5C8A"/>
+          </a:solidFill>
+          <a:ln>
+            <a:noFill/>
+          </a:ln>
+          <a:effectLst/>
+        </p:spPr>
+        <p:style>
+          <a:lnRef idx="1">
+            <a:schemeClr val="accent1"/>
+          </a:lnRef>
+          <a:fillRef idx="3">
+            <a:schemeClr val="accent1"/>
+          </a:fillRef>
+          <a:effectRef idx="2">
+            <a:schemeClr val="accent1"/>
+          </a:effectRef>
+          <a:fontRef idx="minor">
+            <a:schemeClr val="lt1"/>
+          </a:fontRef>
+        </p:style>
+        <p:txBody>
+          <a:bodyPr rtlCol="0" anchor="ctr"/>
+          <a:lstStyle/>
+          <a:p>
+            <a:pPr algn="ctr"/>
+          </a:p>
+        </p:txBody>
+      </p:sp>
+      <p:sp>
+        <p:nvSpPr>
+          <p:cNvPr id="3" name="TextBox 2"/>
+          <p:cNvSpPr txBox="1"/>
+          <p:nvPr/>
+        </p:nvSpPr>
+        <p:spPr>
+          <a:xfrm>
+            <a:off x="457200" y="91440"/>
+            <a:ext cx="11247120" cy="914400"/>
+          </a:xfrm>
+          <a:prstGeom prst="rect">
+            <a:avLst/>
+          </a:prstGeom>
+          <a:noFill/>
+        </p:spPr>
+        <p:txBody>
+          <a:bodyPr wrap="square">
+            <a:spAutoFit/>
+          </a:bodyPr>
+          <a:lstStyle/>
+          <a:p>
+            <a:pPr algn="l">
+              <a:spcAft>
+                <a:spcPts val="800"/>
+              </a:spcAft>
+            </a:pPr>
+            <a:r>
+              <a:rPr sz="3000" b="1" i="0">
+                <a:solidFill>
+                  <a:srgbClr val="FFFFFF"/>
+                </a:solidFill>
+                <a:latin typeface="Calibri"/>
+              </a:rPr>
+              <a:t>What limits the evaluation today</a:t>
+            </a:r>
+          </a:p>
+        </p:txBody>
+      </p:sp>
+      <p:sp>
+        <p:nvSpPr>
+          <p:cNvPr id="4" name="TextBox 3"/>
+          <p:cNvSpPr txBox="1"/>
+          <p:nvPr/>
+        </p:nvSpPr>
+        <p:spPr>
+          <a:xfrm>
+            <a:off x="502920" y="1417320"/>
+            <a:ext cx="11247120" cy="4297680"/>
+          </a:xfrm>
+          <a:prstGeom prst="rect">
+            <a:avLst/>
+          </a:prstGeom>
+          <a:noFill/>
+        </p:spPr>
+        <p:txBody>
+          <a:bodyPr wrap="square">
+            <a:spAutoFit/>
+          </a:bodyPr>
+          <a:lstStyle/>
+          <a:p>
+            <a:pPr algn="l">
+              <a:spcAft>
+                <a:spcPts val="1000"/>
+              </a:spcAft>
+            </a:pPr>
+            <a:r>
+              <a:rPr sz="2100" b="0" i="0">
+                <a:solidFill>
+                  <a:srgbClr val="1F2D3D"/>
+                </a:solidFill>
+                <a:latin typeface="Calibri"/>
+              </a:rPr>
+              <a:t>• Our synthetic scenes still cannot imitate a truly buried, cluttered pile.</a:t>
+            </a:r>
+          </a:p>
+          <a:p>
+            <a:pPr algn="l">
+              <a:spcAft>
+                <a:spcPts val="1000"/>
+              </a:spcAft>
+            </a:pPr>
+            <a:r>
+              <a:rPr sz="2100" b="0" i="0">
+                <a:solidFill>
+                  <a:srgbClr val="1F2D3D"/>
+                </a:solidFill>
+                <a:latin typeface="Calibri"/>
+              </a:rPr>
+              <a:t>• Real sensor noise is structured, not the clean random noise we simulate.</a:t>
+            </a:r>
+          </a:p>
+          <a:p>
+            <a:pPr algn="l">
+              <a:spcAft>
+                <a:spcPts val="1000"/>
+              </a:spcAft>
+            </a:pPr>
+            <a:r>
+              <a:rPr sz="2100" b="0" i="0">
+                <a:solidFill>
+                  <a:srgbClr val="1F2D3D"/>
+                </a:solidFill>
+                <a:latin typeface="Calibri"/>
+              </a:rPr>
+              <a:t>• Only 21 real drums are labelled (~30% of the pile) — too few for strong statistics.</a:t>
+            </a:r>
+          </a:p>
+          <a:p>
+            <a:pPr algn="l">
+              <a:spcAft>
+                <a:spcPts val="1000"/>
+              </a:spcAft>
+            </a:pPr>
+            <a:r>
+              <a:rPr sz="2100" b="0" i="0">
+                <a:solidFill>
+                  <a:srgbClr val="1F2D3D"/>
+                </a:solidFill>
+                <a:latin typeface="Calibri"/>
+              </a:rPr>
+              <a:t>• Some labels are imperfect: two drums lying end-to-end were annotated as one.</a:t>
+            </a:r>
+          </a:p>
+        </p:txBody>
+      </p:sp>
+      <p:sp>
+        <p:nvSpPr>
+          <p:cNvPr id="5" name="Rectangle 4"/>
+          <p:cNvSpPr/>
+          <p:nvPr/>
+        </p:nvSpPr>
+        <p:spPr>
+          <a:xfrm>
+            <a:off x="365760" y="5897880"/>
+            <a:ext cx="11475720" cy="502920"/>
+          </a:xfrm>
+          <a:prstGeom prst="rect">
+            <a:avLst/>
+          </a:prstGeom>
+          <a:solidFill>
+            <a:srgbClr val="E3EEF5"/>
+          </a:solidFill>
+          <a:ln w="19050">
+            <a:solidFill>
+              <a:srgbClr val="0B5C8A"/>
+            </a:solidFill>
+          </a:ln>
+          <a:effectLst/>
+        </p:spPr>
+        <p:style>
+          <a:lnRef idx="1">
+            <a:schemeClr val="accent1"/>
+          </a:lnRef>
+          <a:fillRef idx="3">
+            <a:schemeClr val="accent1"/>
+          </a:fillRef>
+          <a:effectRef idx="2">
+            <a:schemeClr val="accent1"/>
+          </a:effectRef>
+          <a:fontRef idx="minor">
+            <a:schemeClr val="lt1"/>
+          </a:fontRef>
+        </p:style>
+        <p:txBody>
+          <a:bodyPr rtlCol="0" anchor="ctr" wrap="square" tIns="25400" bIns="25400"/>
+          <a:lstStyle/>
+          <a:p>
+            <a:pPr algn="ctr">
+              <a:spcAft>
+                <a:spcPts val="800"/>
+              </a:spcAft>
+            </a:pPr>
+            <a:r>
+              <a:rPr sz="2000" b="1" i="0">
+                <a:solidFill>
+                  <a:srgbClr val="0B5C8A"/>
+                </a:solidFill>
+                <a:latin typeface="Calibri"/>
+              </a:rPr>
+              <a:t>The evaluation machinery works — what is missing is more and better ground-truth data.</a:t>
+            </a:r>
+          </a:p>
+        </p:txBody>
+      </p:sp>
+      <p:sp>
+        <p:nvSpPr>
+          <p:cNvPr id="6" name="TextBox 5"/>
+          <p:cNvSpPr txBox="1"/>
+          <p:nvPr/>
+        </p:nvSpPr>
+        <p:spPr>
+          <a:xfrm>
+            <a:off x="365760" y="6473952"/>
+            <a:ext cx="10972800" cy="320040"/>
+          </a:xfrm>
+          <a:prstGeom prst="rect">
+            <a:avLst/>
+          </a:prstGeom>
+          <a:noFill/>
+        </p:spPr>
+        <p:txBody>
+          <a:bodyPr wrap="square">
+            <a:spAutoFit/>
+          </a:bodyPr>
+          <a:lstStyle/>
+          <a:p>
+            <a:pPr algn="l">
+              <a:spcAft>
+                <a:spcPts val="800"/>
+              </a:spcAft>
+            </a:pPr>
+            <a:r>
+              <a:rPr sz="1000" b="0" i="0">
+                <a:solidFill>
+                  <a:srgbClr val="555555"/>
+                </a:solidFill>
+                <a:latin typeface="Calibri"/>
+              </a:rPr>
+              <a:t>Detection and Robotic Manipulation of Partially Occluded Object(s)</a:t>
+            </a:r>
+          </a:p>
+        </p:txBody>
+      </p:sp>
+      <p:sp>
+        <p:nvSpPr>
+          <p:cNvPr id="7" name="TextBox 6"/>
+          <p:cNvSpPr txBox="1"/>
+          <p:nvPr/>
+        </p:nvSpPr>
+        <p:spPr>
+          <a:xfrm>
+            <a:off x="11521440" y="6473952"/>
+            <a:ext cx="548640" cy="320040"/>
+          </a:xfrm>
+          <a:prstGeom prst="rect">
+            <a:avLst/>
+          </a:prstGeom>
+          <a:noFill/>
+        </p:spPr>
+        <p:txBody>
+          <a:bodyPr wrap="square">
+            <a:spAutoFit/>
+          </a:bodyPr>
+          <a:lstStyle/>
+          <a:p>
+            <a:pPr algn="r">
+              <a:spcAft>
+                <a:spcPts val="800"/>
+              </a:spcAft>
+            </a:pPr>
+            <a:r>
+              <a:rPr sz="1100" b="0" i="0">
+                <a:solidFill>
+                  <a:srgbClr val="555555"/>
+                </a:solidFill>
+                <a:latin typeface="Calibri"/>
+              </a:rPr>
+              <a:t>14</a:t>
+            </a:r>
+          </a:p>
+        </p:txBody>
+      </p:sp>
+    </p:spTree>
+  </p:cSld>
+  <p:clrMapOvr>
+    <a:masterClrMapping/>
+  </p:clrMapOvr>
+</p:sld>
+</file>
+
+<file path=ppt/slides/slide16.xml><?xml version="1.0" encoding="utf-8"?>
+<p:sld xmlns:a="http://schemas.openxmlformats.org/drawingml/2006/main" xmlns:p="http://schemas.openxmlformats.org/presentationml/2006/main" xmlns:r="http://schemas.openxmlformats.org/officeDocument/2006/relationships">
+  <p:cSld>
+    <p:spTree>
+      <p:nvGrpSpPr>
+        <p:cNvPr id="1" name=""/>
+        <p:cNvGrpSpPr/>
+        <p:nvPr/>
+      </p:nvGrpSpPr>
+      <p:grpSpPr/>
+      <p:sp>
+        <p:nvSpPr>
+          <p:cNvPr id="2" name="Rectangle 1"/>
+          <p:cNvSpPr/>
+          <p:nvPr/>
+        </p:nvSpPr>
+        <p:spPr>
+          <a:xfrm>
+            <a:off x="0" y="0"/>
+            <a:ext cx="12191695" cy="1051560"/>
+          </a:xfrm>
+          <a:prstGeom prst="rect">
+            <a:avLst/>
+          </a:prstGeom>
+          <a:solidFill>
+            <a:srgbClr val="0B5C8A"/>
+          </a:solidFill>
+          <a:ln>
+            <a:noFill/>
+          </a:ln>
+          <a:effectLst/>
+        </p:spPr>
+        <p:style>
+          <a:lnRef idx="1">
+            <a:schemeClr val="accent1"/>
+          </a:lnRef>
+          <a:fillRef idx="3">
+            <a:schemeClr val="accent1"/>
+          </a:fillRef>
+          <a:effectRef idx="2">
+            <a:schemeClr val="accent1"/>
+          </a:effectRef>
+          <a:fontRef idx="minor">
+            <a:schemeClr val="lt1"/>
+          </a:fontRef>
+        </p:style>
+        <p:txBody>
+          <a:bodyPr rtlCol="0" anchor="ctr"/>
+          <a:lstStyle/>
+          <a:p>
+            <a:pPr algn="ctr"/>
+          </a:p>
+        </p:txBody>
+      </p:sp>
+      <p:sp>
+        <p:nvSpPr>
+          <p:cNvPr id="3" name="TextBox 2"/>
+          <p:cNvSpPr txBox="1"/>
+          <p:nvPr/>
+        </p:nvSpPr>
+        <p:spPr>
+          <a:xfrm>
+            <a:off x="457200" y="91440"/>
+            <a:ext cx="11247120" cy="914400"/>
+          </a:xfrm>
+          <a:prstGeom prst="rect">
+            <a:avLst/>
+          </a:prstGeom>
+          <a:noFill/>
+        </p:spPr>
+        <p:txBody>
+          <a:bodyPr wrap="square">
+            <a:spAutoFit/>
+          </a:bodyPr>
+          <a:lstStyle/>
+          <a:p>
+            <a:pPr algn="l">
+              <a:spcAft>
+                <a:spcPts val="800"/>
+              </a:spcAft>
+            </a:pPr>
+            <a:r>
+              <a:rPr sz="3000" b="1" i="0">
+                <a:solidFill>
+                  <a:srgbClr val="FFFFFF"/>
+                </a:solidFill>
+                <a:latin typeface="Calibri"/>
+              </a:rPr>
+              <a:t>Next step: simulation closes the data gap</a:t>
+            </a:r>
+          </a:p>
+          <a:p>
+            <a:pPr algn="l">
+              <a:spcAft>
+                <a:spcPts val="800"/>
+              </a:spcAft>
+            </a:pPr>
+            <a:r>
+              <a:rPr sz="1700" b="0" i="0">
+                <a:solidFill>
+                  <a:srgbClr val="D6E6F0"/>
+                </a:solidFill>
+                <a:latin typeface="Calibri"/>
+              </a:rPr>
+              <a:t>NVIDIA Isaac Sim gives unlimited scenes with perfect ground truth</a:t>
+            </a:r>
+          </a:p>
+        </p:txBody>
+      </p:sp>
+      <p:pic>
+        <p:nvPicPr>
+          <p:cNvPr id="4" name="Picture 3" descr="roadmap.png"/>
+          <p:cNvPicPr>
+            <a:picLocks noChangeAspect="1"/>
+          </p:cNvPicPr>
+          <p:nvPr/>
+        </p:nvPicPr>
+        <p:blipFill>
+          <a:blip r:embed="rId2"/>
+          <a:stretch>
+            <a:fillRect/>
+          </a:stretch>
+        </p:blipFill>
+        <p:spPr>
+          <a:xfrm>
+            <a:off x="2412515" y="1463040"/>
+            <a:ext cx="7336489" cy="2377440"/>
+          </a:xfrm>
+          <a:prstGeom prst="rect">
+            <a:avLst/>
+          </a:prstGeom>
+        </p:spPr>
+      </p:pic>
+      <p:sp>
+        <p:nvSpPr>
+          <p:cNvPr id="5" name="TextBox 4"/>
+          <p:cNvSpPr txBox="1"/>
+          <p:nvPr/>
+        </p:nvSpPr>
+        <p:spPr>
+          <a:xfrm>
+            <a:off x="548640" y="3977639"/>
+            <a:ext cx="11155680" cy="1828800"/>
+          </a:xfrm>
+          <a:prstGeom prst="rect">
+            <a:avLst/>
+          </a:prstGeom>
+          <a:noFill/>
+        </p:spPr>
+        <p:txBody>
+          <a:bodyPr wrap="square">
+            <a:spAutoFit/>
+          </a:bodyPr>
+          <a:lstStyle/>
+          <a:p>
+            <a:pPr algn="l">
+              <a:spcAft>
+                <a:spcPts val="1000"/>
+              </a:spcAft>
+            </a:pPr>
+            <a:r>
+              <a:rPr sz="2000" b="0" i="0">
+                <a:solidFill>
+                  <a:srgbClr val="1F2D3D"/>
+                </a:solidFill>
+                <a:latin typeface="Calibri"/>
+              </a:rPr>
+              <a:t>• Every simulated drum comes with its exact pose and its exact degree of burial — labels for free.</a:t>
+            </a:r>
+          </a:p>
+          <a:p>
+            <a:pPr algn="l">
+              <a:spcAft>
+                <a:spcPts val="1000"/>
+              </a:spcAft>
+            </a:pPr>
+            <a:r>
+              <a:rPr sz="2000" b="0" i="0">
+                <a:solidFill>
+                  <a:srgbClr val="1F2D3D"/>
+                </a:solidFill>
+                <a:latin typeface="Calibri"/>
+              </a:rPr>
+              <a:t>• That enables the headline experiment: detection quality as a function of how much of the drum is hidden.</a:t>
+            </a:r>
+          </a:p>
+          <a:p>
+            <a:pPr algn="l">
+              <a:spcAft>
+                <a:spcPts val="1000"/>
+              </a:spcAft>
+            </a:pPr>
+            <a:r>
+              <a:rPr sz="2000" b="0" i="0">
+                <a:solidFill>
+                  <a:srgbClr val="1F2D3D"/>
+                </a:solidFill>
+                <a:latin typeface="Calibri"/>
+              </a:rPr>
+              <a:t>• And it unlocks the remaining families: more learned methods and camera + LiDAR fusion.</a:t>
+            </a:r>
+          </a:p>
+        </p:txBody>
+      </p:sp>
+      <p:sp>
+        <p:nvSpPr>
+          <p:cNvPr id="6" name="TextBox 5"/>
+          <p:cNvSpPr txBox="1"/>
+          <p:nvPr/>
+        </p:nvSpPr>
+        <p:spPr>
+          <a:xfrm>
+            <a:off x="365760" y="6473952"/>
+            <a:ext cx="10972800" cy="320040"/>
+          </a:xfrm>
+          <a:prstGeom prst="rect">
+            <a:avLst/>
+          </a:prstGeom>
+          <a:noFill/>
+        </p:spPr>
+        <p:txBody>
+          <a:bodyPr wrap="square">
+            <a:spAutoFit/>
+          </a:bodyPr>
+          <a:lstStyle/>
+          <a:p>
+            <a:pPr algn="l">
+              <a:spcAft>
+                <a:spcPts val="800"/>
+              </a:spcAft>
+            </a:pPr>
+            <a:r>
+              <a:rPr sz="1000" b="0" i="0">
+                <a:solidFill>
+                  <a:srgbClr val="555555"/>
+                </a:solidFill>
+                <a:latin typeface="Calibri"/>
+              </a:rPr>
+              <a:t>Detection and Robotic Manipulation of Partially Occluded Object(s)</a:t>
+            </a:r>
+          </a:p>
+        </p:txBody>
+      </p:sp>
+      <p:sp>
+        <p:nvSpPr>
+          <p:cNvPr id="7" name="TextBox 6"/>
+          <p:cNvSpPr txBox="1"/>
+          <p:nvPr/>
+        </p:nvSpPr>
+        <p:spPr>
+          <a:xfrm>
+            <a:off x="11521440" y="6473952"/>
+            <a:ext cx="548640" cy="320040"/>
+          </a:xfrm>
+          <a:prstGeom prst="rect">
+            <a:avLst/>
+          </a:prstGeom>
+          <a:noFill/>
+        </p:spPr>
+        <p:txBody>
+          <a:bodyPr wrap="square">
+            <a:spAutoFit/>
+          </a:bodyPr>
+          <a:lstStyle/>
+          <a:p>
+            <a:pPr algn="r">
+              <a:spcAft>
+                <a:spcPts val="800"/>
+              </a:spcAft>
+            </a:pPr>
+            <a:r>
+              <a:rPr sz="1100" b="0" i="0">
+                <a:solidFill>
+                  <a:srgbClr val="555555"/>
+                </a:solidFill>
+                <a:latin typeface="Calibri"/>
+              </a:rPr>
+              <a:t>15</a:t>
+            </a:r>
+          </a:p>
+        </p:txBody>
+      </p:sp>
+    </p:spTree>
+  </p:cSld>
+  <p:clrMapOvr>
+    <a:masterClrMapping/>
+  </p:clrMapOvr>
+</p:sld>
+</file>
+
+<file path=ppt/slides/slide17.xml><?xml version="1.0" encoding="utf-8"?>
+<p:sld xmlns:a="http://schemas.openxmlformats.org/drawingml/2006/main" xmlns:p="http://schemas.openxmlformats.org/presentationml/2006/main" xmlns:r="http://schemas.openxmlformats.org/officeDocument/2006/relationships">
+  <p:cSld>
+    <p:spTree>
+      <p:nvGrpSpPr>
+        <p:cNvPr id="1" name=""/>
+        <p:cNvGrpSpPr/>
+        <p:nvPr/>
+      </p:nvGrpSpPr>
+      <p:grpSpPr/>
+      <p:sp>
+        <p:nvSpPr>
+          <p:cNvPr id="2" name="Rectangle 1"/>
+          <p:cNvSpPr/>
+          <p:nvPr/>
+        </p:nvSpPr>
+        <p:spPr>
+          <a:xfrm>
+            <a:off x="0" y="0"/>
+            <a:ext cx="12191695" cy="1051560"/>
+          </a:xfrm>
+          <a:prstGeom prst="rect">
+            <a:avLst/>
+          </a:prstGeom>
+          <a:solidFill>
+            <a:srgbClr val="0B5C8A"/>
+          </a:solidFill>
+          <a:ln>
+            <a:noFill/>
+          </a:ln>
+          <a:effectLst/>
+        </p:spPr>
+        <p:style>
+          <a:lnRef idx="1">
+            <a:schemeClr val="accent1"/>
+          </a:lnRef>
+          <a:fillRef idx="3">
+            <a:schemeClr val="accent1"/>
+          </a:fillRef>
+          <a:effectRef idx="2">
+            <a:schemeClr val="accent1"/>
+          </a:effectRef>
+          <a:fontRef idx="minor">
+            <a:schemeClr val="lt1"/>
+          </a:fontRef>
+        </p:style>
+        <p:txBody>
+          <a:bodyPr rtlCol="0" anchor="ctr"/>
+          <a:lstStyle/>
+          <a:p>
+            <a:pPr algn="ctr"/>
+          </a:p>
+        </p:txBody>
+      </p:sp>
+      <p:sp>
+        <p:nvSpPr>
+          <p:cNvPr id="3" name="TextBox 2"/>
+          <p:cNvSpPr txBox="1"/>
+          <p:nvPr/>
+        </p:nvSpPr>
+        <p:spPr>
+          <a:xfrm>
+            <a:off x="457200" y="91440"/>
+            <a:ext cx="11247120" cy="914400"/>
+          </a:xfrm>
+          <a:prstGeom prst="rect">
+            <a:avLst/>
+          </a:prstGeom>
+          <a:noFill/>
+        </p:spPr>
+        <p:txBody>
+          <a:bodyPr wrap="square">
+            <a:spAutoFit/>
+          </a:bodyPr>
+          <a:lstStyle/>
+          <a:p>
+            <a:pPr algn="l">
+              <a:spcAft>
+                <a:spcPts val="800"/>
+              </a:spcAft>
+            </a:pPr>
+            <a:r>
+              <a:rPr sz="3000" b="1" i="0">
+                <a:solidFill>
+                  <a:srgbClr val="FFFFFF"/>
+                </a:solidFill>
+                <a:latin typeface="Calibri"/>
+              </a:rPr>
+              <a:t>Open risks — and how we deal with them</a:t>
+            </a:r>
+          </a:p>
+        </p:txBody>
+      </p:sp>
+      <p:graphicFrame>
+        <p:nvGraphicFramePr>
+          <p:cNvPr id="4" name="Table 3"/>
+          <p:cNvGraphicFramePr>
+            <a:graphicFrameLocks noGrp="1"/>
+          </p:cNvGraphicFramePr>
+          <p:nvPr/>
+        </p:nvGraphicFramePr>
+        <p:xfrm>
+          <a:off x="411480" y="1371600"/>
+          <a:ext cx="11384280" cy="4297680"/>
+        </p:xfrm>
+        <a:graphic>
+          <a:graphicData uri="http://schemas.openxmlformats.org/drawingml/2006/table">
+            <a:tbl>
+              <a:tblPr firstRow="1" bandRow="1">
+                <a:tableStyleId>{5C22544A-7EE6-4342-B048-85BDC9FD1C3A}</a:tableStyleId>
+              </a:tblPr>
+              <a:tblGrid>
+                <a:gridCol w="5212080"/>
+                <a:gridCol w="6172200"/>
+              </a:tblGrid>
+              <a:tr h="859536">
+                <a:tc>
+                  <a:txBody>
+                    <a:bodyPr/>
+                    <a:lstStyle/>
+                    <a:p>
+                      <a:pPr algn="l"/>
+                      <a:r>
+                        <a:rPr sz="1700" b="1">
+                          <a:solidFill>
+                            <a:srgbClr val="FFFFFF"/>
+                          </a:solidFill>
+                          <a:latin typeface="Calibri"/>
+                        </a:rPr>
+                        <a:t>Risk</a:t>
+                      </a:r>
+                    </a:p>
+                  </a:txBody>
+                  <a:tcPr anchor="ctr" marT="38100" marB="38100">
+                    <a:solidFill>
+                      <a:srgbClr val="0B5C8A"/>
+                    </a:solidFill>
+                  </a:tcPr>
+                </a:tc>
+                <a:tc>
+                  <a:txBody>
+                    <a:bodyPr/>
+                    <a:lstStyle/>
+                    <a:p>
+                      <a:pPr algn="ctr"/>
+                      <a:r>
+                        <a:rPr sz="1700" b="1">
+                          <a:solidFill>
+                            <a:srgbClr val="FFFFFF"/>
+                          </a:solidFill>
+                          <a:latin typeface="Calibri"/>
+                        </a:rPr>
+                        <a:t>How we deal with it</a:t>
+                      </a:r>
+                    </a:p>
+                  </a:txBody>
+                  <a:tcPr anchor="ctr" marT="38100" marB="38100">
+                    <a:solidFill>
+                      <a:srgbClr val="0B5C8A"/>
+                    </a:solidFill>
+                  </a:tcPr>
+                </a:tc>
+              </a:tr>
+              <a:tr h="859536">
+                <a:tc>
+                  <a:txBody>
+                    <a:bodyPr/>
+                    <a:lstStyle/>
+                    <a:p>
+                      <a:pPr algn="l"/>
+                      <a:r>
+                        <a:rPr sz="1600" b="0">
+                          <a:solidFill>
+                            <a:srgbClr val="1F2D3D"/>
+                          </a:solidFill>
+                          <a:latin typeface="Calibri"/>
+                        </a:rPr>
+                        <a:t>Detection accuracy collapses under occlusion (seen across the field, e.g. −47% for LiDAR-only in a 2025 study)</a:t>
+                      </a:r>
+                    </a:p>
+                  </a:txBody>
+                  <a:tcPr anchor="ctr" marT="38100" marB="38100">
+                    <a:solidFill>
+                      <a:srgbClr val="F2F5F8"/>
+                    </a:solidFill>
+                  </a:tcPr>
+                </a:tc>
+                <a:tc>
+                  <a:txBody>
+                    <a:bodyPr/>
+                    <a:lstStyle/>
+                    <a:p>
+                      <a:pPr algn="ctr"/>
+                      <a:r>
+                        <a:rPr sz="1600" b="0">
+                          <a:solidFill>
+                            <a:srgbClr val="1F2D3D"/>
+                          </a:solidFill>
+                          <a:latin typeface="Calibri"/>
+                        </a:rPr>
+                        <a:t>Measure it systematically per method (occlusion sweep) instead of assuming — that comparison IS the thesis.</a:t>
+                      </a:r>
+                    </a:p>
+                  </a:txBody>
+                  <a:tcPr anchor="ctr" marT="38100" marB="38100">
+                    <a:solidFill>
+                      <a:srgbClr val="F2F5F8"/>
+                    </a:solidFill>
+                  </a:tcPr>
+                </a:tc>
+              </a:tr>
+              <a:tr h="859536">
+                <a:tc>
+                  <a:txBody>
+                    <a:bodyPr/>
+                    <a:lstStyle/>
+                    <a:p>
+                      <a:pPr algn="l"/>
+                      <a:r>
+                        <a:rPr sz="1600" b="0">
+                          <a:solidFill>
+                            <a:srgbClr val="1F2D3D"/>
+                          </a:solidFill>
+                          <a:latin typeface="Calibri"/>
+                        </a:rPr>
+                        <a:t>One sensor alone may never be reliable enough</a:t>
+                      </a:r>
+                    </a:p>
+                  </a:txBody>
+                  <a:tcPr anchor="ctr" marT="38100" marB="38100">
+                    <a:solidFill>
+                      <a:srgbClr val="FFFFFF"/>
+                    </a:solidFill>
+                  </a:tcPr>
+                </a:tc>
+                <a:tc>
+                  <a:txBody>
+                    <a:bodyPr/>
+                    <a:lstStyle/>
+                    <a:p>
+                      <a:pPr algn="ctr"/>
+                      <a:r>
+                        <a:rPr sz="1600" b="0">
+                          <a:solidFill>
+                            <a:srgbClr val="1F2D3D"/>
+                          </a:solidFill>
+                          <a:latin typeface="Calibri"/>
+                        </a:rPr>
+                        <a:t>Camera + LiDAR fusion is planned; literature shows fusion degrades far more gracefully.</a:t>
+                      </a:r>
+                    </a:p>
+                  </a:txBody>
+                  <a:tcPr anchor="ctr" marT="38100" marB="38100">
+                    <a:solidFill>
+                      <a:srgbClr val="FFFFFF"/>
+                    </a:solidFill>
+                  </a:tcPr>
+                </a:tc>
+              </a:tr>
+              <a:tr h="859536">
+                <a:tc>
+                  <a:txBody>
+                    <a:bodyPr/>
+                    <a:lstStyle/>
+                    <a:p>
+                      <a:pPr algn="l"/>
+                      <a:r>
+                        <a:rPr sz="1600" b="0">
+                          <a:solidFill>
+                            <a:srgbClr val="1F2D3D"/>
+                          </a:solidFill>
+                          <a:latin typeface="Calibri"/>
+                        </a:rPr>
+                        <a:t>Models trained in simulation may not transfer to reality</a:t>
+                      </a:r>
+                    </a:p>
+                  </a:txBody>
+                  <a:tcPr anchor="ctr" marT="38100" marB="38100">
+                    <a:solidFill>
+                      <a:srgbClr val="F2F5F8"/>
+                    </a:solidFill>
+                  </a:tcPr>
+                </a:tc>
+                <a:tc>
+                  <a:txBody>
+                    <a:bodyPr/>
+                    <a:lstStyle/>
+                    <a:p>
+                      <a:pPr algn="ctr"/>
+                      <a:r>
+                        <a:rPr sz="1600" b="0">
+                          <a:solidFill>
+                            <a:srgbClr val="1F2D3D"/>
+                          </a:solidFill>
+                          <a:latin typeface="Calibri"/>
+                        </a:rPr>
+                        <a:t>BarrelNet already measures this transfer on 21 real drums (12/21); next: fine-tune on a handful of real drums.</a:t>
+                      </a:r>
+                    </a:p>
+                  </a:txBody>
+                  <a:tcPr anchor="ctr" marT="38100" marB="38100">
+                    <a:solidFill>
+                      <a:srgbClr val="F2F5F8"/>
+                    </a:solidFill>
+                  </a:tcPr>
+                </a:tc>
+              </a:tr>
+              <a:tr h="859536">
+                <a:tc>
+                  <a:txBody>
+                    <a:bodyPr/>
+                    <a:lstStyle/>
+                    <a:p>
+                      <a:pPr algn="l"/>
+                      <a:r>
+                        <a:rPr sz="1600" b="0">
+                          <a:solidFill>
+                            <a:srgbClr val="1F2D3D"/>
+                          </a:solidFill>
+                          <a:latin typeface="Calibri"/>
+                        </a:rPr>
+                        <a:t>The manipulation half of the title is not started yet</a:t>
+                      </a:r>
+                    </a:p>
+                  </a:txBody>
+                  <a:tcPr anchor="ctr" marT="38100" marB="38100">
+                    <a:solidFill>
+                      <a:srgbClr val="FFFFFF"/>
+                    </a:solidFill>
+                  </a:tcPr>
+                </a:tc>
+                <a:tc>
+                  <a:txBody>
+                    <a:bodyPr/>
+                    <a:lstStyle/>
+                    <a:p>
+                      <a:pPr algn="ctr"/>
+                      <a:r>
+                        <a:rPr sz="1600" b="0">
+                          <a:solidFill>
+                            <a:srgbClr val="1F2D3D"/>
+                          </a:solidFill>
+                          <a:latin typeface="Calibri"/>
+                        </a:rPr>
+                        <a:t>Detection outputs exactly the pose a grasp planner needs; manipulation follows the method comparison.</a:t>
+                      </a:r>
+                    </a:p>
+                  </a:txBody>
+                  <a:tcPr anchor="ctr" marT="38100" marB="38100">
+                    <a:solidFill>
+                      <a:srgbClr val="FFFFFF"/>
+                    </a:solidFill>
+                  </a:tcPr>
+                </a:tc>
+              </a:tr>
+            </a:tbl>
+          </a:graphicData>
+        </a:graphic>
+      </p:graphicFrame>
+      <p:sp>
+        <p:nvSpPr>
+          <p:cNvPr id="5" name="TextBox 4"/>
+          <p:cNvSpPr txBox="1"/>
+          <p:nvPr/>
+        </p:nvSpPr>
+        <p:spPr>
+          <a:xfrm>
+            <a:off x="411480" y="5897880"/>
+            <a:ext cx="11384280" cy="365760"/>
+          </a:xfrm>
+          <a:prstGeom prst="rect">
+            <a:avLst/>
+          </a:prstGeom>
+          <a:noFill/>
+        </p:spPr>
+        <p:txBody>
+          <a:bodyPr wrap="square">
+            <a:spAutoFit/>
+          </a:bodyPr>
+          <a:lstStyle/>
+          <a:p>
+            <a:pPr algn="ctr">
+              <a:spcAft>
+                <a:spcPts val="800"/>
+              </a:spcAft>
+            </a:pPr>
+            <a:r>
+              <a:rPr sz="1200" b="0" i="0">
+                <a:solidFill>
+                  <a:srgbClr val="555555"/>
+                </a:solidFill>
+                <a:latin typeface="Calibri"/>
+              </a:rPr>
+              <a:t>occlusion numbers: [Shi'19] arXiv:1812.04244 · [Kumar'25] arXiv:2511.04347 · [Wang'25] Sensors 25(9):2794</a:t>
+            </a:r>
+          </a:p>
+        </p:txBody>
+      </p:sp>
+      <p:sp>
+        <p:nvSpPr>
+          <p:cNvPr id="6" name="TextBox 5"/>
+          <p:cNvSpPr txBox="1"/>
+          <p:nvPr/>
+        </p:nvSpPr>
+        <p:spPr>
+          <a:xfrm>
+            <a:off x="365760" y="6473952"/>
+            <a:ext cx="10972800" cy="320040"/>
+          </a:xfrm>
+          <a:prstGeom prst="rect">
+            <a:avLst/>
+          </a:prstGeom>
+          <a:noFill/>
+        </p:spPr>
+        <p:txBody>
+          <a:bodyPr wrap="square">
+            <a:spAutoFit/>
+          </a:bodyPr>
+          <a:lstStyle/>
+          <a:p>
+            <a:pPr algn="l">
+              <a:spcAft>
+                <a:spcPts val="800"/>
+              </a:spcAft>
+            </a:pPr>
+            <a:r>
+              <a:rPr sz="1000" b="0" i="0">
+                <a:solidFill>
+                  <a:srgbClr val="555555"/>
+                </a:solidFill>
+                <a:latin typeface="Calibri"/>
+              </a:rPr>
+              <a:t>Detection and Robotic Manipulation of Partially Occluded Object(s)</a:t>
+            </a:r>
+          </a:p>
+        </p:txBody>
+      </p:sp>
+      <p:sp>
+        <p:nvSpPr>
+          <p:cNvPr id="7" name="TextBox 6"/>
+          <p:cNvSpPr txBox="1"/>
+          <p:nvPr/>
+        </p:nvSpPr>
+        <p:spPr>
+          <a:xfrm>
+            <a:off x="11521440" y="6473952"/>
+            <a:ext cx="548640" cy="320040"/>
+          </a:xfrm>
+          <a:prstGeom prst="rect">
+            <a:avLst/>
+          </a:prstGeom>
+          <a:noFill/>
+        </p:spPr>
+        <p:txBody>
+          <a:bodyPr wrap="square">
+            <a:spAutoFit/>
+          </a:bodyPr>
+          <a:lstStyle/>
+          <a:p>
+            <a:pPr algn="r">
+              <a:spcAft>
+                <a:spcPts val="800"/>
+              </a:spcAft>
+            </a:pPr>
+            <a:r>
+              <a:rPr sz="1100" b="0" i="0">
+                <a:solidFill>
+                  <a:srgbClr val="555555"/>
+                </a:solidFill>
+                <a:latin typeface="Calibri"/>
+              </a:rPr>
+              <a:t>16</a:t>
+            </a:r>
+          </a:p>
+        </p:txBody>
+      </p:sp>
+    </p:spTree>
+  </p:cSld>
+  <p:clrMapOvr>
+    <a:masterClrMapping/>
+  </p:clrMapOvr>
+</p:sld>
+</file>
+
+<file path=ppt/slides/slide18.xml><?xml version="1.0" encoding="utf-8"?>
+<p:sld xmlns:a="http://schemas.openxmlformats.org/drawingml/2006/main" xmlns:p="http://schemas.openxmlformats.org/presentationml/2006/main" xmlns:r="http://schemas.openxmlformats.org/officeDocument/2006/relationships">
+  <p:cSld>
+    <p:spTree>
+      <p:nvGrpSpPr>
+        <p:cNvPr id="1" name=""/>
+        <p:cNvGrpSpPr/>
+        <p:nvPr/>
+      </p:nvGrpSpPr>
+      <p:grpSpPr/>
+      <p:sp>
+        <p:nvSpPr>
+          <p:cNvPr id="2" name="Rectangle 1"/>
+          <p:cNvSpPr/>
+          <p:nvPr/>
+        </p:nvSpPr>
+        <p:spPr>
+          <a:xfrm>
+            <a:off x="0" y="0"/>
+            <a:ext cx="12191695" cy="1051560"/>
+          </a:xfrm>
+          <a:prstGeom prst="rect">
+            <a:avLst/>
+          </a:prstGeom>
+          <a:solidFill>
+            <a:srgbClr val="0B5C8A"/>
+          </a:solidFill>
+          <a:ln>
+            <a:noFill/>
+          </a:ln>
+          <a:effectLst/>
+        </p:spPr>
+        <p:style>
+          <a:lnRef idx="1">
+            <a:schemeClr val="accent1"/>
+          </a:lnRef>
+          <a:fillRef idx="3">
+            <a:schemeClr val="accent1"/>
+          </a:fillRef>
+          <a:effectRef idx="2">
+            <a:schemeClr val="accent1"/>
+          </a:effectRef>
+          <a:fontRef idx="minor">
+            <a:schemeClr val="lt1"/>
+          </a:fontRef>
+        </p:style>
+        <p:txBody>
+          <a:bodyPr rtlCol="0" anchor="ctr"/>
+          <a:lstStyle/>
+          <a:p>
+            <a:pPr algn="ctr"/>
+          </a:p>
+        </p:txBody>
+      </p:sp>
+      <p:sp>
+        <p:nvSpPr>
+          <p:cNvPr id="3" name="TextBox 2"/>
+          <p:cNvSpPr txBox="1"/>
+          <p:nvPr/>
+        </p:nvSpPr>
+        <p:spPr>
+          <a:xfrm>
+            <a:off x="457200" y="91440"/>
+            <a:ext cx="11247120" cy="914400"/>
+          </a:xfrm>
+          <a:prstGeom prst="rect">
+            <a:avLst/>
+          </a:prstGeom>
+          <a:noFill/>
+        </p:spPr>
+        <p:txBody>
+          <a:bodyPr wrap="square">
+            <a:spAutoFit/>
+          </a:bodyPr>
+          <a:lstStyle/>
+          <a:p>
+            <a:pPr algn="l">
+              <a:spcAft>
+                <a:spcPts val="800"/>
+              </a:spcAft>
+            </a:pPr>
+            <a:r>
+              <a:rPr sz="3000" b="1" i="0">
+                <a:solidFill>
+                  <a:srgbClr val="FFFFFF"/>
+                </a:solidFill>
+                <a:latin typeface="Calibri"/>
+              </a:rPr>
+              <a:t>Summary</a:t>
+            </a:r>
+          </a:p>
+        </p:txBody>
+      </p:sp>
+      <p:sp>
+        <p:nvSpPr>
+          <p:cNvPr id="4" name="TextBox 3"/>
+          <p:cNvSpPr txBox="1"/>
+          <p:nvPr/>
+        </p:nvSpPr>
+        <p:spPr>
+          <a:xfrm>
+            <a:off x="502920" y="1463040"/>
+            <a:ext cx="11247120" cy="4206240"/>
+          </a:xfrm>
+          <a:prstGeom prst="rect">
+            <a:avLst/>
+          </a:prstGeom>
+          <a:noFill/>
+        </p:spPr>
+        <p:txBody>
+          <a:bodyPr wrap="square">
+            <a:spAutoFit/>
+          </a:bodyPr>
+          <a:lstStyle/>
+          <a:p>
+            <a:pPr algn="l">
+              <a:spcAft>
+                <a:spcPts val="1000"/>
+              </a:spcAft>
+            </a:pPr>
+            <a:r>
+              <a:rPr sz="2200" b="1" i="0">
+                <a:solidFill>
+                  <a:srgbClr val="1F2D3D"/>
+                </a:solidFill>
+                <a:latin typeface="Calibri"/>
+              </a:rPr>
+              <a:t>• One fair evaluation pipeline — every method, same data, same score.</a:t>
+            </a:r>
+          </a:p>
+          <a:p>
+            <a:pPr algn="l">
+              <a:spcAft>
+                <a:spcPts val="1000"/>
+              </a:spcAft>
+            </a:pPr>
+            <a:r>
+              <a:rPr sz="2200" b="0" i="0">
+                <a:solidFill>
+                  <a:srgbClr val="1F2D3D"/>
+                </a:solidFill>
+                <a:latin typeface="Calibri"/>
+              </a:rPr>
+              <a:t>• Four geometry-based methods work well on visible barrels — and all fail on a truly occluded one.</a:t>
+            </a:r>
+          </a:p>
+          <a:p>
+            <a:pPr algn="l">
+              <a:spcAft>
+                <a:spcPts val="1000"/>
+              </a:spcAft>
+            </a:pPr>
+            <a:r>
+              <a:rPr sz="2200" b="0" i="0">
+                <a:solidFill>
+                  <a:srgbClr val="2E7D32"/>
+                </a:solidFill>
+                <a:latin typeface="Calibri"/>
+              </a:rPr>
+              <a:t>• BarrelNet, trained only on synthetic drums, already finds 12 of 21 real occluded drums.</a:t>
+            </a:r>
+          </a:p>
+          <a:p>
+            <a:pPr algn="l">
+              <a:spcAft>
+                <a:spcPts val="1000"/>
+              </a:spcAft>
+            </a:pPr>
+            <a:r>
+              <a:rPr sz="2200" b="0" i="0">
+                <a:solidFill>
+                  <a:srgbClr val="1F2D3D"/>
+                </a:solidFill>
+                <a:latin typeface="Calibri"/>
+              </a:rPr>
+              <a:t>• Next: simulation-generated data for the occlusion sweep, fine-tuning, and sensor fusion.</a:t>
+            </a:r>
+          </a:p>
+        </p:txBody>
+      </p:sp>
+      <p:sp>
+        <p:nvSpPr>
+          <p:cNvPr id="5" name="Rectangle 4"/>
+          <p:cNvSpPr/>
+          <p:nvPr/>
+        </p:nvSpPr>
+        <p:spPr>
+          <a:xfrm>
+            <a:off x="365760" y="5897880"/>
+            <a:ext cx="11475720" cy="502920"/>
+          </a:xfrm>
+          <a:prstGeom prst="rect">
+            <a:avLst/>
+          </a:prstGeom>
+          <a:solidFill>
+            <a:srgbClr val="E3EEF5"/>
+          </a:solidFill>
+          <a:ln w="19050">
+            <a:solidFill>
+              <a:srgbClr val="2E7D32"/>
+            </a:solidFill>
+          </a:ln>
+          <a:effectLst/>
+        </p:spPr>
+        <p:style>
+          <a:lnRef idx="1">
+            <a:schemeClr val="accent1"/>
+          </a:lnRef>
+          <a:fillRef idx="3">
+            <a:schemeClr val="accent1"/>
+          </a:fillRef>
+          <a:effectRef idx="2">
+            <a:schemeClr val="accent1"/>
+          </a:effectRef>
+          <a:fontRef idx="minor">
+            <a:schemeClr val="lt1"/>
+          </a:fontRef>
+        </p:style>
+        <p:txBody>
+          <a:bodyPr rtlCol="0" anchor="ctr" wrap="square" tIns="25400" bIns="25400"/>
+          <a:lstStyle/>
+          <a:p>
+            <a:pPr algn="ctr">
+              <a:spcAft>
+                <a:spcPts val="800"/>
+              </a:spcAft>
+            </a:pPr>
+            <a:r>
+              <a:rPr sz="2000" b="1" i="0">
+                <a:solidFill>
+                  <a:srgbClr val="2E7D32"/>
+                </a:solidFill>
+                <a:latin typeface="Calibri"/>
+              </a:rPr>
+              <a:t>Learned + simulated is the promising path for occluded drums — and we can now measure exactly how promising.</a:t>
+            </a:r>
+          </a:p>
+        </p:txBody>
+      </p:sp>
+      <p:sp>
+        <p:nvSpPr>
+          <p:cNvPr id="6" name="TextBox 5"/>
+          <p:cNvSpPr txBox="1"/>
+          <p:nvPr/>
+        </p:nvSpPr>
+        <p:spPr>
+          <a:xfrm>
+            <a:off x="365760" y="6473952"/>
+            <a:ext cx="10972800" cy="320040"/>
+          </a:xfrm>
+          <a:prstGeom prst="rect">
+            <a:avLst/>
+          </a:prstGeom>
+          <a:noFill/>
+        </p:spPr>
+        <p:txBody>
+          <a:bodyPr wrap="square">
+            <a:spAutoFit/>
+          </a:bodyPr>
+          <a:lstStyle/>
+          <a:p>
+            <a:pPr algn="l">
+              <a:spcAft>
+                <a:spcPts val="800"/>
+              </a:spcAft>
+            </a:pPr>
+            <a:r>
+              <a:rPr sz="1000" b="0" i="0">
+                <a:solidFill>
+                  <a:srgbClr val="555555"/>
+                </a:solidFill>
+                <a:latin typeface="Calibri"/>
+              </a:rPr>
+              <a:t>Detection and Robotic Manipulation of Partially Occluded Object(s)</a:t>
+            </a:r>
+          </a:p>
+        </p:txBody>
+      </p:sp>
+      <p:sp>
+        <p:nvSpPr>
+          <p:cNvPr id="7" name="TextBox 6"/>
+          <p:cNvSpPr txBox="1"/>
+          <p:nvPr/>
+        </p:nvSpPr>
+        <p:spPr>
+          <a:xfrm>
+            <a:off x="11521440" y="6473952"/>
+            <a:ext cx="548640" cy="320040"/>
+          </a:xfrm>
+          <a:prstGeom prst="rect">
+            <a:avLst/>
+          </a:prstGeom>
+          <a:noFill/>
+        </p:spPr>
+        <p:txBody>
+          <a:bodyPr wrap="square">
+            <a:spAutoFit/>
+          </a:bodyPr>
+          <a:lstStyle/>
+          <a:p>
+            <a:pPr algn="r">
+              <a:spcAft>
+                <a:spcPts val="800"/>
+              </a:spcAft>
+            </a:pPr>
+            <a:r>
+              <a:rPr sz="1100" b="0" i="0">
+                <a:solidFill>
+                  <a:srgbClr val="555555"/>
+                </a:solidFill>
+                <a:latin typeface="Calibri"/>
+              </a:rPr>
+              <a:t>17</a:t>
             </a:r>
           </a:p>
         </p:txBody>
@@ -3647,8 +6971,8 @@
         </p:nvSpPr>
         <p:spPr>
           <a:xfrm>
-            <a:off x="457200" y="109728"/>
-            <a:ext cx="11247120" cy="868680"/>
+            <a:off x="457200" y="91440"/>
+            <a:ext cx="11247120" cy="914400"/>
           </a:xfrm>
           <a:prstGeom prst="rect">
             <a:avLst/>
@@ -3663,40 +6987,40 @@
           <a:p>
             <a:pPr algn="l">
               <a:spcAft>
-                <a:spcPts val="600"/>
-              </a:spcAft>
-            </a:pPr>
-            <a:r>
-              <a:rPr sz="2700" b="1" i="0">
+                <a:spcPts val="800"/>
+              </a:spcAft>
+            </a:pPr>
+            <a:r>
+              <a:rPr sz="3000" b="1" i="0">
                 <a:solidFill>
                   <a:srgbClr val="FFFFFF"/>
                 </a:solidFill>
                 <a:latin typeface="Calibri"/>
               </a:rPr>
-              <a:t>Problem statement</a:t>
+              <a:t>The bin-picking problem</a:t>
             </a:r>
           </a:p>
           <a:p>
             <a:pPr algn="l">
               <a:spcAft>
-                <a:spcPts val="600"/>
-              </a:spcAft>
-            </a:pPr>
-            <a:r>
-              <a:rPr sz="1400" b="0" i="0">
+                <a:spcPts val="800"/>
+              </a:spcAft>
+            </a:pPr>
+            <a:r>
+              <a:rPr sz="1700" b="0" i="0">
                 <a:solidFill>
                   <a:srgbClr val="D6E6F0"/>
                 </a:solidFill>
                 <a:latin typeface="Calibri"/>
               </a:rPr>
-              <a:t>Recover each barrel's pose (centre, axis, radius) from a single, partial 3D view — for robotic manipulation</a:t>
+              <a:t>A robot must pick objects out of an unordered pile</a:t>
             </a:r>
           </a:p>
         </p:txBody>
       </p:sp>
       <p:pic>
         <p:nvPicPr>
-          <p:cNvPr id="4" name="Picture 3" descr="station1_pile_raw.png"/>
+          <p:cNvPr id="4" name="Picture 3" descr="binpicking_intro.png"/>
           <p:cNvPicPr>
             <a:picLocks noChangeAspect="1"/>
           </p:cNvPicPr>
@@ -3710,8 +7034,8 @@
         </p:blipFill>
         <p:spPr>
           <a:xfrm>
-            <a:off x="365760" y="2100337"/>
-            <a:ext cx="7680960" cy="3205965"/>
+            <a:off x="1358122" y="1325880"/>
+            <a:ext cx="9445275" cy="4480560"/>
           </a:xfrm>
           <a:prstGeom prst="rect">
             <a:avLst/>
@@ -3720,14 +7044,73 @@
       </p:pic>
       <p:sp>
         <p:nvSpPr>
-          <p:cNvPr id="5" name="TextBox 4"/>
+          <p:cNvPr id="5" name="Rectangle 4"/>
+          <p:cNvSpPr/>
+          <p:nvPr/>
+        </p:nvSpPr>
+        <p:spPr>
+          <a:xfrm>
+            <a:off x="365760" y="5897880"/>
+            <a:ext cx="11475720" cy="502920"/>
+          </a:xfrm>
+          <a:prstGeom prst="rect">
+            <a:avLst/>
+          </a:prstGeom>
+          <a:solidFill>
+            <a:srgbClr val="E3EEF5"/>
+          </a:solidFill>
+          <a:ln w="19050">
+            <a:solidFill>
+              <a:srgbClr val="0B5C8A"/>
+            </a:solidFill>
+          </a:ln>
+          <a:effectLst/>
+        </p:spPr>
+        <p:style>
+          <a:lnRef idx="1">
+            <a:schemeClr val="accent1"/>
+          </a:lnRef>
+          <a:fillRef idx="3">
+            <a:schemeClr val="accent1"/>
+          </a:fillRef>
+          <a:effectRef idx="2">
+            <a:schemeClr val="accent1"/>
+          </a:effectRef>
+          <a:fontRef idx="minor">
+            <a:schemeClr val="lt1"/>
+          </a:fontRef>
+        </p:style>
+        <p:txBody>
+          <a:bodyPr rtlCol="0" anchor="ctr" wrap="square" tIns="25400" bIns="25400"/>
+          <a:lstStyle/>
+          <a:p>
+            <a:pPr algn="ctr">
+              <a:spcAft>
+                <a:spcPts val="800"/>
+              </a:spcAft>
+            </a:pPr>
+            <a:r>
+              <a:rPr sz="2000" b="1" i="0">
+                <a:solidFill>
+                  <a:srgbClr val="0B5C8A"/>
+                </a:solidFill>
+                <a:latin typeface="Calibri"/>
+              </a:rPr>
+              <a:t>Before the robot can grasp anything, it must know exactly where each object is and how it lies.</a:t>
+            </a:r>
+          </a:p>
+        </p:txBody>
+      </p:sp>
+      <p:sp>
+        <p:nvSpPr>
+          <p:cNvPr id="6" name="TextBox 5"/>
           <p:cNvSpPr txBox="1"/>
           <p:nvPr/>
         </p:nvSpPr>
         <p:spPr>
           <a:xfrm>
-            <a:off x="365760" y="5989320"/>
-            <a:ext cx="7680960" cy="320040"/>
+            <a:off x="365760" y="6473952"/>
+            <a:ext cx="10972800" cy="320040"/>
           </a:xfrm>
           <a:prstGeom prst="rect">
             <a:avLst/>
@@ -3740,33 +7123,33 @@
           </a:bodyPr>
           <a:lstStyle/>
           <a:p>
-            <a:pPr algn="ctr">
-              <a:spcAft>
-                <a:spcPts val="600"/>
-              </a:spcAft>
-            </a:pPr>
-            <a:r>
-              <a:rPr sz="1200" b="0" i="0">
+            <a:pPr algn="l">
+              <a:spcAft>
+                <a:spcPts val="800"/>
+              </a:spcAft>
+            </a:pPr>
+            <a:r>
+              <a:rPr sz="1000" b="0" i="0">
                 <a:solidFill>
                   <a:srgbClr val="555555"/>
                 </a:solidFill>
                 <a:latin typeface="Calibri"/>
               </a:rPr>
-              <a:t>Real survey LiDAR: tumbled, partially-buried 200 L drums (r = 0.286 m), one viewpoint</a:t>
-            </a:r>
-          </a:p>
-        </p:txBody>
-      </p:sp>
-      <p:sp>
-        <p:nvSpPr>
-          <p:cNvPr id="6" name="TextBox 5"/>
+              <a:t>Detection and Robotic Manipulation of Partially Occluded Object(s)</a:t>
+            </a:r>
+          </a:p>
+        </p:txBody>
+      </p:sp>
+      <p:sp>
+        <p:nvSpPr>
+          <p:cNvPr id="7" name="TextBox 6"/>
           <p:cNvSpPr txBox="1"/>
           <p:nvPr/>
         </p:nvSpPr>
         <p:spPr>
           <a:xfrm>
-            <a:off x="8229600" y="1463040"/>
-            <a:ext cx="3749039" cy="4754880"/>
+            <a:off x="11521440" y="6473952"/>
+            <a:ext cx="548640" cy="320040"/>
           </a:xfrm>
           <a:prstGeom prst="rect">
             <a:avLst/>
@@ -3779,155 +7162,13 @@
           </a:bodyPr>
           <a:lstStyle/>
           <a:p>
-            <a:pPr algn="l">
-              <a:spcAft>
-                <a:spcPts val="600"/>
-              </a:spcAft>
-            </a:pPr>
-            <a:r>
-              <a:rPr sz="1500" b="1" i="0">
-                <a:solidFill>
-                  <a:srgbClr val="1F2D3D"/>
-                </a:solidFill>
-                <a:latin typeface="Calibri"/>
-              </a:rPr>
-              <a:t>• Drums are buried, mutually occluding, in arbitrary orientations.</a:t>
-            </a:r>
-          </a:p>
-          <a:p>
-            <a:pPr algn="l">
-              <a:spcAft>
-                <a:spcPts val="600"/>
-              </a:spcAft>
-            </a:pPr>
-            <a:r>
-              <a:rPr sz="1500" b="0" i="0">
-                <a:solidFill>
-                  <a:srgbClr val="1F2D3D"/>
-                </a:solidFill>
-                <a:latin typeface="Calibri"/>
-              </a:rPr>
-              <a:t>• One viewpoint ⇒ each barrel shows only a thin arc (~120–200°).</a:t>
-            </a:r>
-          </a:p>
-          <a:p>
-            <a:pPr algn="l">
-              <a:spcAft>
-                <a:spcPts val="600"/>
-              </a:spcAft>
-            </a:pPr>
-            <a:r>
-              <a:rPr sz="1500" b="0" i="0">
-                <a:solidFill>
-                  <a:srgbClr val="B76E00"/>
-                </a:solidFill>
-                <a:latin typeface="Calibri"/>
-              </a:rPr>
-              <a:t>• Thin arc ⇒ radius &amp; axis ambiguous; naive fitting fails.</a:t>
-            </a:r>
-          </a:p>
-          <a:p>
-            <a:pPr algn="l">
-              <a:spcAft>
-                <a:spcPts val="600"/>
-              </a:spcAft>
-            </a:pPr>
-            <a:r>
-              <a:rPr sz="1500" b="1" i="0">
-                <a:solidFill>
-                  <a:srgbClr val="0B5C8A"/>
-                </a:solidFill>
-                <a:latin typeface="Calibri"/>
-              </a:rPr>
-              <a:t>• Which detection method works best — and why — under occlusion?</a:t>
-            </a:r>
-          </a:p>
-          <a:p>
-            <a:pPr algn="l">
-              <a:spcAft>
-                <a:spcPts val="600"/>
-              </a:spcAft>
-            </a:pPr>
-            <a:r>
-              <a:rPr sz="1400" b="0" i="1">
-                <a:solidFill>
-                  <a:srgbClr val="555555"/>
-                </a:solidFill>
-                <a:latin typeface="Calibri"/>
-              </a:rPr>
-              <a:t>• Empirical comparison, not a fixed hypothesis.</a:t>
-            </a:r>
-          </a:p>
-        </p:txBody>
-      </p:sp>
-      <p:sp>
-        <p:nvSpPr>
-          <p:cNvPr id="7" name="TextBox 6"/>
-          <p:cNvSpPr txBox="1"/>
-          <p:nvPr/>
-        </p:nvSpPr>
-        <p:spPr>
-          <a:xfrm>
-            <a:off x="365760" y="6446520"/>
-            <a:ext cx="10972800" cy="320040"/>
-          </a:xfrm>
-          <a:prstGeom prst="rect">
-            <a:avLst/>
-          </a:prstGeom>
-          <a:noFill/>
-        </p:spPr>
-        <p:txBody>
-          <a:bodyPr wrap="square">
-            <a:spAutoFit/>
-          </a:bodyPr>
-          <a:lstStyle/>
-          <a:p>
-            <a:pPr algn="l">
-              <a:spcAft>
-                <a:spcPts val="600"/>
-              </a:spcAft>
-            </a:pPr>
-            <a:r>
-              <a:rPr sz="900" b="0" i="0">
-                <a:solidFill>
-                  <a:srgbClr val="555555"/>
-                </a:solidFill>
-                <a:latin typeface="Calibri"/>
-              </a:rPr>
-              <a:t>Detection and Robotic Manipulation of Partially Occluded Object(s)</a:t>
-            </a:r>
-          </a:p>
-        </p:txBody>
-      </p:sp>
-      <p:sp>
-        <p:nvSpPr>
-          <p:cNvPr id="8" name="TextBox 7"/>
-          <p:cNvSpPr txBox="1"/>
-          <p:nvPr/>
-        </p:nvSpPr>
-        <p:spPr>
-          <a:xfrm>
-            <a:off x="11521440" y="6446520"/>
-            <a:ext cx="548640" cy="320040"/>
-          </a:xfrm>
-          <a:prstGeom prst="rect">
-            <a:avLst/>
-          </a:prstGeom>
-          <a:noFill/>
-        </p:spPr>
-        <p:txBody>
-          <a:bodyPr wrap="square">
-            <a:spAutoFit/>
-          </a:bodyPr>
-          <a:lstStyle/>
-          <a:p>
             <a:pPr algn="r">
               <a:spcAft>
-                <a:spcPts val="600"/>
-              </a:spcAft>
-            </a:pPr>
-            <a:r>
-              <a:rPr sz="1000" b="0" i="0">
+                <a:spcPts val="800"/>
+              </a:spcAft>
+            </a:pPr>
+            <a:r>
+              <a:rPr sz="1100" b="0" i="0">
                 <a:solidFill>
                   <a:srgbClr val="555555"/>
                 </a:solidFill>
@@ -4008,8 +7249,8 @@
         </p:nvSpPr>
         <p:spPr>
           <a:xfrm>
-            <a:off x="457200" y="109728"/>
-            <a:ext cx="11247120" cy="868680"/>
+            <a:off x="457200" y="91440"/>
+            <a:ext cx="11247120" cy="914400"/>
           </a:xfrm>
           <a:prstGeom prst="rect">
             <a:avLst/>
@@ -4024,360 +7265,61 @@
           <a:p>
             <a:pPr algn="l">
               <a:spcAft>
-                <a:spcPts val="600"/>
-              </a:spcAft>
-            </a:pPr>
-            <a:r>
-              <a:rPr sz="2700" b="1" i="0">
+                <a:spcPts val="800"/>
+              </a:spcAft>
+            </a:pPr>
+            <a:r>
+              <a:rPr sz="3000" b="1" i="0">
                 <a:solidFill>
                   <a:srgbClr val="FFFFFF"/>
                 </a:solidFill>
                 <a:latin typeface="Calibri"/>
               </a:rPr>
-              <a:t>Existing solutions — three method families</a:t>
+              <a:t>Our case is harder: the objects are covered</a:t>
             </a:r>
           </a:p>
           <a:p>
             <a:pPr algn="l">
               <a:spcAft>
-                <a:spcPts val="600"/>
-              </a:spcAft>
-            </a:pPr>
-            <a:r>
-              <a:rPr sz="1400" b="0" i="0">
+                <a:spcPts val="800"/>
+              </a:spcAft>
+            </a:pPr>
+            <a:r>
+              <a:rPr sz="1700" b="0" i="0">
                 <a:solidFill>
                   <a:srgbClr val="D6E6F0"/>
                 </a:solidFill>
                 <a:latin typeface="Calibri"/>
               </a:rPr>
-              <a:t>Advantages / disadvantages specifically under occlusion (from the 18-method literature survey)</a:t>
-            </a:r>
-          </a:p>
-        </p:txBody>
-      </p:sp>
-      <p:graphicFrame>
-        <p:nvGraphicFramePr>
-          <p:cNvPr id="4" name="Table 3"/>
-          <p:cNvGraphicFramePr>
-            <a:graphicFrameLocks noGrp="1"/>
-          </p:cNvGraphicFramePr>
-          <p:nvPr/>
-        </p:nvGraphicFramePr>
-        <p:xfrm>
-          <a:off x="365760" y="1371600"/>
-          <a:ext cx="11475720" cy="3200400"/>
-        </p:xfrm>
-        <a:graphic>
-          <a:graphicData uri="http://schemas.openxmlformats.org/drawingml/2006/table">
-            <a:tbl>
-              <a:tblPr firstRow="1" bandRow="1">
-                <a:tableStyleId>{5C22544A-7EE6-4342-B048-85BDC9FD1C3A}</a:tableStyleId>
-              </a:tblPr>
-              <a:tblGrid>
-                <a:gridCol w="2331720"/>
-                <a:gridCol w="4480560"/>
-                <a:gridCol w="4663440"/>
-              </a:tblGrid>
-              <a:tr h="800100">
-                <a:tc>
-                  <a:txBody>
-                    <a:bodyPr/>
-                    <a:lstStyle/>
-                    <a:p>
-                      <a:pPr algn="l"/>
-                      <a:r>
-                        <a:rPr sz="1300" b="1">
-                          <a:solidFill>
-                            <a:srgbClr val="FFFFFF"/>
-                          </a:solidFill>
-                          <a:latin typeface="Calibri"/>
-                        </a:rPr>
-                        <a:t>Family</a:t>
-                      </a:r>
-                    </a:p>
-                  </a:txBody>
-                  <a:tcPr anchor="ctr" marT="25400" marB="25400">
-                    <a:solidFill>
-                      <a:srgbClr val="0B5C8A"/>
-                    </a:solidFill>
-                  </a:tcPr>
-                </a:tc>
-                <a:tc>
-                  <a:txBody>
-                    <a:bodyPr/>
-                    <a:lstStyle/>
-                    <a:p>
-                      <a:pPr algn="ctr"/>
-                      <a:r>
-                        <a:rPr sz="1300" b="1">
-                          <a:solidFill>
-                            <a:srgbClr val="FFFFFF"/>
-                          </a:solidFill>
-                          <a:latin typeface="Calibri"/>
-                        </a:rPr>
-                        <a:t>Advantage under occlusion</a:t>
-                      </a:r>
-                    </a:p>
-                  </a:txBody>
-                  <a:tcPr anchor="ctr" marT="25400" marB="25400">
-                    <a:solidFill>
-                      <a:srgbClr val="0B5C8A"/>
-                    </a:solidFill>
-                  </a:tcPr>
-                </a:tc>
-                <a:tc>
-                  <a:txBody>
-                    <a:bodyPr/>
-                    <a:lstStyle/>
-                    <a:p>
-                      <a:pPr algn="ctr"/>
-                      <a:r>
-                        <a:rPr sz="1300" b="1">
-                          <a:solidFill>
-                            <a:srgbClr val="FFFFFF"/>
-                          </a:solidFill>
-                          <a:latin typeface="Calibri"/>
-                        </a:rPr>
-                        <a:t>Disadvantage under occlusion</a:t>
-                      </a:r>
-                    </a:p>
-                  </a:txBody>
-                  <a:tcPr anchor="ctr" marT="25400" marB="25400">
-                    <a:solidFill>
-                      <a:srgbClr val="0B5C8A"/>
-                    </a:solidFill>
-                  </a:tcPr>
-                </a:tc>
-              </a:tr>
-              <a:tr h="800100">
-                <a:tc>
-                  <a:txBody>
-                    <a:bodyPr/>
-                    <a:lstStyle/>
-                    <a:p>
-                      <a:pPr algn="l"/>
-                      <a:r>
-                        <a:rPr sz="1200" b="0">
-                          <a:solidFill>
-                            <a:srgbClr val="1F2D3D"/>
-                          </a:solidFill>
-                          <a:latin typeface="Calibri"/>
-                        </a:rPr>
-                        <a:t>LiDAR geometric</a:t>
-                      </a:r>
-                      <a:br/>
-                      <a:r>
-                        <a:t>(Hough, RANSAC, LS)</a:t>
-                      </a:r>
-                    </a:p>
-                  </a:txBody>
-                  <a:tcPr anchor="ctr" marT="25400" marB="25400">
-                    <a:solidFill>
-                      <a:srgbClr val="F2F5F8"/>
-                    </a:solidFill>
-                  </a:tcPr>
-                </a:tc>
-                <a:tc>
-                  <a:txBody>
-                    <a:bodyPr/>
-                    <a:lstStyle/>
-                    <a:p>
-                      <a:pPr algn="ctr"/>
-                      <a:r>
-                        <a:rPr sz="1200" b="0">
-                          <a:solidFill>
-                            <a:srgbClr val="1F2D3D"/>
-                          </a:solidFill>
-                          <a:latin typeface="Calibri"/>
-                        </a:rPr>
-                        <a:t>No training data; a partial arc still votes / fits; cheap reference point.</a:t>
-                      </a:r>
-                    </a:p>
-                  </a:txBody>
-                  <a:tcPr anchor="ctr" marT="25400" marB="25400">
-                    <a:solidFill>
-                      <a:srgbClr val="F2F5F8"/>
-                    </a:solidFill>
-                  </a:tcPr>
-                </a:tc>
-                <a:tc>
-                  <a:txBody>
-                    <a:bodyPr/>
-                    <a:lstStyle/>
-                    <a:p>
-                      <a:pPr algn="ctr"/>
-                      <a:r>
-                        <a:rPr sz="1200" b="0">
-                          <a:solidFill>
-                            <a:srgbClr val="1F2D3D"/>
-                          </a:solidFill>
-                          <a:latin typeface="Calibri"/>
-                        </a:rPr>
-                        <a:t>Hough needs accumulator mass; RANSAC tolerates partial arcs but needs a good proposer; clutter merges adjacent drums.</a:t>
-                      </a:r>
-                    </a:p>
-                  </a:txBody>
-                  <a:tcPr anchor="ctr" marT="25400" marB="25400">
-                    <a:solidFill>
-                      <a:srgbClr val="F2F5F8"/>
-                    </a:solidFill>
-                  </a:tcPr>
-                </a:tc>
-              </a:tr>
-              <a:tr h="800100">
-                <a:tc>
-                  <a:txBody>
-                    <a:bodyPr/>
-                    <a:lstStyle/>
-                    <a:p>
-                      <a:pPr algn="l"/>
-                      <a:r>
-                        <a:rPr sz="1200" b="0">
-                          <a:solidFill>
-                            <a:srgbClr val="1F2D3D"/>
-                          </a:solidFill>
-                          <a:latin typeface="Calibri"/>
-                        </a:rPr>
-                        <a:t>LiDAR learned</a:t>
-                      </a:r>
-                      <a:br/>
-                      <a:r>
-                        <a:t>(PointNet++, BtcDet)</a:t>
-                      </a:r>
-                    </a:p>
-                  </a:txBody>
-                  <a:tcPr anchor="ctr" marT="25400" marB="25400">
-                    <a:solidFill>
-                      <a:srgbClr val="FFFFFF"/>
-                    </a:solidFill>
-                  </a:tcPr>
-                </a:tc>
-                <a:tc>
-                  <a:txBody>
-                    <a:bodyPr/>
-                    <a:lstStyle/>
-                    <a:p>
-                      <a:pPr algn="ctr"/>
-                      <a:r>
-                        <a:rPr sz="1200" b="0">
-                          <a:solidFill>
-                            <a:srgbClr val="1F2D3D"/>
-                          </a:solidFill>
-                          <a:latin typeface="Calibri"/>
-                        </a:rPr>
-                        <a:t>Learns partial-shape cues; can complete/flag occluded barrels — BarrelNet beats LS fitting.</a:t>
-                      </a:r>
-                    </a:p>
-                  </a:txBody>
-                  <a:tcPr anchor="ctr" marT="25400" marB="25400">
-                    <a:solidFill>
-                      <a:srgbClr val="FFFFFF"/>
-                    </a:solidFill>
-                  </a:tcPr>
-                </a:tc>
-                <a:tc>
-                  <a:txBody>
-                    <a:bodyPr/>
-                    <a:lstStyle/>
-                    <a:p>
-                      <a:pPr algn="ctr"/>
-                      <a:r>
-                        <a:rPr sz="1200" b="0">
-                          <a:solidFill>
-                            <a:srgbClr val="1F2D3D"/>
-                          </a:solidFill>
-                          <a:latin typeface="Calibri"/>
-                        </a:rPr>
-                        <a:t>Needs labelled occluded examples we don't have yet; sim-to-real gap; annotation/training cost.</a:t>
-                      </a:r>
-                    </a:p>
-                  </a:txBody>
-                  <a:tcPr anchor="ctr" marT="25400" marB="25400">
-                    <a:solidFill>
-                      <a:srgbClr val="FFFFFF"/>
-                    </a:solidFill>
-                  </a:tcPr>
-                </a:tc>
-              </a:tr>
-              <a:tr h="800100">
-                <a:tc>
-                  <a:txBody>
-                    <a:bodyPr/>
-                    <a:lstStyle/>
-                    <a:p>
-                      <a:pPr algn="l"/>
-                      <a:r>
-                        <a:rPr sz="1200" b="0">
-                          <a:solidFill>
-                            <a:srgbClr val="1F2D3D"/>
-                          </a:solidFill>
-                          <a:latin typeface="Calibri"/>
-                        </a:rPr>
-                        <a:t>Camera + LiDAR fusion</a:t>
-                      </a:r>
-                      <a:br/>
-                      <a:r>
-                        <a:t>(frustum, painting)</a:t>
-                      </a:r>
-                    </a:p>
-                  </a:txBody>
-                  <a:tcPr anchor="ctr" marT="25400" marB="25400">
-                    <a:solidFill>
-                      <a:srgbClr val="F2F5F8"/>
-                    </a:solidFill>
-                  </a:tcPr>
-                </a:tc>
-                <a:tc>
-                  <a:txBody>
-                    <a:bodyPr/>
-                    <a:lstStyle/>
-                    <a:p>
-                      <a:pPr algn="ctr"/>
-                      <a:r>
-                        <a:rPr sz="1200" b="0">
-                          <a:solidFill>
-                            <a:srgbClr val="1F2D3D"/>
-                          </a:solidFill>
-                          <a:latin typeface="Calibri"/>
-                        </a:rPr>
-                        <a:t>One modality compensates when the other is occluded; best recall on the safety-critical classes.</a:t>
-                      </a:r>
-                    </a:p>
-                  </a:txBody>
-                  <a:tcPr anchor="ctr" marT="25400" marB="25400">
-                    <a:solidFill>
-                      <a:srgbClr val="F2F5F8"/>
-                    </a:solidFill>
-                  </a:tcPr>
-                </a:tc>
-                <a:tc>
-                  <a:txBody>
-                    <a:bodyPr/>
-                    <a:lstStyle/>
-                    <a:p>
-                      <a:pPr algn="ctr"/>
-                      <a:r>
-                        <a:rPr sz="1200" b="0">
-                          <a:solidFill>
-                            <a:srgbClr val="1F2D3D"/>
-                          </a:solidFill>
-                          <a:latin typeface="Calibri"/>
-                        </a:rPr>
-                        <a:t>Fails together when calibration drifts; still mostly LiDAR-reliant when the LiDAR leg is occluded.</a:t>
-                      </a:r>
-                    </a:p>
-                  </a:txBody>
-                  <a:tcPr anchor="ctr" marT="25400" marB="25400">
-                    <a:solidFill>
-                      <a:srgbClr val="F2F5F8"/>
-                    </a:solidFill>
-                  </a:tcPr>
-                </a:tc>
-              </a:tr>
-            </a:tbl>
-          </a:graphicData>
-        </a:graphic>
-      </p:graphicFrame>
+              <a:t>Real scan: 200-litre steel drums, tumbled and partially buried</a:t>
+            </a:r>
+          </a:p>
+        </p:txBody>
+      </p:sp>
+      <p:pic>
+        <p:nvPicPr>
+          <p:cNvPr id="4" name="Picture 3" descr="station1_pile_raw.png"/>
+          <p:cNvPicPr>
+            <a:picLocks noChangeAspect="1"/>
+          </p:cNvPicPr>
+          <p:nvPr/>
+        </p:nvPicPr>
+        <p:blipFill>
+          <a:blip r:embed="rId2"/>
+          <a:stretch>
+            <a:fillRect/>
+          </a:stretch>
+        </p:blipFill>
+        <p:spPr>
+          <a:xfrm>
+            <a:off x="365760" y="1859280"/>
+            <a:ext cx="8229600" cy="3413760"/>
+          </a:xfrm>
+          <a:prstGeom prst="rect">
+            <a:avLst/>
+          </a:prstGeom>
+        </p:spPr>
+      </p:pic>
       <p:sp>
         <p:nvSpPr>
           <p:cNvPr id="5" name="TextBox 4"/>
@@ -4386,8 +7328,8 @@
         </p:nvSpPr>
         <p:spPr>
           <a:xfrm>
-            <a:off x="411480" y="4754880"/>
-            <a:ext cx="11338560" cy="1645920"/>
+            <a:off x="8732520" y="1554480"/>
+            <a:ext cx="3246120" cy="4206240"/>
           </a:xfrm>
           <a:prstGeom prst="rect">
             <a:avLst/>
@@ -4402,46 +7344,121 @@
           <a:p>
             <a:pPr algn="l">
               <a:spcAft>
-                <a:spcPts val="600"/>
-              </a:spcAft>
-            </a:pPr>
-            <a:r>
-              <a:rPr sz="1400" b="1" i="0">
-                <a:solidFill>
-                  <a:srgbClr val="0B5C8A"/>
-                </a:solidFill>
-                <a:latin typeface="Calibri"/>
-              </a:rPr>
-              <a:t>• Why these for the thesis: breadth-first; no-training-data methods first; reuse existing code, don't reimplement.</a:t>
+                <a:spcPts val="1000"/>
+              </a:spcAft>
+            </a:pPr>
+            <a:r>
+              <a:rPr sz="1900" b="0" i="0">
+                <a:solidFill>
+                  <a:srgbClr val="1F2D3D"/>
+                </a:solidFill>
+                <a:latin typeface="Calibri"/>
+              </a:rPr>
+              <a:t>• Drums lie in arbitrary directions.</a:t>
             </a:r>
           </a:p>
           <a:p>
             <a:pPr algn="l">
               <a:spcAft>
-                <a:spcPts val="600"/>
-              </a:spcAft>
-            </a:pPr>
-            <a:r>
-              <a:rPr sz="1300" b="0" i="0">
-                <a:solidFill>
-                  <a:srgbClr val="555555"/>
-                </a:solidFill>
-                <a:latin typeface="Calibri"/>
-              </a:rPr>
-              <a:t>• Proposer/fit separation lets us swap one stage and compare fairly; BarrelNet is the nearest learned prior (no public code → deferred).</a:t>
-            </a:r>
-          </a:p>
-        </p:txBody>
-      </p:sp>
-      <p:sp>
-        <p:nvSpPr>
-          <p:cNvPr id="6" name="TextBox 5"/>
+                <a:spcPts val="1000"/>
+              </a:spcAft>
+            </a:pPr>
+            <a:r>
+              <a:rPr sz="1900" b="0" i="0">
+                <a:solidFill>
+                  <a:srgbClr val="1F2D3D"/>
+                </a:solidFill>
+                <a:latin typeface="Calibri"/>
+              </a:rPr>
+              <a:t>• Sand and other drums hide most of each drum.</a:t>
+            </a:r>
+          </a:p>
+          <a:p>
+            <a:pPr algn="l">
+              <a:spcAft>
+                <a:spcPts val="1000"/>
+              </a:spcAft>
+            </a:pPr>
+            <a:r>
+              <a:rPr sz="1900" b="0" i="0">
+                <a:solidFill>
+                  <a:srgbClr val="1F2D3D"/>
+                </a:solidFill>
+                <a:latin typeface="Calibri"/>
+              </a:rPr>
+              <a:t>• The sensor sees the pile from one side only.</a:t>
+            </a:r>
+          </a:p>
+        </p:txBody>
+      </p:sp>
+      <p:sp>
+        <p:nvSpPr>
+          <p:cNvPr id="6" name="Rectangle 5"/>
+          <p:cNvSpPr/>
+          <p:nvPr/>
+        </p:nvSpPr>
+        <p:spPr>
+          <a:xfrm>
+            <a:off x="365760" y="5897880"/>
+            <a:ext cx="11475720" cy="502920"/>
+          </a:xfrm>
+          <a:prstGeom prst="rect">
+            <a:avLst/>
+          </a:prstGeom>
+          <a:solidFill>
+            <a:srgbClr val="E3EEF5"/>
+          </a:solidFill>
+          <a:ln w="19050">
+            <a:solidFill>
+              <a:srgbClr val="B76E00"/>
+            </a:solidFill>
+          </a:ln>
+          <a:effectLst/>
+        </p:spPr>
+        <p:style>
+          <a:lnRef idx="1">
+            <a:schemeClr val="accent1"/>
+          </a:lnRef>
+          <a:fillRef idx="3">
+            <a:schemeClr val="accent1"/>
+          </a:fillRef>
+          <a:effectRef idx="2">
+            <a:schemeClr val="accent1"/>
+          </a:effectRef>
+          <a:fontRef idx="minor">
+            <a:schemeClr val="lt1"/>
+          </a:fontRef>
+        </p:style>
+        <p:txBody>
+          <a:bodyPr rtlCol="0" anchor="ctr" wrap="square" tIns="25400" bIns="25400"/>
+          <a:lstStyle/>
+          <a:p>
+            <a:pPr algn="ctr">
+              <a:spcAft>
+                <a:spcPts val="800"/>
+              </a:spcAft>
+            </a:pPr>
+            <a:r>
+              <a:rPr sz="2000" b="1" i="0">
+                <a:solidFill>
+                  <a:srgbClr val="B76E00"/>
+                </a:solidFill>
+                <a:latin typeface="Calibri"/>
+              </a:rPr>
+              <a:t>Each drum shows the sensor only a small patch of its surface.</a:t>
+            </a:r>
+          </a:p>
+        </p:txBody>
+      </p:sp>
+      <p:sp>
+        <p:nvSpPr>
+          <p:cNvPr id="7" name="TextBox 6"/>
           <p:cNvSpPr txBox="1"/>
           <p:nvPr/>
         </p:nvSpPr>
         <p:spPr>
           <a:xfrm>
-            <a:off x="365760" y="6446520"/>
+            <a:off x="365760" y="6473952"/>
             <a:ext cx="10972800" cy="320040"/>
           </a:xfrm>
           <a:prstGeom prst="rect">
@@ -4457,11 +7474,11 @@
           <a:p>
             <a:pPr algn="l">
               <a:spcAft>
-                <a:spcPts val="600"/>
-              </a:spcAft>
-            </a:pPr>
-            <a:r>
-              <a:rPr sz="900" b="0" i="0">
+                <a:spcPts val="800"/>
+              </a:spcAft>
+            </a:pPr>
+            <a:r>
+              <a:rPr sz="1000" b="0" i="0">
                 <a:solidFill>
                   <a:srgbClr val="555555"/>
                 </a:solidFill>
@@ -4474,13 +7491,13 @@
       </p:sp>
       <p:sp>
         <p:nvSpPr>
-          <p:cNvPr id="7" name="TextBox 6"/>
+          <p:cNvPr id="8" name="TextBox 7"/>
           <p:cNvSpPr txBox="1"/>
           <p:nvPr/>
         </p:nvSpPr>
         <p:spPr>
           <a:xfrm>
-            <a:off x="11521440" y="6446520"/>
+            <a:off x="11521440" y="6473952"/>
             <a:ext cx="548640" cy="320040"/>
           </a:xfrm>
           <a:prstGeom prst="rect">
@@ -4496,11 +7513,11 @@
           <a:p>
             <a:pPr algn="r">
               <a:spcAft>
-                <a:spcPts val="600"/>
-              </a:spcAft>
-            </a:pPr>
-            <a:r>
-              <a:rPr sz="1000" b="0" i="0">
+                <a:spcPts val="800"/>
+              </a:spcAft>
+            </a:pPr>
+            <a:r>
+              <a:rPr sz="1100" b="0" i="0">
                 <a:solidFill>
                   <a:srgbClr val="555555"/>
                 </a:solidFill>
@@ -4581,8 +7598,8 @@
         </p:nvSpPr>
         <p:spPr>
           <a:xfrm>
-            <a:off x="457200" y="109728"/>
-            <a:ext cx="11247120" cy="868680"/>
+            <a:off x="457200" y="91440"/>
+            <a:ext cx="11247120" cy="914400"/>
           </a:xfrm>
           <a:prstGeom prst="rect">
             <a:avLst/>
@@ -4597,40 +7614,40 @@
           <a:p>
             <a:pPr algn="l">
               <a:spcAft>
-                <a:spcPts val="600"/>
-              </a:spcAft>
-            </a:pPr>
-            <a:r>
-              <a:rPr sz="2700" b="1" i="0">
+                <a:spcPts val="800"/>
+              </a:spcAft>
+            </a:pPr>
+            <a:r>
+              <a:rPr sz="3000" b="1" i="0">
                 <a:solidFill>
                   <a:srgbClr val="FFFFFF"/>
                 </a:solidFill>
                 <a:latin typeface="Calibri"/>
               </a:rPr>
-              <a:t>Methods chosen to evaluate — four geometric detectors</a:t>
+              <a:t>Our task: fit a cylinder to the visible points</a:t>
             </a:r>
           </a:p>
           <a:p>
             <a:pPr algn="l">
               <a:spcAft>
-                <a:spcPts val="600"/>
-              </a:spcAft>
-            </a:pPr>
-            <a:r>
-              <a:rPr sz="1400" b="0" i="0">
+                <a:spcPts val="800"/>
+              </a:spcAft>
+            </a:pPr>
+            <a:r>
+              <a:rPr sz="1700" b="0" i="0">
                 <a:solidFill>
                   <a:srgbClr val="D6E6F0"/>
                 </a:solidFill>
                 <a:latin typeface="Calibri"/>
               </a:rPr>
-              <a:t>All LiDAR-only, no training data; identical input &amp; output schema</a:t>
+              <a:t>“Fitting” = choosing model parameters so the model matches the measured points as well as possible</a:t>
             </a:r>
           </a:p>
         </p:txBody>
       </p:sp>
       <p:pic>
         <p:nvPicPr>
-          <p:cNvPr id="4" name="Picture 3" descr="architecture_diagram.png"/>
+          <p:cNvPr id="4" name="Picture 3" descr="fitting_explained.png"/>
           <p:cNvPicPr>
             <a:picLocks noChangeAspect="1"/>
           </p:cNvPicPr>
@@ -4644,8 +7661,8 @@
         </p:blipFill>
         <p:spPr>
           <a:xfrm>
-            <a:off x="365760" y="2614010"/>
-            <a:ext cx="6035040" cy="2270060"/>
+            <a:off x="365760" y="1596169"/>
+            <a:ext cx="11475720" cy="3939981"/>
           </a:xfrm>
           <a:prstGeom prst="rect">
             <a:avLst/>
@@ -4654,14 +7671,73 @@
       </p:pic>
       <p:sp>
         <p:nvSpPr>
-          <p:cNvPr id="5" name="TextBox 4"/>
+          <p:cNvPr id="5" name="Rectangle 4"/>
+          <p:cNvSpPr/>
+          <p:nvPr/>
+        </p:nvSpPr>
+        <p:spPr>
+          <a:xfrm>
+            <a:off x="365760" y="5897880"/>
+            <a:ext cx="11475720" cy="502920"/>
+          </a:xfrm>
+          <a:prstGeom prst="rect">
+            <a:avLst/>
+          </a:prstGeom>
+          <a:solidFill>
+            <a:srgbClr val="E3EEF5"/>
+          </a:solidFill>
+          <a:ln w="19050">
+            <a:solidFill>
+              <a:srgbClr val="B76E00"/>
+            </a:solidFill>
+          </a:ln>
+          <a:effectLst/>
+        </p:spPr>
+        <p:style>
+          <a:lnRef idx="1">
+            <a:schemeClr val="accent1"/>
+          </a:lnRef>
+          <a:fillRef idx="3">
+            <a:schemeClr val="accent1"/>
+          </a:fillRef>
+          <a:effectRef idx="2">
+            <a:schemeClr val="accent1"/>
+          </a:effectRef>
+          <a:fontRef idx="minor">
+            <a:schemeClr val="lt1"/>
+          </a:fontRef>
+        </p:style>
+        <p:txBody>
+          <a:bodyPr rtlCol="0" anchor="ctr" wrap="square" tIns="25400" bIns="25400"/>
+          <a:lstStyle/>
+          <a:p>
+            <a:pPr algn="ctr">
+              <a:spcAft>
+                <a:spcPts val="800"/>
+              </a:spcAft>
+            </a:pPr>
+            <a:r>
+              <a:rPr sz="2000" b="1" i="0">
+                <a:solidFill>
+                  <a:srgbClr val="B76E00"/>
+                </a:solidFill>
+                <a:latin typeface="Calibri"/>
+              </a:rPr>
+              <a:t>The less of the barrel we see, the more cylinders explain the same points — that is the core difficulty.</a:t>
+            </a:r>
+          </a:p>
+        </p:txBody>
+      </p:sp>
+      <p:sp>
+        <p:nvSpPr>
+          <p:cNvPr id="6" name="TextBox 5"/>
           <p:cNvSpPr txBox="1"/>
           <p:nvPr/>
         </p:nvSpPr>
         <p:spPr>
           <a:xfrm>
-            <a:off x="6629400" y="1463040"/>
-            <a:ext cx="5212080" cy="4846320"/>
+            <a:off x="365760" y="6473952"/>
+            <a:ext cx="10972800" cy="320040"/>
           </a:xfrm>
           <a:prstGeom prst="rect">
             <a:avLst/>
@@ -4676,111 +7752,31 @@
           <a:p>
             <a:pPr algn="l">
               <a:spcAft>
-                <a:spcPts val="600"/>
-              </a:spcAft>
-            </a:pPr>
-            <a:r>
-              <a:rPr sz="1500" b="1" i="0">
-                <a:solidFill>
-                  <a:srgbClr val="1F2D3D"/>
-                </a:solidFill>
-                <a:latin typeface="Calibri"/>
-              </a:rPr>
-              <a:t>• 3dtk_hough — baseline; randomized 2-step Hough.</a:t>
-            </a:r>
-          </a:p>
-          <a:p>
-            <a:pPr algn="l">
-              <a:spcAft>
-                <a:spcPts val="600"/>
-              </a:spcAft>
-            </a:pPr>
-            <a:r>
-              <a:rPr sz="1500" b="1" i="0">
-                <a:solidFill>
-                  <a:srgbClr val="1F2D3D"/>
-                </a:solidFill>
-                <a:latin typeface="Calibri"/>
-              </a:rPr>
-              <a:t>• ransac_cylinder — shared proposer + normals2step fit.</a:t>
-            </a:r>
-          </a:p>
-          <a:p>
-            <a:pPr algn="l">
-              <a:spcAft>
-                <a:spcPts val="600"/>
-              </a:spcAft>
-            </a:pPr>
-            <a:r>
-              <a:rPr sz="1500" b="1" i="0">
-                <a:solidFill>
-                  <a:srgbClr val="1F2D3D"/>
-                </a:solidFill>
-                <a:latin typeface="Calibri"/>
-              </a:rPr>
-              <a:t>• ls_cylinder — shared proposer + nonlinear least-squares fit.</a:t>
-            </a:r>
-          </a:p>
-          <a:p>
-            <a:pPr algn="l">
-              <a:spcAft>
-                <a:spcPts val="600"/>
-              </a:spcAft>
-            </a:pPr>
-            <a:r>
-              <a:rPr sz="1500" b="1" i="0">
-                <a:solidFill>
-                  <a:srgbClr val="1F2D3D"/>
-                </a:solidFill>
-                <a:latin typeface="Calibri"/>
-              </a:rPr>
-              <a:t>• efficient_ransac — Schnabel RANSAC (CGAL), no proposer.</a:t>
-            </a:r>
-          </a:p>
-          <a:p>
-            <a:pPr algn="l">
-              <a:spcAft>
-                <a:spcPts val="600"/>
-              </a:spcAft>
-            </a:pPr>
-            <a:r>
-              <a:rPr sz="1300" b="0" i="0">
+                <a:spcPts val="800"/>
+              </a:spcAft>
+            </a:pPr>
+            <a:r>
+              <a:rPr sz="1000" b="0" i="0">
                 <a:solidFill>
                   <a:srgbClr val="555555"/>
                 </a:solidFill>
                 <a:latin typeface="Calibri"/>
               </a:rPr>
-              <a:t>• RANSAC &amp; LS share one proposer → a clean fit-quality comparison.</a:t>
-            </a:r>
-          </a:p>
-          <a:p>
-            <a:pPr algn="l">
-              <a:spcAft>
-                <a:spcPts val="600"/>
-              </a:spcAft>
-            </a:pPr>
-            <a:r>
-              <a:rPr sz="1300" b="0" i="0">
-                <a:solidFill>
-                  <a:srgbClr val="555555"/>
-                </a:solidFill>
-                <a:latin typeface="Calibri"/>
-              </a:rPr>
-              <a:t>• Efficient RANSAC finds cylinders directly → removes the shared-proposer confound.</a:t>
-            </a:r>
-          </a:p>
-        </p:txBody>
-      </p:sp>
-      <p:sp>
-        <p:nvSpPr>
-          <p:cNvPr id="6" name="TextBox 5"/>
+              <a:t>Detection and Robotic Manipulation of Partially Occluded Object(s)</a:t>
+            </a:r>
+          </a:p>
+        </p:txBody>
+      </p:sp>
+      <p:sp>
+        <p:nvSpPr>
+          <p:cNvPr id="7" name="TextBox 6"/>
           <p:cNvSpPr txBox="1"/>
           <p:nvPr/>
         </p:nvSpPr>
         <p:spPr>
           <a:xfrm>
-            <a:off x="365760" y="6446520"/>
-            <a:ext cx="10972800" cy="320040"/>
+            <a:off x="11521440" y="6473952"/>
+            <a:ext cx="548640" cy="320040"/>
           </a:xfrm>
           <a:prstGeom prst="rect">
             <a:avLst/>
@@ -4793,52 +7789,13 @@
           </a:bodyPr>
           <a:lstStyle/>
           <a:p>
-            <a:pPr algn="l">
-              <a:spcAft>
-                <a:spcPts val="600"/>
-              </a:spcAft>
-            </a:pPr>
-            <a:r>
-              <a:rPr sz="900" b="0" i="0">
-                <a:solidFill>
-                  <a:srgbClr val="555555"/>
-                </a:solidFill>
-                <a:latin typeface="Calibri"/>
-              </a:rPr>
-              <a:t>Detection and Robotic Manipulation of Partially Occluded Object(s)</a:t>
-            </a:r>
-          </a:p>
-        </p:txBody>
-      </p:sp>
-      <p:sp>
-        <p:nvSpPr>
-          <p:cNvPr id="7" name="TextBox 6"/>
-          <p:cNvSpPr txBox="1"/>
-          <p:nvPr/>
-        </p:nvSpPr>
-        <p:spPr>
-          <a:xfrm>
-            <a:off x="11521440" y="6446520"/>
-            <a:ext cx="548640" cy="320040"/>
-          </a:xfrm>
-          <a:prstGeom prst="rect">
-            <a:avLst/>
-          </a:prstGeom>
-          <a:noFill/>
-        </p:spPr>
-        <p:txBody>
-          <a:bodyPr wrap="square">
-            <a:spAutoFit/>
-          </a:bodyPr>
-          <a:lstStyle/>
-          <a:p>
             <a:pPr algn="r">
               <a:spcAft>
-                <a:spcPts val="600"/>
-              </a:spcAft>
-            </a:pPr>
-            <a:r>
-              <a:rPr sz="1000" b="0" i="0">
+                <a:spcPts val="800"/>
+              </a:spcAft>
+            </a:pPr>
+            <a:r>
+              <a:rPr sz="1100" b="0" i="0">
                 <a:solidFill>
                   <a:srgbClr val="555555"/>
                 </a:solidFill>
@@ -4919,8 +7876,8 @@
         </p:nvSpPr>
         <p:spPr>
           <a:xfrm>
-            <a:off x="457200" y="109728"/>
-            <a:ext cx="11247120" cy="868680"/>
+            <a:off x="457200" y="91440"/>
+            <a:ext cx="11247120" cy="914400"/>
           </a:xfrm>
           <a:prstGeom prst="rect">
             <a:avLst/>
@@ -4935,55 +7892,550 @@
           <a:p>
             <a:pPr algn="l">
               <a:spcAft>
-                <a:spcPts val="600"/>
-              </a:spcAft>
-            </a:pPr>
-            <a:r>
-              <a:rPr sz="2700" b="1" i="0">
+                <a:spcPts val="800"/>
+              </a:spcAft>
+            </a:pPr>
+            <a:r>
+              <a:rPr sz="3000" b="1" i="0">
                 <a:solidFill>
                   <a:srgbClr val="FFFFFF"/>
                 </a:solidFill>
                 <a:latin typeface="Calibri"/>
               </a:rPr>
-              <a:t>Evaluation method — one harness, one metric for every method</a:t>
-            </a:r>
-          </a:p>
-        </p:txBody>
-      </p:sp>
-      <p:pic>
-        <p:nvPicPr>
-          <p:cNvPr id="4" name="Picture 3" descr="pipeline_flow.png"/>
-          <p:cNvPicPr>
-            <a:picLocks noChangeAspect="1"/>
-          </p:cNvPicPr>
-          <p:nvPr/>
-        </p:nvPicPr>
-        <p:blipFill>
-          <a:blip r:embed="rId2"/>
-          <a:stretch>
-            <a:fillRect/>
-          </a:stretch>
-        </p:blipFill>
-        <p:spPr>
-          <a:xfrm>
-            <a:off x="284644" y="1234440"/>
-            <a:ext cx="11592232" cy="2743200"/>
-          </a:xfrm>
-          <a:prstGeom prst="rect">
-            <a:avLst/>
-          </a:prstGeom>
-        </p:spPr>
-      </p:pic>
-      <p:sp>
-        <p:nvSpPr>
-          <p:cNvPr id="5" name="TextBox 4"/>
+              <a:t>Existing solutions — three families of methods</a:t>
+            </a:r>
+          </a:p>
+          <a:p>
+            <a:pPr algn="l">
+              <a:spcAft>
+                <a:spcPts val="800"/>
+              </a:spcAft>
+            </a:pPr>
+            <a:r>
+              <a:rPr sz="1700" b="0" i="0">
+                <a:solidFill>
+                  <a:srgbClr val="D6E6F0"/>
+                </a:solidFill>
+                <a:latin typeface="Calibri"/>
+              </a:rPr>
+              <a:t>From an 18-method literature survey; judged by how they cope with hidden objects</a:t>
+            </a:r>
+          </a:p>
+        </p:txBody>
+      </p:sp>
+      <p:sp>
+        <p:nvSpPr>
+          <p:cNvPr id="4" name="Rectangle 3"/>
+          <p:cNvSpPr/>
+          <p:nvPr/>
+        </p:nvSpPr>
+        <p:spPr>
+          <a:xfrm>
+            <a:off x="365760" y="1371600"/>
+            <a:ext cx="3758184" cy="548640"/>
+          </a:xfrm>
+          <a:prstGeom prst="rect">
+            <a:avLst/>
+          </a:prstGeom>
+          <a:solidFill>
+            <a:srgbClr val="0B5C8A"/>
+          </a:solidFill>
+          <a:ln>
+            <a:noFill/>
+          </a:ln>
+          <a:effectLst/>
+        </p:spPr>
+        <p:style>
+          <a:lnRef idx="1">
+            <a:schemeClr val="accent1"/>
+          </a:lnRef>
+          <a:fillRef idx="3">
+            <a:schemeClr val="accent1"/>
+          </a:fillRef>
+          <a:effectRef idx="2">
+            <a:schemeClr val="accent1"/>
+          </a:effectRef>
+          <a:fontRef idx="minor">
+            <a:schemeClr val="lt1"/>
+          </a:fontRef>
+        </p:style>
+        <p:txBody>
+          <a:bodyPr rtlCol="0" anchor="ctr"/>
+          <a:lstStyle/>
+          <a:p>
+            <a:pPr algn="ctr">
+              <a:spcAft>
+                <a:spcPts val="800"/>
+              </a:spcAft>
+            </a:pPr>
+            <a:r>
+              <a:rPr sz="2000" b="1" i="0">
+                <a:solidFill>
+                  <a:srgbClr val="FFFFFF"/>
+                </a:solidFill>
+                <a:latin typeface="Calibri"/>
+              </a:rPr>
+              <a:t>Geometry-based</a:t>
+            </a:r>
+          </a:p>
+        </p:txBody>
+      </p:sp>
+      <p:sp>
+        <p:nvSpPr>
+          <p:cNvPr id="5" name="Rectangle 4"/>
+          <p:cNvSpPr/>
+          <p:nvPr/>
+        </p:nvSpPr>
+        <p:spPr>
+          <a:xfrm>
+            <a:off x="365760" y="1920240"/>
+            <a:ext cx="3758184" cy="3794760"/>
+          </a:xfrm>
+          <a:prstGeom prst="rect">
+            <a:avLst/>
+          </a:prstGeom>
+          <a:solidFill>
+            <a:srgbClr val="F2F5F8"/>
+          </a:solidFill>
+          <a:ln w="15875">
+            <a:solidFill>
+              <a:srgbClr val="0B5C8A"/>
+            </a:solidFill>
+          </a:ln>
+          <a:effectLst/>
+        </p:spPr>
+        <p:style>
+          <a:lnRef idx="1">
+            <a:schemeClr val="accent1"/>
+          </a:lnRef>
+          <a:fillRef idx="3">
+            <a:schemeClr val="accent1"/>
+          </a:fillRef>
+          <a:effectRef idx="2">
+            <a:schemeClr val="accent1"/>
+          </a:effectRef>
+          <a:fontRef idx="minor">
+            <a:schemeClr val="lt1"/>
+          </a:fontRef>
+        </p:style>
+        <p:txBody>
+          <a:bodyPr rtlCol="0" anchor="ctr" wrap="square" lIns="127000" rIns="127000" tIns="101600"/>
+          <a:lstStyle/>
+          <a:p>
+            <a:pPr algn="l">
+              <a:spcAft>
+                <a:spcPts val="1400"/>
+              </a:spcAft>
+            </a:pPr>
+            <a:r>
+              <a:rPr sz="1700" b="0" i="0">
+                <a:solidFill>
+                  <a:srgbClr val="1F2D3D"/>
+                </a:solidFill>
+                <a:latin typeface="Calibri"/>
+              </a:rPr>
+              <a:t>Search the 3D points directly for cylinder shapes.</a:t>
+            </a:r>
+          </a:p>
+          <a:p>
+            <a:pPr algn="l">
+              <a:spcAft>
+                <a:spcPts val="1200"/>
+              </a:spcAft>
+            </a:pPr>
+            <a:r>
+              <a:rPr sz="1700" b="1" i="0">
+                <a:solidFill>
+                  <a:srgbClr val="2E7D32"/>
+                </a:solidFill>
+                <a:latin typeface="Calibri"/>
+              </a:rPr>
+              <a:t>+ Works out of the box — no training data needed.</a:t>
+            </a:r>
+          </a:p>
+          <a:p>
+            <a:pPr algn="l">
+              <a:spcAft>
+                <a:spcPts val="800"/>
+              </a:spcAft>
+            </a:pPr>
+            <a:r>
+              <a:rPr sz="1700" b="1" i="0">
+                <a:solidFill>
+                  <a:srgbClr val="B02A2A"/>
+                </a:solidFill>
+                <a:latin typeface="Calibri"/>
+              </a:rPr>
+              <a:t>− Needs enough visible points; touching drums get merged.</a:t>
+            </a:r>
+          </a:p>
+        </p:txBody>
+      </p:sp>
+      <p:sp>
+        <p:nvSpPr>
+          <p:cNvPr id="6" name="Rectangle 5"/>
+          <p:cNvSpPr/>
+          <p:nvPr/>
+        </p:nvSpPr>
+        <p:spPr>
+          <a:xfrm>
+            <a:off x="4224528" y="1371600"/>
+            <a:ext cx="3758184" cy="548640"/>
+          </a:xfrm>
+          <a:prstGeom prst="rect">
+            <a:avLst/>
+          </a:prstGeom>
+          <a:solidFill>
+            <a:srgbClr val="2E7D32"/>
+          </a:solidFill>
+          <a:ln>
+            <a:noFill/>
+          </a:ln>
+          <a:effectLst/>
+        </p:spPr>
+        <p:style>
+          <a:lnRef idx="1">
+            <a:schemeClr val="accent1"/>
+          </a:lnRef>
+          <a:fillRef idx="3">
+            <a:schemeClr val="accent1"/>
+          </a:fillRef>
+          <a:effectRef idx="2">
+            <a:schemeClr val="accent1"/>
+          </a:effectRef>
+          <a:fontRef idx="minor">
+            <a:schemeClr val="lt1"/>
+          </a:fontRef>
+        </p:style>
+        <p:txBody>
+          <a:bodyPr rtlCol="0" anchor="ctr"/>
+          <a:lstStyle/>
+          <a:p>
+            <a:pPr algn="ctr">
+              <a:spcAft>
+                <a:spcPts val="800"/>
+              </a:spcAft>
+            </a:pPr>
+            <a:r>
+              <a:rPr sz="2000" b="1" i="0">
+                <a:solidFill>
+                  <a:srgbClr val="FFFFFF"/>
+                </a:solidFill>
+                <a:latin typeface="Calibri"/>
+              </a:rPr>
+              <a:t>Learning-based</a:t>
+            </a:r>
+          </a:p>
+        </p:txBody>
+      </p:sp>
+      <p:sp>
+        <p:nvSpPr>
+          <p:cNvPr id="7" name="Rectangle 6"/>
+          <p:cNvSpPr/>
+          <p:nvPr/>
+        </p:nvSpPr>
+        <p:spPr>
+          <a:xfrm>
+            <a:off x="4224528" y="1920240"/>
+            <a:ext cx="3758184" cy="3794760"/>
+          </a:xfrm>
+          <a:prstGeom prst="rect">
+            <a:avLst/>
+          </a:prstGeom>
+          <a:solidFill>
+            <a:srgbClr val="F2F5F8"/>
+          </a:solidFill>
+          <a:ln w="15875">
+            <a:solidFill>
+              <a:srgbClr val="2E7D32"/>
+            </a:solidFill>
+          </a:ln>
+          <a:effectLst/>
+        </p:spPr>
+        <p:style>
+          <a:lnRef idx="1">
+            <a:schemeClr val="accent1"/>
+          </a:lnRef>
+          <a:fillRef idx="3">
+            <a:schemeClr val="accent1"/>
+          </a:fillRef>
+          <a:effectRef idx="2">
+            <a:schemeClr val="accent1"/>
+          </a:effectRef>
+          <a:fontRef idx="minor">
+            <a:schemeClr val="lt1"/>
+          </a:fontRef>
+        </p:style>
+        <p:txBody>
+          <a:bodyPr rtlCol="0" anchor="ctr" wrap="square" lIns="127000" rIns="127000" tIns="101600"/>
+          <a:lstStyle/>
+          <a:p>
+            <a:pPr algn="l">
+              <a:spcAft>
+                <a:spcPts val="1400"/>
+              </a:spcAft>
+            </a:pPr>
+            <a:r>
+              <a:rPr sz="1700" b="0" i="0">
+                <a:solidFill>
+                  <a:srgbClr val="1F2D3D"/>
+                </a:solidFill>
+                <a:latin typeface="Calibri"/>
+              </a:rPr>
+              <a:t>A neural network learns what partial barrels look like from many examples.</a:t>
+            </a:r>
+          </a:p>
+          <a:p>
+            <a:pPr algn="l">
+              <a:spcAft>
+                <a:spcPts val="1200"/>
+              </a:spcAft>
+            </a:pPr>
+            <a:r>
+              <a:rPr sz="1700" b="1" i="0">
+                <a:solidFill>
+                  <a:srgbClr val="2E7D32"/>
+                </a:solidFill>
+                <a:latin typeface="Calibri"/>
+              </a:rPr>
+              <a:t>+ Can recognise a barrel from a small fragment.</a:t>
+            </a:r>
+          </a:p>
+          <a:p>
+            <a:pPr algn="l">
+              <a:spcAft>
+                <a:spcPts val="800"/>
+              </a:spcAft>
+            </a:pPr>
+            <a:r>
+              <a:rPr sz="1700" b="1" i="0">
+                <a:solidFill>
+                  <a:srgbClr val="B02A2A"/>
+                </a:solidFill>
+                <a:latin typeface="Calibri"/>
+              </a:rPr>
+              <a:t>− Needs lots of labelled training examples first.</a:t>
+            </a:r>
+          </a:p>
+        </p:txBody>
+      </p:sp>
+      <p:sp>
+        <p:nvSpPr>
+          <p:cNvPr id="8" name="Rectangle 7"/>
+          <p:cNvSpPr/>
+          <p:nvPr/>
+        </p:nvSpPr>
+        <p:spPr>
+          <a:xfrm>
+            <a:off x="8083296" y="1371600"/>
+            <a:ext cx="3758184" cy="548640"/>
+          </a:xfrm>
+          <a:prstGeom prst="rect">
+            <a:avLst/>
+          </a:prstGeom>
+          <a:solidFill>
+            <a:srgbClr val="B76E00"/>
+          </a:solidFill>
+          <a:ln>
+            <a:noFill/>
+          </a:ln>
+          <a:effectLst/>
+        </p:spPr>
+        <p:style>
+          <a:lnRef idx="1">
+            <a:schemeClr val="accent1"/>
+          </a:lnRef>
+          <a:fillRef idx="3">
+            <a:schemeClr val="accent1"/>
+          </a:fillRef>
+          <a:effectRef idx="2">
+            <a:schemeClr val="accent1"/>
+          </a:effectRef>
+          <a:fontRef idx="minor">
+            <a:schemeClr val="lt1"/>
+          </a:fontRef>
+        </p:style>
+        <p:txBody>
+          <a:bodyPr rtlCol="0" anchor="ctr"/>
+          <a:lstStyle/>
+          <a:p>
+            <a:pPr algn="ctr">
+              <a:spcAft>
+                <a:spcPts val="800"/>
+              </a:spcAft>
+            </a:pPr>
+            <a:r>
+              <a:rPr sz="2000" b="1" i="0">
+                <a:solidFill>
+                  <a:srgbClr val="FFFFFF"/>
+                </a:solidFill>
+                <a:latin typeface="Calibri"/>
+              </a:rPr>
+              <a:t>Camera + LiDAR</a:t>
+            </a:r>
+          </a:p>
+        </p:txBody>
+      </p:sp>
+      <p:sp>
+        <p:nvSpPr>
+          <p:cNvPr id="9" name="Rectangle 8"/>
+          <p:cNvSpPr/>
+          <p:nvPr/>
+        </p:nvSpPr>
+        <p:spPr>
+          <a:xfrm>
+            <a:off x="8083296" y="1920240"/>
+            <a:ext cx="3758184" cy="3794760"/>
+          </a:xfrm>
+          <a:prstGeom prst="rect">
+            <a:avLst/>
+          </a:prstGeom>
+          <a:solidFill>
+            <a:srgbClr val="F2F5F8"/>
+          </a:solidFill>
+          <a:ln w="15875">
+            <a:solidFill>
+              <a:srgbClr val="B76E00"/>
+            </a:solidFill>
+          </a:ln>
+          <a:effectLst/>
+        </p:spPr>
+        <p:style>
+          <a:lnRef idx="1">
+            <a:schemeClr val="accent1"/>
+          </a:lnRef>
+          <a:fillRef idx="3">
+            <a:schemeClr val="accent1"/>
+          </a:fillRef>
+          <a:effectRef idx="2">
+            <a:schemeClr val="accent1"/>
+          </a:effectRef>
+          <a:fontRef idx="minor">
+            <a:schemeClr val="lt1"/>
+          </a:fontRef>
+        </p:style>
+        <p:txBody>
+          <a:bodyPr rtlCol="0" anchor="ctr" wrap="square" lIns="127000" rIns="127000" tIns="101600"/>
+          <a:lstStyle/>
+          <a:p>
+            <a:pPr algn="l">
+              <a:spcAft>
+                <a:spcPts val="1400"/>
+              </a:spcAft>
+            </a:pPr>
+            <a:r>
+              <a:rPr sz="1700" b="0" i="0">
+                <a:solidFill>
+                  <a:srgbClr val="1F2D3D"/>
+                </a:solidFill>
+                <a:latin typeface="Calibri"/>
+              </a:rPr>
+              <a:t>Combine colour images with the 3D points.</a:t>
+            </a:r>
+          </a:p>
+          <a:p>
+            <a:pPr algn="l">
+              <a:spcAft>
+                <a:spcPts val="1200"/>
+              </a:spcAft>
+            </a:pPr>
+            <a:r>
+              <a:rPr sz="1700" b="1" i="0">
+                <a:solidFill>
+                  <a:srgbClr val="2E7D32"/>
+                </a:solidFill>
+                <a:latin typeface="Calibri"/>
+              </a:rPr>
+              <a:t>+ If one sensor is blocked, the other still sees the object.</a:t>
+            </a:r>
+          </a:p>
+          <a:p>
+            <a:pPr algn="l">
+              <a:spcAft>
+                <a:spcPts val="800"/>
+              </a:spcAft>
+            </a:pPr>
+            <a:r>
+              <a:rPr sz="1700" b="1" i="0">
+                <a:solidFill>
+                  <a:srgbClr val="B02A2A"/>
+                </a:solidFill>
+                <a:latin typeface="Calibri"/>
+              </a:rPr>
+              <a:t>− Both sensors must be aligned precisely — errors break the pairing.</a:t>
+            </a:r>
+          </a:p>
+        </p:txBody>
+      </p:sp>
+      <p:sp>
+        <p:nvSpPr>
+          <p:cNvPr id="10" name="Rectangle 9"/>
+          <p:cNvSpPr/>
+          <p:nvPr/>
+        </p:nvSpPr>
+        <p:spPr>
+          <a:xfrm>
+            <a:off x="365760" y="5897880"/>
+            <a:ext cx="11475720" cy="502920"/>
+          </a:xfrm>
+          <a:prstGeom prst="rect">
+            <a:avLst/>
+          </a:prstGeom>
+          <a:solidFill>
+            <a:srgbClr val="E3EEF5"/>
+          </a:solidFill>
+          <a:ln w="19050">
+            <a:solidFill>
+              <a:srgbClr val="0B5C8A"/>
+            </a:solidFill>
+          </a:ln>
+          <a:effectLst/>
+        </p:spPr>
+        <p:style>
+          <a:lnRef idx="1">
+            <a:schemeClr val="accent1"/>
+          </a:lnRef>
+          <a:fillRef idx="3">
+            <a:schemeClr val="accent1"/>
+          </a:fillRef>
+          <a:effectRef idx="2">
+            <a:schemeClr val="accent1"/>
+          </a:effectRef>
+          <a:fontRef idx="minor">
+            <a:schemeClr val="lt1"/>
+          </a:fontRef>
+        </p:style>
+        <p:txBody>
+          <a:bodyPr rtlCol="0" anchor="ctr" wrap="square" tIns="25400" bIns="25400"/>
+          <a:lstStyle/>
+          <a:p>
+            <a:pPr algn="ctr">
+              <a:spcAft>
+                <a:spcPts val="800"/>
+              </a:spcAft>
+            </a:pPr>
+            <a:r>
+              <a:rPr sz="2000" b="1" i="0">
+                <a:solidFill>
+                  <a:srgbClr val="0B5C8A"/>
+                </a:solidFill>
+                <a:latin typeface="Calibri"/>
+              </a:rPr>
+              <a:t>Plan: start with the geometry-based family (no data needed), then add learning and fusion as data arrives.</a:t>
+            </a:r>
+          </a:p>
+        </p:txBody>
+      </p:sp>
+      <p:sp>
+        <p:nvSpPr>
+          <p:cNvPr id="11" name="TextBox 10"/>
           <p:cNvSpPr txBox="1"/>
           <p:nvPr/>
         </p:nvSpPr>
         <p:spPr>
           <a:xfrm>
-            <a:off x="457200" y="4114800"/>
-            <a:ext cx="11247120" cy="2194560"/>
+            <a:off x="365760" y="6473952"/>
+            <a:ext cx="10972800" cy="320040"/>
           </a:xfrm>
           <a:prstGeom prst="rect">
             <a:avLst/>
@@ -4998,63 +8450,31 @@
           <a:p>
             <a:pPr algn="l">
               <a:spcAft>
-                <a:spcPts val="600"/>
-              </a:spcAft>
-            </a:pPr>
-            <a:r>
-              <a:rPr sz="1500" b="0" i="0">
-                <a:solidFill>
-                  <a:srgbClr val="1F2D3D"/>
-                </a:solidFill>
-                <a:latin typeface="Calibri"/>
-              </a:rPr>
-              <a:t>• Shared schema: gt.json vs predictions.json, both in metres (data/GT_TEMPLATE.json).</a:t>
-            </a:r>
-          </a:p>
-          <a:p>
-            <a:pPr algn="l">
-              <a:spcAft>
-                <a:spcPts val="600"/>
-              </a:spcAft>
-            </a:pPr>
-            <a:r>
-              <a:rPr sz="1500" b="0" i="0">
-                <a:solidFill>
-                  <a:srgbClr val="1F2D3D"/>
-                </a:solidFill>
-                <a:latin typeface="Calibri"/>
-              </a:rPr>
-              <a:t>• Method contract: run_detection.sh &lt;scene&gt; → results/&lt;scene&gt;/predictions.json.</a:t>
-            </a:r>
-          </a:p>
-          <a:p>
-            <a:pPr algn="l">
-              <a:spcAft>
-                <a:spcPts val="600"/>
-              </a:spcAft>
-            </a:pPr>
-            <a:r>
-              <a:rPr sz="1500" b="1" i="0">
-                <a:solidFill>
-                  <a:srgbClr val="0B5C8A"/>
-                </a:solidFill>
-                <a:latin typeface="Calibri"/>
-              </a:rPr>
-              <a:t>• eval/evaluate.py matches detections to ground truth and reports precision / recall / F1, radius RMSE, axis-angle error, runtime.</a:t>
-            </a:r>
-          </a:p>
-        </p:txBody>
-      </p:sp>
-      <p:sp>
-        <p:nvSpPr>
-          <p:cNvPr id="6" name="TextBox 5"/>
+                <a:spcPts val="800"/>
+              </a:spcAft>
+            </a:pPr>
+            <a:r>
+              <a:rPr sz="1000" b="0" i="0">
+                <a:solidFill>
+                  <a:srgbClr val="555555"/>
+                </a:solidFill>
+                <a:latin typeface="Calibri"/>
+              </a:rPr>
+              <a:t>Detection and Robotic Manipulation of Partially Occluded Object(s)</a:t>
+            </a:r>
+          </a:p>
+        </p:txBody>
+      </p:sp>
+      <p:sp>
+        <p:nvSpPr>
+          <p:cNvPr id="12" name="TextBox 11"/>
           <p:cNvSpPr txBox="1"/>
           <p:nvPr/>
         </p:nvSpPr>
         <p:spPr>
           <a:xfrm>
-            <a:off x="365760" y="6446520"/>
-            <a:ext cx="10972800" cy="320040"/>
+            <a:off x="11521440" y="6473952"/>
+            <a:ext cx="548640" cy="320040"/>
           </a:xfrm>
           <a:prstGeom prst="rect">
             <a:avLst/>
@@ -5067,52 +8487,13 @@
           </a:bodyPr>
           <a:lstStyle/>
           <a:p>
-            <a:pPr algn="l">
-              <a:spcAft>
-                <a:spcPts val="600"/>
-              </a:spcAft>
-            </a:pPr>
-            <a:r>
-              <a:rPr sz="900" b="0" i="0">
-                <a:solidFill>
-                  <a:srgbClr val="555555"/>
-                </a:solidFill>
-                <a:latin typeface="Calibri"/>
-              </a:rPr>
-              <a:t>Detection and Robotic Manipulation of Partially Occluded Object(s)</a:t>
-            </a:r>
-          </a:p>
-        </p:txBody>
-      </p:sp>
-      <p:sp>
-        <p:nvSpPr>
-          <p:cNvPr id="7" name="TextBox 6"/>
-          <p:cNvSpPr txBox="1"/>
-          <p:nvPr/>
-        </p:nvSpPr>
-        <p:spPr>
-          <a:xfrm>
-            <a:off x="11521440" y="6446520"/>
-            <a:ext cx="548640" cy="320040"/>
-          </a:xfrm>
-          <a:prstGeom prst="rect">
-            <a:avLst/>
-          </a:prstGeom>
-          <a:noFill/>
-        </p:spPr>
-        <p:txBody>
-          <a:bodyPr wrap="square">
-            <a:spAutoFit/>
-          </a:bodyPr>
-          <a:lstStyle/>
-          <a:p>
             <a:pPr algn="r">
               <a:spcAft>
-                <a:spcPts val="600"/>
-              </a:spcAft>
-            </a:pPr>
-            <a:r>
-              <a:rPr sz="1000" b="0" i="0">
+                <a:spcPts val="800"/>
+              </a:spcAft>
+            </a:pPr>
+            <a:r>
+              <a:rPr sz="1100" b="0" i="0">
                 <a:solidFill>
                   <a:srgbClr val="555555"/>
                 </a:solidFill>
@@ -5193,8 +8574,8 @@
         </p:nvSpPr>
         <p:spPr>
           <a:xfrm>
-            <a:off x="457200" y="109728"/>
-            <a:ext cx="11247120" cy="868680"/>
+            <a:off x="457200" y="91440"/>
+            <a:ext cx="11247120" cy="914400"/>
           </a:xfrm>
           <a:prstGeom prst="rect">
             <a:avLst/>
@@ -5209,40 +8590,127 @@
           <a:p>
             <a:pPr algn="l">
               <a:spcAft>
-                <a:spcPts val="600"/>
-              </a:spcAft>
-            </a:pPr>
-            <a:r>
-              <a:rPr sz="2700" b="1" i="0">
+                <a:spcPts val="800"/>
+              </a:spcAft>
+            </a:pPr>
+            <a:r>
+              <a:rPr sz="3000" b="1" i="0">
                 <a:solidFill>
                   <a:srgbClr val="FFFFFF"/>
                 </a:solidFill>
                 <a:latin typeface="Calibri"/>
               </a:rPr>
-              <a:t>Evaluating the methods — synthetic noise sweep</a:t>
+              <a:t>Four geometry-based methods implemented</a:t>
             </a:r>
           </a:p>
           <a:p>
             <a:pPr algn="l">
               <a:spcAft>
-                <a:spcPts val="600"/>
-              </a:spcAft>
-            </a:pPr>
-            <a:r>
-              <a:rPr sz="1400" b="0" i="0">
+                <a:spcPts val="800"/>
+              </a:spcAft>
+            </a:pPr>
+            <a:r>
+              <a:rPr sz="1700" b="0" i="0">
                 <a:solidFill>
                   <a:srgbClr val="D6E6F0"/>
                 </a:solidFill>
                 <a:latin typeface="Calibri"/>
               </a:rPr>
-              <a:t>33 clouds, fixed ~120° arc, Gaussian noise 0.0–0.6 cm × 3 seeds — noise isolated as the single variable</a:t>
+              <a:t>Each explained in one sentence — details on request</a:t>
+            </a:r>
+          </a:p>
+        </p:txBody>
+      </p:sp>
+      <p:sp>
+        <p:nvSpPr>
+          <p:cNvPr id="4" name="TextBox 3"/>
+          <p:cNvSpPr txBox="1"/>
+          <p:nvPr/>
+        </p:nvSpPr>
+        <p:spPr>
+          <a:xfrm>
+            <a:off x="457200" y="1417320"/>
+            <a:ext cx="11338560" cy="2468880"/>
+          </a:xfrm>
+          <a:prstGeom prst="rect">
+            <a:avLst/>
+          </a:prstGeom>
+          <a:noFill/>
+        </p:spPr>
+        <p:txBody>
+          <a:bodyPr wrap="square">
+            <a:spAutoFit/>
+          </a:bodyPr>
+          <a:lstStyle/>
+          <a:p>
+            <a:pPr algn="l">
+              <a:spcAft>
+                <a:spcPts val="1000"/>
+              </a:spcAft>
+            </a:pPr>
+            <a:r>
+              <a:rPr sz="1900" b="0" i="0">
+                <a:solidFill>
+                  <a:srgbClr val="1F2D3D"/>
+                </a:solidFill>
+                <a:latin typeface="Calibri"/>
+              </a:rPr>
+              <a:t>• 3DTK Hough (baseline) — every point votes for the cylinders it could lie on; the strongest vote wins.</a:t>
+            </a:r>
+          </a:p>
+          <a:p>
+            <a:pPr algn="l">
+              <a:spcAft>
+                <a:spcPts val="1000"/>
+              </a:spcAft>
+            </a:pPr>
+            <a:r>
+              <a:rPr sz="1900" b="0" i="0">
+                <a:solidFill>
+                  <a:srgbClr val="1F2D3D"/>
+                </a:solidFill>
+                <a:latin typeface="Calibri"/>
+              </a:rPr>
+              <a:t>• RANSAC fit — try many random small point samples, keep the cylinder most points agree with.</a:t>
+            </a:r>
+          </a:p>
+          <a:p>
+            <a:pPr algn="l">
+              <a:spcAft>
+                <a:spcPts val="1000"/>
+              </a:spcAft>
+            </a:pPr>
+            <a:r>
+              <a:rPr sz="1900" b="0" i="0">
+                <a:solidFill>
+                  <a:srgbClr val="1F2D3D"/>
+                </a:solidFill>
+                <a:latin typeface="Calibri"/>
+              </a:rPr>
+              <a:t>• Least-squares fit — start from a rough guess, then adjust the cylinder until it matches the points best.</a:t>
+            </a:r>
+          </a:p>
+          <a:p>
+            <a:pPr algn="l">
+              <a:spcAft>
+                <a:spcPts val="1000"/>
+              </a:spcAft>
+            </a:pPr>
+            <a:r>
+              <a:rPr sz="1900" b="0" i="0">
+                <a:solidFill>
+                  <a:srgbClr val="1F2D3D"/>
+                </a:solidFill>
+                <a:latin typeface="Calibri"/>
+              </a:rPr>
+              <a:t>• Efficient RANSAC — a faster RANSAC variant that searches the whole scene for shapes in one pass.</a:t>
             </a:r>
           </a:p>
         </p:txBody>
       </p:sp>
       <p:pic>
         <p:nvPicPr>
-          <p:cNvPr id="4" name="Picture 3" descr="synth_noise_sweep.png"/>
+          <p:cNvPr id="5" name="Picture 4" descr="architecture_diagram.png"/>
           <p:cNvPicPr>
             <a:picLocks noChangeAspect="1"/>
           </p:cNvPicPr>
@@ -5256,8 +8724,8 @@
         </p:blipFill>
         <p:spPr>
           <a:xfrm>
-            <a:off x="274320" y="2691765"/>
-            <a:ext cx="6766560" cy="2114550"/>
+            <a:off x="3589021" y="3977639"/>
+            <a:ext cx="4983477" cy="1874519"/>
           </a:xfrm>
           <a:prstGeom prst="rect">
             <a:avLst/>
@@ -5266,14 +8734,73 @@
       </p:pic>
       <p:sp>
         <p:nvSpPr>
-          <p:cNvPr id="5" name="TextBox 4"/>
+          <p:cNvPr id="6" name="Rectangle 5"/>
+          <p:cNvSpPr/>
+          <p:nvPr/>
+        </p:nvSpPr>
+        <p:spPr>
+          <a:xfrm>
+            <a:off x="365760" y="5943600"/>
+            <a:ext cx="11475720" cy="502920"/>
+          </a:xfrm>
+          <a:prstGeom prst="rect">
+            <a:avLst/>
+          </a:prstGeom>
+          <a:solidFill>
+            <a:srgbClr val="E3EEF5"/>
+          </a:solidFill>
+          <a:ln w="19050">
+            <a:solidFill>
+              <a:srgbClr val="0B5C8A"/>
+            </a:solidFill>
+          </a:ln>
+          <a:effectLst/>
+        </p:spPr>
+        <p:style>
+          <a:lnRef idx="1">
+            <a:schemeClr val="accent1"/>
+          </a:lnRef>
+          <a:fillRef idx="3">
+            <a:schemeClr val="accent1"/>
+          </a:fillRef>
+          <a:effectRef idx="2">
+            <a:schemeClr val="accent1"/>
+          </a:effectRef>
+          <a:fontRef idx="minor">
+            <a:schemeClr val="lt1"/>
+          </a:fontRef>
+        </p:style>
+        <p:txBody>
+          <a:bodyPr rtlCol="0" anchor="ctr" wrap="square" tIns="25400" bIns="25400"/>
+          <a:lstStyle/>
+          <a:p>
+            <a:pPr algn="ctr">
+              <a:spcAft>
+                <a:spcPts val="800"/>
+              </a:spcAft>
+            </a:pPr>
+            <a:r>
+              <a:rPr sz="2000" b="1" i="0">
+                <a:solidFill>
+                  <a:srgbClr val="0B5C8A"/>
+                </a:solidFill>
+                <a:latin typeface="Calibri"/>
+              </a:rPr>
+              <a:t>All four: LiDAR points only · no training data · identical input and output — directly comparable.</a:t>
+            </a:r>
+          </a:p>
+        </p:txBody>
+      </p:sp>
+      <p:sp>
+        <p:nvSpPr>
+          <p:cNvPr id="7" name="TextBox 6"/>
           <p:cNvSpPr txBox="1"/>
           <p:nvPr/>
         </p:nvSpPr>
         <p:spPr>
           <a:xfrm>
-            <a:off x="274320" y="5989320"/>
-            <a:ext cx="6766560" cy="320040"/>
+            <a:off x="365760" y="6473952"/>
+            <a:ext cx="10972800" cy="320040"/>
           </a:xfrm>
           <a:prstGeom prst="rect">
             <a:avLst/>
@@ -5286,531 +8813,33 @@
           </a:bodyPr>
           <a:lstStyle/>
           <a:p>
-            <a:pPr algn="ctr">
-              <a:spcAft>
-                <a:spcPts val="600"/>
-              </a:spcAft>
-            </a:pPr>
-            <a:r>
-              <a:rPr sz="1200" b="0" i="0">
+            <a:pPr algn="l">
+              <a:spcAft>
+                <a:spcPts val="800"/>
+              </a:spcAft>
+            </a:pPr>
+            <a:r>
+              <a:rPr sz="1000" b="0" i="0">
                 <a:solidFill>
                   <a:srgbClr val="555555"/>
                 </a:solidFill>
                 <a:latin typeface="Calibri"/>
               </a:rPr>
-              <a:t>accuracy / error vs Gaussian noise, one line per method</a:t>
-            </a:r>
-          </a:p>
-        </p:txBody>
-      </p:sp>
-      <p:graphicFrame>
-        <p:nvGraphicFramePr>
-          <p:cNvPr id="6" name="Table 5"/>
-          <p:cNvGraphicFramePr>
-            <a:graphicFrameLocks noGrp="1"/>
-          </p:cNvGraphicFramePr>
-          <p:nvPr/>
-        </p:nvGraphicFramePr>
-        <p:xfrm>
-          <a:off x="7178040" y="1554480"/>
-          <a:ext cx="4709160" cy="2011680"/>
-        </p:xfrm>
-        <a:graphic>
-          <a:graphicData uri="http://schemas.openxmlformats.org/drawingml/2006/table">
-            <a:tbl>
-              <a:tblPr firstRow="1" bandRow="1">
-                <a:tableStyleId>{5C22544A-7EE6-4342-B048-85BDC9FD1C3A}</a:tableStyleId>
-              </a:tblPr>
-              <a:tblGrid>
-                <a:gridCol w="1600200"/>
-                <a:gridCol w="1188720"/>
-                <a:gridCol w="1143000"/>
-                <a:gridCol w="777240"/>
-              </a:tblGrid>
-              <a:tr h="402336">
-                <a:tc>
-                  <a:txBody>
-                    <a:bodyPr/>
-                    <a:lstStyle/>
-                    <a:p>
-                      <a:pPr algn="l"/>
-                      <a:r>
-                        <a:rPr sz="1100" b="1">
-                          <a:solidFill>
-                            <a:srgbClr val="FFFFFF"/>
-                          </a:solidFill>
-                          <a:latin typeface="Calibri"/>
-                        </a:rPr>
-                        <a:t>Method</a:t>
-                      </a:r>
-                    </a:p>
-                  </a:txBody>
-                  <a:tcPr anchor="ctr" marT="25400" marB="25400">
-                    <a:solidFill>
-                      <a:srgbClr val="0B5C8A"/>
-                    </a:solidFill>
-                  </a:tcPr>
-                </a:tc>
-                <a:tc>
-                  <a:txBody>
-                    <a:bodyPr/>
-                    <a:lstStyle/>
-                    <a:p>
-                      <a:pPr algn="ctr"/>
-                      <a:r>
-                        <a:rPr sz="1100" b="1">
-                          <a:solidFill>
-                            <a:srgbClr val="FFFFFF"/>
-                          </a:solidFill>
-                          <a:latin typeface="Calibri"/>
-                        </a:rPr>
-                        <a:t>P / R / F1</a:t>
-                      </a:r>
-                    </a:p>
-                  </a:txBody>
-                  <a:tcPr anchor="ctr" marT="25400" marB="25400">
-                    <a:solidFill>
-                      <a:srgbClr val="0B5C8A"/>
-                    </a:solidFill>
-                  </a:tcPr>
-                </a:tc>
-                <a:tc>
-                  <a:txBody>
-                    <a:bodyPr/>
-                    <a:lstStyle/>
-                    <a:p>
-                      <a:pPr algn="ctr"/>
-                      <a:r>
-                        <a:rPr sz="1100" b="1">
-                          <a:solidFill>
-                            <a:srgbClr val="FFFFFF"/>
-                          </a:solidFill>
-                          <a:latin typeface="Calibri"/>
-                        </a:rPr>
-                        <a:t>radius RMSE</a:t>
-                      </a:r>
-                    </a:p>
-                  </a:txBody>
-                  <a:tcPr anchor="ctr" marT="25400" marB="25400">
-                    <a:solidFill>
-                      <a:srgbClr val="0B5C8A"/>
-                    </a:solidFill>
-                  </a:tcPr>
-                </a:tc>
-                <a:tc>
-                  <a:txBody>
-                    <a:bodyPr/>
-                    <a:lstStyle/>
-                    <a:p>
-                      <a:pPr algn="ctr"/>
-                      <a:r>
-                        <a:rPr sz="1100" b="1">
-                          <a:solidFill>
-                            <a:srgbClr val="FFFFFF"/>
-                          </a:solidFill>
-                          <a:latin typeface="Calibri"/>
-                        </a:rPr>
-                        <a:t>axis err</a:t>
-                      </a:r>
-                    </a:p>
-                  </a:txBody>
-                  <a:tcPr anchor="ctr" marT="25400" marB="25400">
-                    <a:solidFill>
-                      <a:srgbClr val="0B5C8A"/>
-                    </a:solidFill>
-                  </a:tcPr>
-                </a:tc>
-              </a:tr>
-              <a:tr h="402336">
-                <a:tc>
-                  <a:txBody>
-                    <a:bodyPr/>
-                    <a:lstStyle/>
-                    <a:p>
-                      <a:pPr algn="l"/>
-                      <a:r>
-                        <a:rPr sz="1100" b="0">
-                          <a:solidFill>
-                            <a:srgbClr val="1F2D3D"/>
-                          </a:solidFill>
-                          <a:latin typeface="Calibri"/>
-                        </a:rPr>
-                        <a:t>Nonlinear LS</a:t>
-                      </a:r>
-                    </a:p>
-                  </a:txBody>
-                  <a:tcPr anchor="ctr" marT="25400" marB="25400">
-                    <a:solidFill>
-                      <a:srgbClr val="F2F5F8"/>
-                    </a:solidFill>
-                  </a:tcPr>
-                </a:tc>
-                <a:tc>
-                  <a:txBody>
-                    <a:bodyPr/>
-                    <a:lstStyle/>
-                    <a:p>
-                      <a:pPr algn="ctr"/>
-                      <a:r>
-                        <a:rPr sz="1100" b="0">
-                          <a:solidFill>
-                            <a:srgbClr val="1F2D3D"/>
-                          </a:solidFill>
-                          <a:latin typeface="Calibri"/>
-                        </a:rPr>
-                        <a:t>1.00/1.00/1.00</a:t>
-                      </a:r>
-                    </a:p>
-                  </a:txBody>
-                  <a:tcPr anchor="ctr" marT="25400" marB="25400">
-                    <a:solidFill>
-                      <a:srgbClr val="F2F5F8"/>
-                    </a:solidFill>
-                  </a:tcPr>
-                </a:tc>
-                <a:tc>
-                  <a:txBody>
-                    <a:bodyPr/>
-                    <a:lstStyle/>
-                    <a:p>
-                      <a:pPr algn="ctr"/>
-                      <a:r>
-                        <a:rPr sz="1100" b="0">
-                          <a:solidFill>
-                            <a:srgbClr val="1F2D3D"/>
-                          </a:solidFill>
-                          <a:latin typeface="Calibri"/>
-                        </a:rPr>
-                        <a:t>0.00–1.09 cm</a:t>
-                      </a:r>
-                    </a:p>
-                  </a:txBody>
-                  <a:tcPr anchor="ctr" marT="25400" marB="25400">
-                    <a:solidFill>
-                      <a:srgbClr val="F2F5F8"/>
-                    </a:solidFill>
-                  </a:tcPr>
-                </a:tc>
-                <a:tc>
-                  <a:txBody>
-                    <a:bodyPr/>
-                    <a:lstStyle/>
-                    <a:p>
-                      <a:pPr algn="ctr"/>
-                      <a:r>
-                        <a:rPr sz="1100" b="0">
-                          <a:solidFill>
-                            <a:srgbClr val="1F2D3D"/>
-                          </a:solidFill>
-                          <a:latin typeface="Calibri"/>
-                        </a:rPr>
-                        <a:t>0.0–0.1°</a:t>
-                      </a:r>
-                    </a:p>
-                  </a:txBody>
-                  <a:tcPr anchor="ctr" marT="25400" marB="25400">
-                    <a:solidFill>
-                      <a:srgbClr val="F2F5F8"/>
-                    </a:solidFill>
-                  </a:tcPr>
-                </a:tc>
-              </a:tr>
-              <a:tr h="402336">
-                <a:tc>
-                  <a:txBody>
-                    <a:bodyPr/>
-                    <a:lstStyle/>
-                    <a:p>
-                      <a:pPr algn="l"/>
-                      <a:r>
-                        <a:rPr sz="1100" b="0">
-                          <a:solidFill>
-                            <a:srgbClr val="1F2D3D"/>
-                          </a:solidFill>
-                          <a:latin typeface="Calibri"/>
-                        </a:rPr>
-                        <a:t>RANSAC fit</a:t>
-                      </a:r>
-                    </a:p>
-                  </a:txBody>
-                  <a:tcPr anchor="ctr" marT="25400" marB="25400">
-                    <a:solidFill>
-                      <a:srgbClr val="FFFFFF"/>
-                    </a:solidFill>
-                  </a:tcPr>
-                </a:tc>
-                <a:tc>
-                  <a:txBody>
-                    <a:bodyPr/>
-                    <a:lstStyle/>
-                    <a:p>
-                      <a:pPr algn="ctr"/>
-                      <a:r>
-                        <a:rPr sz="1100" b="0">
-                          <a:solidFill>
-                            <a:srgbClr val="1F2D3D"/>
-                          </a:solidFill>
-                          <a:latin typeface="Calibri"/>
-                        </a:rPr>
-                        <a:t>1.00/1.00/1.00</a:t>
-                      </a:r>
-                    </a:p>
-                  </a:txBody>
-                  <a:tcPr anchor="ctr" marT="25400" marB="25400">
-                    <a:solidFill>
-                      <a:srgbClr val="FFFFFF"/>
-                    </a:solidFill>
-                  </a:tcPr>
-                </a:tc>
-                <a:tc>
-                  <a:txBody>
-                    <a:bodyPr/>
-                    <a:lstStyle/>
-                    <a:p>
-                      <a:pPr algn="ctr"/>
-                      <a:r>
-                        <a:rPr sz="1100" b="0">
-                          <a:solidFill>
-                            <a:srgbClr val="1F2D3D"/>
-                          </a:solidFill>
-                          <a:latin typeface="Calibri"/>
-                        </a:rPr>
-                        <a:t>0.00–0.62 cm</a:t>
-                      </a:r>
-                    </a:p>
-                  </a:txBody>
-                  <a:tcPr anchor="ctr" marT="25400" marB="25400">
-                    <a:solidFill>
-                      <a:srgbClr val="FFFFFF"/>
-                    </a:solidFill>
-                  </a:tcPr>
-                </a:tc>
-                <a:tc>
-                  <a:txBody>
-                    <a:bodyPr/>
-                    <a:lstStyle/>
-                    <a:p>
-                      <a:pPr algn="ctr"/>
-                      <a:r>
-                        <a:rPr sz="1100" b="0">
-                          <a:solidFill>
-                            <a:srgbClr val="1F2D3D"/>
-                          </a:solidFill>
-                          <a:latin typeface="Calibri"/>
-                        </a:rPr>
-                        <a:t>0.0–3.3°</a:t>
-                      </a:r>
-                    </a:p>
-                  </a:txBody>
-                  <a:tcPr anchor="ctr" marT="25400" marB="25400">
-                    <a:solidFill>
-                      <a:srgbClr val="FFFFFF"/>
-                    </a:solidFill>
-                  </a:tcPr>
-                </a:tc>
-              </a:tr>
-              <a:tr h="402336">
-                <a:tc>
-                  <a:txBody>
-                    <a:bodyPr/>
-                    <a:lstStyle/>
-                    <a:p>
-                      <a:pPr algn="l"/>
-                      <a:r>
-                        <a:rPr sz="1100" b="0">
-                          <a:solidFill>
-                            <a:srgbClr val="1F2D3D"/>
-                          </a:solidFill>
-                          <a:latin typeface="Calibri"/>
-                        </a:rPr>
-                        <a:t>Efficient RANSAC</a:t>
-                      </a:r>
-                    </a:p>
-                  </a:txBody>
-                  <a:tcPr anchor="ctr" marT="25400" marB="25400">
-                    <a:solidFill>
-                      <a:srgbClr val="F2F5F8"/>
-                    </a:solidFill>
-                  </a:tcPr>
-                </a:tc>
-                <a:tc>
-                  <a:txBody>
-                    <a:bodyPr/>
-                    <a:lstStyle/>
-                    <a:p>
-                      <a:pPr algn="ctr"/>
-                      <a:r>
-                        <a:rPr sz="1100" b="0">
-                          <a:solidFill>
-                            <a:srgbClr val="1F2D3D"/>
-                          </a:solidFill>
-                          <a:latin typeface="Calibri"/>
-                        </a:rPr>
-                        <a:t>0.89/0.76/0.82</a:t>
-                      </a:r>
-                    </a:p>
-                  </a:txBody>
-                  <a:tcPr anchor="ctr" marT="25400" marB="25400">
-                    <a:solidFill>
-                      <a:srgbClr val="F2F5F8"/>
-                    </a:solidFill>
-                  </a:tcPr>
-                </a:tc>
-                <a:tc>
-                  <a:txBody>
-                    <a:bodyPr/>
-                    <a:lstStyle/>
-                    <a:p>
-                      <a:pPr algn="ctr"/>
-                      <a:r>
-                        <a:rPr sz="1100" b="0">
-                          <a:solidFill>
-                            <a:srgbClr val="1F2D3D"/>
-                          </a:solidFill>
-                          <a:latin typeface="Calibri"/>
-                        </a:rPr>
-                        <a:t>0.00–3.74 cm</a:t>
-                      </a:r>
-                    </a:p>
-                  </a:txBody>
-                  <a:tcPr anchor="ctr" marT="25400" marB="25400">
-                    <a:solidFill>
-                      <a:srgbClr val="F2F5F8"/>
-                    </a:solidFill>
-                  </a:tcPr>
-                </a:tc>
-                <a:tc>
-                  <a:txBody>
-                    <a:bodyPr/>
-                    <a:lstStyle/>
-                    <a:p>
-                      <a:pPr algn="ctr"/>
-                      <a:r>
-                        <a:rPr sz="1100" b="0">
-                          <a:solidFill>
-                            <a:srgbClr val="1F2D3D"/>
-                          </a:solidFill>
-                          <a:latin typeface="Calibri"/>
-                        </a:rPr>
-                        <a:t>0.0–7.6°</a:t>
-                      </a:r>
-                    </a:p>
-                  </a:txBody>
-                  <a:tcPr anchor="ctr" marT="25400" marB="25400">
-                    <a:solidFill>
-                      <a:srgbClr val="F2F5F8"/>
-                    </a:solidFill>
-                  </a:tcPr>
-                </a:tc>
-              </a:tr>
-              <a:tr h="402336">
-                <a:tc>
-                  <a:txBody>
-                    <a:bodyPr/>
-                    <a:lstStyle/>
-                    <a:p>
-                      <a:pPr algn="l"/>
-                      <a:r>
-                        <a:rPr sz="1100" b="0">
-                          <a:solidFill>
-                            <a:srgbClr val="1F2D3D"/>
-                          </a:solidFill>
-                          <a:latin typeface="Calibri"/>
-                        </a:rPr>
-                        <a:t>3DTK Hough (baseline)</a:t>
-                      </a:r>
-                    </a:p>
-                  </a:txBody>
-                  <a:tcPr anchor="ctr" marT="25400" marB="25400">
-                    <a:solidFill>
-                      <a:srgbClr val="FFFFFF"/>
-                    </a:solidFill>
-                  </a:tcPr>
-                </a:tc>
-                <a:tc>
-                  <a:txBody>
-                    <a:bodyPr/>
-                    <a:lstStyle/>
-                    <a:p>
-                      <a:pPr algn="ctr"/>
-                      <a:r>
-                        <a:rPr sz="1100" b="0">
-                          <a:solidFill>
-                            <a:srgbClr val="1F2D3D"/>
-                          </a:solidFill>
-                          <a:latin typeface="Calibri"/>
-                        </a:rPr>
-                        <a:t>1.00/0.39/0.57</a:t>
-                      </a:r>
-                    </a:p>
-                  </a:txBody>
-                  <a:tcPr anchor="ctr" marT="25400" marB="25400">
-                    <a:solidFill>
-                      <a:srgbClr val="FFFFFF"/>
-                    </a:solidFill>
-                  </a:tcPr>
-                </a:tc>
-                <a:tc>
-                  <a:txBody>
-                    <a:bodyPr/>
-                    <a:lstStyle/>
-                    <a:p>
-                      <a:pPr algn="ctr"/>
-                      <a:r>
-                        <a:rPr sz="1100" b="0">
-                          <a:solidFill>
-                            <a:srgbClr val="1F2D3D"/>
-                          </a:solidFill>
-                          <a:latin typeface="Calibri"/>
-                        </a:rPr>
-                        <a:t>0.06–1.41 cm</a:t>
-                      </a:r>
-                    </a:p>
-                  </a:txBody>
-                  <a:tcPr anchor="ctr" marT="25400" marB="25400">
-                    <a:solidFill>
-                      <a:srgbClr val="FFFFFF"/>
-                    </a:solidFill>
-                  </a:tcPr>
-                </a:tc>
-                <a:tc>
-                  <a:txBody>
-                    <a:bodyPr/>
-                    <a:lstStyle/>
-                    <a:p>
-                      <a:pPr algn="ctr"/>
-                      <a:r>
-                        <a:rPr sz="1100" b="0">
-                          <a:solidFill>
-                            <a:srgbClr val="1F2D3D"/>
-                          </a:solidFill>
-                          <a:latin typeface="Calibri"/>
-                        </a:rPr>
-                        <a:t>0.1–0.1°</a:t>
-                      </a:r>
-                    </a:p>
-                  </a:txBody>
-                  <a:tcPr anchor="ctr" marT="25400" marB="25400">
-                    <a:solidFill>
-                      <a:srgbClr val="FFFFFF"/>
-                    </a:solidFill>
-                  </a:tcPr>
-                </a:tc>
-              </a:tr>
-            </a:tbl>
-          </a:graphicData>
-        </a:graphic>
-      </p:graphicFrame>
-      <p:sp>
-        <p:nvSpPr>
-          <p:cNvPr id="7" name="TextBox 6"/>
+              <a:t>Detection and Robotic Manipulation of Partially Occluded Object(s)</a:t>
+            </a:r>
+          </a:p>
+        </p:txBody>
+      </p:sp>
+      <p:sp>
+        <p:nvSpPr>
+          <p:cNvPr id="8" name="TextBox 7"/>
           <p:cNvSpPr txBox="1"/>
           <p:nvPr/>
         </p:nvSpPr>
         <p:spPr>
           <a:xfrm>
-            <a:off x="7178040" y="3886200"/>
-            <a:ext cx="4709160" cy="2468880"/>
+            <a:off x="11521440" y="6473952"/>
+            <a:ext cx="548640" cy="320040"/>
           </a:xfrm>
           <a:prstGeom prst="rect">
             <a:avLst/>
@@ -5823,155 +8852,13 @@
           </a:bodyPr>
           <a:lstStyle/>
           <a:p>
-            <a:pPr algn="l">
-              <a:spcAft>
-                <a:spcPts val="600"/>
-              </a:spcAft>
-            </a:pPr>
-            <a:r>
-              <a:rPr sz="1300" b="0" i="0">
-                <a:solidFill>
-                  <a:srgbClr val="2E7D32"/>
-                </a:solidFill>
-                <a:latin typeface="Calibri"/>
-              </a:rPr>
-              <a:t>• RANSAC + LS detect at every noise level (F1 = 1.0 across the whole sweep).</a:t>
-            </a:r>
-          </a:p>
-          <a:p>
-            <a:pPr algn="l">
-              <a:spcAft>
-                <a:spcPts val="600"/>
-              </a:spcAft>
-            </a:pPr>
-            <a:r>
-              <a:rPr sz="1300" b="0" i="0">
-                <a:solidFill>
-                  <a:srgbClr val="B76E00"/>
-                </a:solidFill>
-                <a:latin typeface="Calibri"/>
-              </a:rPr>
-              <a:t>• Efficient RANSAC degrades fastest — axis err ~4° by σ=0.2 and it drops detections mid-range.</a:t>
-            </a:r>
-          </a:p>
-          <a:p>
-            <a:pPr algn="l">
-              <a:spcAft>
-                <a:spcPts val="600"/>
-              </a:spcAft>
-            </a:pPr>
-            <a:r>
-              <a:rPr sz="1300" b="0" i="0">
-                <a:solidFill>
-                  <a:srgbClr val="B76E00"/>
-                </a:solidFill>
-                <a:latin typeface="Calibri"/>
-              </a:rPr>
-              <a:t>• 3DTK Hough is erratic: misses the clean scenes, only locks on at high noise.</a:t>
-            </a:r>
-          </a:p>
-          <a:p>
-            <a:pPr algn="l">
-              <a:spcAft>
-                <a:spcPts val="600"/>
-              </a:spcAft>
-            </a:pPr>
-            <a:r>
-              <a:rPr sz="1300" b="0" i="0">
-                <a:solidFill>
-                  <a:srgbClr val="555555"/>
-                </a:solidFill>
-                <a:latin typeface="Calibri"/>
-              </a:rPr>
-              <a:t>• LS best axis (≤0.1°) but slowest (~17 s/scene, ~5–10× the others).</a:t>
-            </a:r>
-          </a:p>
-          <a:p>
-            <a:pPr algn="l">
-              <a:spcAft>
-                <a:spcPts val="600"/>
-              </a:spcAft>
-            </a:pPr>
-            <a:r>
-              <a:rPr sz="1000" b="0" i="1">
-                <a:solidFill>
-                  <a:srgbClr val="555555"/>
-                </a:solidFill>
-                <a:latin typeface="Calibri"/>
-              </a:rPr>
-              <a:t>• Table aggregates all sweep_* scenes, read live from eval/*.csv.</a:t>
-            </a:r>
-          </a:p>
-        </p:txBody>
-      </p:sp>
-      <p:sp>
-        <p:nvSpPr>
-          <p:cNvPr id="8" name="TextBox 7"/>
-          <p:cNvSpPr txBox="1"/>
-          <p:nvPr/>
-        </p:nvSpPr>
-        <p:spPr>
-          <a:xfrm>
-            <a:off x="365760" y="6446520"/>
-            <a:ext cx="10972800" cy="320040"/>
-          </a:xfrm>
-          <a:prstGeom prst="rect">
-            <a:avLst/>
-          </a:prstGeom>
-          <a:noFill/>
-        </p:spPr>
-        <p:txBody>
-          <a:bodyPr wrap="square">
-            <a:spAutoFit/>
-          </a:bodyPr>
-          <a:lstStyle/>
-          <a:p>
-            <a:pPr algn="l">
-              <a:spcAft>
-                <a:spcPts val="600"/>
-              </a:spcAft>
-            </a:pPr>
-            <a:r>
-              <a:rPr sz="900" b="0" i="0">
-                <a:solidFill>
-                  <a:srgbClr val="555555"/>
-                </a:solidFill>
-                <a:latin typeface="Calibri"/>
-              </a:rPr>
-              <a:t>Detection and Robotic Manipulation of Partially Occluded Object(s)</a:t>
-            </a:r>
-          </a:p>
-        </p:txBody>
-      </p:sp>
-      <p:sp>
-        <p:nvSpPr>
-          <p:cNvPr id="9" name="TextBox 8"/>
-          <p:cNvSpPr txBox="1"/>
-          <p:nvPr/>
-        </p:nvSpPr>
-        <p:spPr>
-          <a:xfrm>
-            <a:off x="11521440" y="6446520"/>
-            <a:ext cx="548640" cy="320040"/>
-          </a:xfrm>
-          <a:prstGeom prst="rect">
-            <a:avLst/>
-          </a:prstGeom>
-          <a:noFill/>
-        </p:spPr>
-        <p:txBody>
-          <a:bodyPr wrap="square">
-            <a:spAutoFit/>
-          </a:bodyPr>
-          <a:lstStyle/>
-          <a:p>
             <a:pPr algn="r">
               <a:spcAft>
-                <a:spcPts val="600"/>
-              </a:spcAft>
-            </a:pPr>
-            <a:r>
-              <a:rPr sz="1000" b="0" i="0">
+                <a:spcPts val="800"/>
+              </a:spcAft>
+            </a:pPr>
+            <a:r>
+              <a:rPr sz="1100" b="0" i="0">
                 <a:solidFill>
                   <a:srgbClr val="555555"/>
                 </a:solidFill>
@@ -6052,8 +8939,8 @@
         </p:nvSpPr>
         <p:spPr>
           <a:xfrm>
-            <a:off x="457200" y="109728"/>
-            <a:ext cx="11247120" cy="868680"/>
+            <a:off x="457200" y="91440"/>
+            <a:ext cx="11247120" cy="914400"/>
           </a:xfrm>
           <a:prstGeom prst="rect">
             <a:avLst/>
@@ -6068,40 +8955,24 @@
           <a:p>
             <a:pPr algn="l">
               <a:spcAft>
-                <a:spcPts val="600"/>
-              </a:spcAft>
-            </a:pPr>
-            <a:r>
-              <a:rPr sz="2700" b="1" i="0">
+                <a:spcPts val="800"/>
+              </a:spcAft>
+            </a:pPr>
+            <a:r>
+              <a:rPr sz="3000" b="1" i="0">
                 <a:solidFill>
                   <a:srgbClr val="FFFFFF"/>
                 </a:solidFill>
                 <a:latin typeface="Calibri"/>
               </a:rPr>
-              <a:t>Methods on real data</a:t>
-            </a:r>
-          </a:p>
-          <a:p>
-            <a:pPr algn="l">
-              <a:spcAft>
-                <a:spcPts val="600"/>
-              </a:spcAft>
-            </a:pPr>
-            <a:r>
-              <a:rPr sz="1400" b="0" i="0">
-                <a:solidFill>
-                  <a:srgbClr val="D6E6F0"/>
-                </a:solidFill>
-                <a:latin typeface="Calibri"/>
-              </a:rPr>
-              <a:t>Lab Xtion barrel (clean) and the occluded survey drum (hard)</a:t>
+              <a:t>How we evaluate — one pipeline for every method</a:t>
             </a:r>
           </a:p>
         </p:txBody>
       </p:sp>
       <p:pic>
         <p:nvPicPr>
-          <p:cNvPr id="4" name="Picture 3" descr="real_fits_ransac_ls.png"/>
+          <p:cNvPr id="4" name="Picture 3" descr="pipeline_flow.png"/>
           <p:cNvPicPr>
             <a:picLocks noChangeAspect="1"/>
           </p:cNvPicPr>
@@ -6115,38 +8986,73 @@
         </p:blipFill>
         <p:spPr>
           <a:xfrm>
-            <a:off x="274320" y="1825035"/>
-            <a:ext cx="5852160" cy="1927770"/>
+            <a:off x="274320" y="1947238"/>
+            <a:ext cx="11612880" cy="3237844"/>
           </a:xfrm>
           <a:prstGeom prst="rect">
             <a:avLst/>
           </a:prstGeom>
         </p:spPr>
       </p:pic>
-      <p:pic>
-        <p:nvPicPr>
-          <p:cNvPr id="5" name="Picture 4" descr="real_fits_on_cloud.png"/>
-          <p:cNvPicPr>
-            <a:picLocks noChangeAspect="1"/>
-          </p:cNvPicPr>
-          <p:nvPr/>
-        </p:nvPicPr>
-        <p:blipFill>
-          <a:blip r:embed="rId3"/>
-          <a:stretch>
-            <a:fillRect/>
-          </a:stretch>
-        </p:blipFill>
-        <p:spPr>
-          <a:xfrm>
-            <a:off x="6799217" y="1325880"/>
-            <a:ext cx="4598125" cy="2926080"/>
-          </a:xfrm>
-          <a:prstGeom prst="rect">
-            <a:avLst/>
-          </a:prstGeom>
-        </p:spPr>
-      </p:pic>
+      <p:sp>
+        <p:nvSpPr>
+          <p:cNvPr id="5" name="Rectangle 4"/>
+          <p:cNvSpPr/>
+          <p:nvPr/>
+        </p:nvSpPr>
+        <p:spPr>
+          <a:xfrm>
+            <a:off x="365760" y="5852160"/>
+            <a:ext cx="11475720" cy="502920"/>
+          </a:xfrm>
+          <a:prstGeom prst="rect">
+            <a:avLst/>
+          </a:prstGeom>
+          <a:solidFill>
+            <a:srgbClr val="E3EEF5"/>
+          </a:solidFill>
+          <a:ln w="19050">
+            <a:solidFill>
+              <a:srgbClr val="0B5C8A"/>
+            </a:solidFill>
+          </a:ln>
+          <a:effectLst/>
+        </p:spPr>
+        <p:style>
+          <a:lnRef idx="1">
+            <a:schemeClr val="accent1"/>
+          </a:lnRef>
+          <a:fillRef idx="3">
+            <a:schemeClr val="accent1"/>
+          </a:fillRef>
+          <a:effectRef idx="2">
+            <a:schemeClr val="accent1"/>
+          </a:effectRef>
+          <a:fontRef idx="minor">
+            <a:schemeClr val="lt1"/>
+          </a:fontRef>
+        </p:style>
+        <p:txBody>
+          <a:bodyPr rtlCol="0" anchor="ctr" wrap="square" tIns="25400" bIns="25400"/>
+          <a:lstStyle/>
+          <a:p>
+            <a:pPr algn="ctr">
+              <a:spcAft>
+                <a:spcPts val="800"/>
+              </a:spcAft>
+            </a:pPr>
+            <a:r>
+              <a:rPr sz="2000" b="1" i="0">
+                <a:solidFill>
+                  <a:srgbClr val="0B5C8A"/>
+                </a:solidFill>
+                <a:latin typeface="Calibri"/>
+              </a:rPr>
+              <a:t>A prediction counts as correct if direction is within 30° and the centre within 10 cm of the true drum.</a:t>
+            </a:r>
+          </a:p>
+        </p:txBody>
+      </p:sp>
       <p:sp>
         <p:nvSpPr>
           <p:cNvPr id="6" name="TextBox 5"/>
@@ -6155,8 +9061,8 @@
         </p:nvSpPr>
         <p:spPr>
           <a:xfrm>
-            <a:off x="274320" y="4343400"/>
-            <a:ext cx="11612880" cy="320040"/>
+            <a:off x="365760" y="6473952"/>
+            <a:ext cx="10972800" cy="320040"/>
           </a:xfrm>
           <a:prstGeom prst="rect">
             <a:avLst/>
@@ -6169,653 +9075,33 @@
           </a:bodyPr>
           <a:lstStyle/>
           <a:p>
-            <a:pPr algn="ctr">
-              <a:spcAft>
-                <a:spcPts val="600"/>
-              </a:spcAft>
-            </a:pPr>
-            <a:r>
-              <a:rPr sz="1200" b="0" i="0">
+            <a:pPr algn="l">
+              <a:spcAft>
+                <a:spcPts val="800"/>
+              </a:spcAft>
+            </a:pPr>
+            <a:r>
+              <a:rPr sz="1000" b="0" i="0">
                 <a:solidFill>
                   <a:srgbClr val="555555"/>
                 </a:solidFill>
                 <a:latin typeface="Calibri"/>
               </a:rPr>
-              <a:t>occluded survey drum (station1_pit_barrels_seg00): per-method cross-sections (left) and cylinders on the real cloud (right)</a:t>
-            </a:r>
-          </a:p>
-        </p:txBody>
-      </p:sp>
-      <p:graphicFrame>
-        <p:nvGraphicFramePr>
-          <p:cNvPr id="7" name="Table 6"/>
-          <p:cNvGraphicFramePr>
-            <a:graphicFrameLocks noGrp="1"/>
-          </p:cNvGraphicFramePr>
-          <p:nvPr/>
-        </p:nvGraphicFramePr>
-        <p:xfrm>
-          <a:off x="274320" y="4709160"/>
-          <a:ext cx="5760720" cy="1371600"/>
-        </p:xfrm>
-        <a:graphic>
-          <a:graphicData uri="http://schemas.openxmlformats.org/drawingml/2006/table">
-            <a:tbl>
-              <a:tblPr firstRow="1" bandRow="1">
-                <a:tableStyleId>{5C22544A-7EE6-4342-B048-85BDC9FD1C3A}</a:tableStyleId>
-              </a:tblPr>
-              <a:tblGrid>
-                <a:gridCol w="2743200"/>
-                <a:gridCol w="1280160"/>
-                <a:gridCol w="1005840"/>
-                <a:gridCol w="731520"/>
-              </a:tblGrid>
-              <a:tr h="457200">
-                <a:tc>
-                  <a:txBody>
-                    <a:bodyPr/>
-                    <a:lstStyle/>
-                    <a:p>
-                      <a:pPr algn="l"/>
-                      <a:r>
-                        <a:rPr sz="1000" b="1">
-                          <a:solidFill>
-                            <a:srgbClr val="FFFFFF"/>
-                          </a:solidFill>
-                          <a:latin typeface="Calibri"/>
-                        </a:rPr>
-                        <a:t>data2_crop  (clean Xtion)</a:t>
-                      </a:r>
-                    </a:p>
-                  </a:txBody>
-                  <a:tcPr anchor="ctr" marT="25400" marB="25400">
-                    <a:solidFill>
-                      <a:srgbClr val="2E7D32"/>
-                    </a:solidFill>
-                  </a:tcPr>
-                </a:tc>
-                <a:tc>
-                  <a:txBody>
-                    <a:bodyPr/>
-                    <a:lstStyle/>
-                    <a:p>
-                      <a:pPr algn="ctr"/>
-                      <a:r>
-                        <a:rPr sz="1000" b="1">
-                          <a:solidFill>
-                            <a:srgbClr val="FFFFFF"/>
-                          </a:solidFill>
-                          <a:latin typeface="Calibri"/>
-                        </a:rPr>
-                        <a:t>P/R/F1</a:t>
-                      </a:r>
-                    </a:p>
-                  </a:txBody>
-                  <a:tcPr anchor="ctr" marT="25400" marB="25400">
-                    <a:solidFill>
-                      <a:srgbClr val="2E7D32"/>
-                    </a:solidFill>
-                  </a:tcPr>
-                </a:tc>
-                <a:tc>
-                  <a:txBody>
-                    <a:bodyPr/>
-                    <a:lstStyle/>
-                    <a:p>
-                      <a:pPr algn="ctr"/>
-                      <a:r>
-                        <a:rPr sz="1000" b="1">
-                          <a:solidFill>
-                            <a:srgbClr val="FFFFFF"/>
-                          </a:solidFill>
-                          <a:latin typeface="Calibri"/>
-                        </a:rPr>
-                        <a:t>radius</a:t>
-                      </a:r>
-                    </a:p>
-                  </a:txBody>
-                  <a:tcPr anchor="ctr" marT="25400" marB="25400">
-                    <a:solidFill>
-                      <a:srgbClr val="2E7D32"/>
-                    </a:solidFill>
-                  </a:tcPr>
-                </a:tc>
-                <a:tc>
-                  <a:txBody>
-                    <a:bodyPr/>
-                    <a:lstStyle/>
-                    <a:p>
-                      <a:pPr algn="ctr"/>
-                      <a:r>
-                        <a:rPr sz="1000" b="1">
-                          <a:solidFill>
-                            <a:srgbClr val="FFFFFF"/>
-                          </a:solidFill>
-                          <a:latin typeface="Calibri"/>
-                        </a:rPr>
-                        <a:t>axis</a:t>
-                      </a:r>
-                    </a:p>
-                  </a:txBody>
-                  <a:tcPr anchor="ctr" marT="25400" marB="25400">
-                    <a:solidFill>
-                      <a:srgbClr val="2E7D32"/>
-                    </a:solidFill>
-                  </a:tcPr>
-                </a:tc>
-              </a:tr>
-              <a:tr h="457200">
-                <a:tc>
-                  <a:txBody>
-                    <a:bodyPr/>
-                    <a:lstStyle/>
-                    <a:p>
-                      <a:pPr algn="l"/>
-                      <a:r>
-                        <a:rPr sz="1000" b="0">
-                          <a:solidFill>
-                            <a:srgbClr val="1F2D3D"/>
-                          </a:solidFill>
-                          <a:latin typeface="Calibri"/>
-                        </a:rPr>
-                        <a:t>ransac / ls / efficient_ransac</a:t>
-                      </a:r>
-                    </a:p>
-                  </a:txBody>
-                  <a:tcPr anchor="ctr" marT="25400" marB="25400">
-                    <a:solidFill>
-                      <a:srgbClr val="F2F5F8"/>
-                    </a:solidFill>
-                  </a:tcPr>
-                </a:tc>
-                <a:tc>
-                  <a:txBody>
-                    <a:bodyPr/>
-                    <a:lstStyle/>
-                    <a:p>
-                      <a:pPr algn="ctr"/>
-                      <a:r>
-                        <a:rPr sz="1000" b="0">
-                          <a:solidFill>
-                            <a:srgbClr val="1F2D3D"/>
-                          </a:solidFill>
-                          <a:latin typeface="Calibri"/>
-                        </a:rPr>
-                        <a:t>1.0/1.0/1.0</a:t>
-                      </a:r>
-                    </a:p>
-                  </a:txBody>
-                  <a:tcPr anchor="ctr" marT="25400" marB="25400">
-                    <a:solidFill>
-                      <a:srgbClr val="F2F5F8"/>
-                    </a:solidFill>
-                  </a:tcPr>
-                </a:tc>
-                <a:tc>
-                  <a:txBody>
-                    <a:bodyPr/>
-                    <a:lstStyle/>
-                    <a:p>
-                      <a:pPr algn="ctr"/>
-                      <a:r>
-                        <a:rPr sz="1000" b="0">
-                          <a:solidFill>
-                            <a:srgbClr val="1F2D3D"/>
-                          </a:solidFill>
-                          <a:latin typeface="Calibri"/>
-                        </a:rPr>
-                        <a:t>0.4–0.9 cm</a:t>
-                      </a:r>
-                    </a:p>
-                  </a:txBody>
-                  <a:tcPr anchor="ctr" marT="25400" marB="25400">
-                    <a:solidFill>
-                      <a:srgbClr val="F2F5F8"/>
-                    </a:solidFill>
-                  </a:tcPr>
-                </a:tc>
-                <a:tc>
-                  <a:txBody>
-                    <a:bodyPr/>
-                    <a:lstStyle/>
-                    <a:p>
-                      <a:pPr algn="ctr"/>
-                      <a:r>
-                        <a:rPr sz="1000" b="0">
-                          <a:solidFill>
-                            <a:srgbClr val="1F2D3D"/>
-                          </a:solidFill>
-                          <a:latin typeface="Calibri"/>
-                        </a:rPr>
-                        <a:t>0.1–1.9°</a:t>
-                      </a:r>
-                    </a:p>
-                  </a:txBody>
-                  <a:tcPr anchor="ctr" marT="25400" marB="25400">
-                    <a:solidFill>
-                      <a:srgbClr val="F2F5F8"/>
-                    </a:solidFill>
-                  </a:tcPr>
-                </a:tc>
-              </a:tr>
-              <a:tr h="457200">
-                <a:tc>
-                  <a:txBody>
-                    <a:bodyPr/>
-                    <a:lstStyle/>
-                    <a:p>
-                      <a:pPr algn="l"/>
-                      <a:r>
-                        <a:rPr sz="1000" b="0">
-                          <a:solidFill>
-                            <a:srgbClr val="1F2D3D"/>
-                          </a:solidFill>
-                          <a:latin typeface="Calibri"/>
-                        </a:rPr>
-                        <a:t>3dtk_hough (phantom 2nd cyl)</a:t>
-                      </a:r>
-                    </a:p>
-                  </a:txBody>
-                  <a:tcPr anchor="ctr" marT="25400" marB="25400">
-                    <a:solidFill>
-                      <a:srgbClr val="FFFFFF"/>
-                    </a:solidFill>
-                  </a:tcPr>
-                </a:tc>
-                <a:tc>
-                  <a:txBody>
-                    <a:bodyPr/>
-                    <a:lstStyle/>
-                    <a:p>
-                      <a:pPr algn="ctr"/>
-                      <a:r>
-                        <a:rPr sz="1000" b="0">
-                          <a:solidFill>
-                            <a:srgbClr val="1F2D3D"/>
-                          </a:solidFill>
-                          <a:latin typeface="Calibri"/>
-                        </a:rPr>
-                        <a:t>0.50/1.0/0.67</a:t>
-                      </a:r>
-                    </a:p>
-                  </a:txBody>
-                  <a:tcPr anchor="ctr" marT="25400" marB="25400">
-                    <a:solidFill>
-                      <a:srgbClr val="FFFFFF"/>
-                    </a:solidFill>
-                  </a:tcPr>
-                </a:tc>
-                <a:tc>
-                  <a:txBody>
-                    <a:bodyPr/>
-                    <a:lstStyle/>
-                    <a:p>
-                      <a:pPr algn="ctr"/>
-                      <a:r>
-                        <a:rPr sz="1000" b="0">
-                          <a:solidFill>
-                            <a:srgbClr val="1F2D3D"/>
-                          </a:solidFill>
-                          <a:latin typeface="Calibri"/>
-                        </a:rPr>
-                        <a:t>0.09 cm</a:t>
-                      </a:r>
-                    </a:p>
-                  </a:txBody>
-                  <a:tcPr anchor="ctr" marT="25400" marB="25400">
-                    <a:solidFill>
-                      <a:srgbClr val="FFFFFF"/>
-                    </a:solidFill>
-                  </a:tcPr>
-                </a:tc>
-                <a:tc>
-                  <a:txBody>
-                    <a:bodyPr/>
-                    <a:lstStyle/>
-                    <a:p>
-                      <a:pPr algn="ctr"/>
-                      <a:r>
-                        <a:rPr sz="1000" b="0">
-                          <a:solidFill>
-                            <a:srgbClr val="1F2D3D"/>
-                          </a:solidFill>
-                          <a:latin typeface="Calibri"/>
-                        </a:rPr>
-                        <a:t>1.53°</a:t>
-                      </a:r>
-                    </a:p>
-                  </a:txBody>
-                  <a:tcPr anchor="ctr" marT="25400" marB="25400">
-                    <a:solidFill>
-                      <a:srgbClr val="FFFFFF"/>
-                    </a:solidFill>
-                  </a:tcPr>
-                </a:tc>
-              </a:tr>
-            </a:tbl>
-          </a:graphicData>
-        </a:graphic>
-      </p:graphicFrame>
-      <p:graphicFrame>
-        <p:nvGraphicFramePr>
-          <p:cNvPr id="8" name="Table 7"/>
-          <p:cNvGraphicFramePr>
-            <a:graphicFrameLocks noGrp="1"/>
-          </p:cNvGraphicFramePr>
-          <p:nvPr/>
-        </p:nvGraphicFramePr>
-        <p:xfrm>
-          <a:off x="6263640" y="4709160"/>
-          <a:ext cx="5394960" cy="1371600"/>
-        </p:xfrm>
-        <a:graphic>
-          <a:graphicData uri="http://schemas.openxmlformats.org/drawingml/2006/table">
-            <a:tbl>
-              <a:tblPr firstRow="1" bandRow="1">
-                <a:tableStyleId>{5C22544A-7EE6-4342-B048-85BDC9FD1C3A}</a:tableStyleId>
-              </a:tblPr>
-              <a:tblGrid>
-                <a:gridCol w="2743200"/>
-                <a:gridCol w="1097280"/>
-                <a:gridCol w="1005840"/>
-                <a:gridCol w="548640"/>
-              </a:tblGrid>
-              <a:tr h="457200">
-                <a:tc>
-                  <a:txBody>
-                    <a:bodyPr/>
-                    <a:lstStyle/>
-                    <a:p>
-                      <a:pPr algn="l"/>
-                      <a:r>
-                        <a:rPr sz="1000" b="1">
-                          <a:solidFill>
-                            <a:srgbClr val="FFFFFF"/>
-                          </a:solidFill>
-                          <a:latin typeface="Calibri"/>
-                        </a:rPr>
-                        <a:t>station1_seg00  (occluded)</a:t>
-                      </a:r>
-                    </a:p>
-                  </a:txBody>
-                  <a:tcPr anchor="ctr" marT="25400" marB="25400">
-                    <a:solidFill>
-                      <a:srgbClr val="B76E00"/>
-                    </a:solidFill>
-                  </a:tcPr>
-                </a:tc>
-                <a:tc>
-                  <a:txBody>
-                    <a:bodyPr/>
-                    <a:lstStyle/>
-                    <a:p>
-                      <a:pPr algn="ctr"/>
-                      <a:r>
-                        <a:rPr sz="1000" b="1">
-                          <a:solidFill>
-                            <a:srgbClr val="FFFFFF"/>
-                          </a:solidFill>
-                          <a:latin typeface="Calibri"/>
-                        </a:rPr>
-                        <a:t>axis err</a:t>
-                      </a:r>
-                    </a:p>
-                  </a:txBody>
-                  <a:tcPr anchor="ctr" marT="25400" marB="25400">
-                    <a:solidFill>
-                      <a:srgbClr val="B76E00"/>
-                    </a:solidFill>
-                  </a:tcPr>
-                </a:tc>
-                <a:tc>
-                  <a:txBody>
-                    <a:bodyPr/>
-                    <a:lstStyle/>
-                    <a:p>
-                      <a:pPr algn="ctr"/>
-                      <a:r>
-                        <a:rPr sz="1000" b="1">
-                          <a:solidFill>
-                            <a:srgbClr val="FFFFFF"/>
-                          </a:solidFill>
-                          <a:latin typeface="Calibri"/>
-                        </a:rPr>
-                        <a:t>ctr→axis</a:t>
-                      </a:r>
-                    </a:p>
-                  </a:txBody>
-                  <a:tcPr anchor="ctr" marT="25400" marB="25400">
-                    <a:solidFill>
-                      <a:srgbClr val="B76E00"/>
-                    </a:solidFill>
-                  </a:tcPr>
-                </a:tc>
-                <a:tc>
-                  <a:txBody>
-                    <a:bodyPr/>
-                    <a:lstStyle/>
-                    <a:p>
-                      <a:pPr algn="ctr"/>
-                      <a:r>
-                        <a:rPr sz="1000" b="1">
-                          <a:solidFill>
-                            <a:srgbClr val="FFFFFF"/>
-                          </a:solidFill>
-                          <a:latin typeface="Calibri"/>
-                        </a:rPr>
-                        <a:t>F1</a:t>
-                      </a:r>
-                    </a:p>
-                  </a:txBody>
-                  <a:tcPr anchor="ctr" marT="25400" marB="25400">
-                    <a:solidFill>
-                      <a:srgbClr val="B76E00"/>
-                    </a:solidFill>
-                  </a:tcPr>
-                </a:tc>
-              </a:tr>
-              <a:tr h="457200">
-                <a:tc>
-                  <a:txBody>
-                    <a:bodyPr/>
-                    <a:lstStyle/>
-                    <a:p>
-                      <a:pPr algn="l"/>
-                      <a:r>
-                        <a:rPr sz="1000" b="0">
-                          <a:solidFill>
-                            <a:srgbClr val="1F2D3D"/>
-                          </a:solidFill>
-                          <a:latin typeface="Calibri"/>
-                        </a:rPr>
-                        <a:t>ls_cylinder (near-miss 1.1 cm)</a:t>
-                      </a:r>
-                    </a:p>
-                  </a:txBody>
-                  <a:tcPr anchor="ctr" marT="25400" marB="25400">
-                    <a:solidFill>
-                      <a:srgbClr val="F2F5F8"/>
-                    </a:solidFill>
-                  </a:tcPr>
-                </a:tc>
-                <a:tc>
-                  <a:txBody>
-                    <a:bodyPr/>
-                    <a:lstStyle/>
-                    <a:p>
-                      <a:pPr algn="ctr"/>
-                      <a:r>
-                        <a:rPr sz="1000" b="0">
-                          <a:solidFill>
-                            <a:srgbClr val="1F2D3D"/>
-                          </a:solidFill>
-                          <a:latin typeface="Calibri"/>
-                        </a:rPr>
-                        <a:t>17.1°</a:t>
-                      </a:r>
-                    </a:p>
-                  </a:txBody>
-                  <a:tcPr anchor="ctr" marT="25400" marB="25400">
-                    <a:solidFill>
-                      <a:srgbClr val="F2F5F8"/>
-                    </a:solidFill>
-                  </a:tcPr>
-                </a:tc>
-                <a:tc>
-                  <a:txBody>
-                    <a:bodyPr/>
-                    <a:lstStyle/>
-                    <a:p>
-                      <a:pPr algn="ctr"/>
-                      <a:r>
-                        <a:rPr sz="1000" b="0">
-                          <a:solidFill>
-                            <a:srgbClr val="1F2D3D"/>
-                          </a:solidFill>
-                          <a:latin typeface="Calibri"/>
-                        </a:rPr>
-                        <a:t>11.1 cm</a:t>
-                      </a:r>
-                    </a:p>
-                  </a:txBody>
-                  <a:tcPr anchor="ctr" marT="25400" marB="25400">
-                    <a:solidFill>
-                      <a:srgbClr val="F2F5F8"/>
-                    </a:solidFill>
-                  </a:tcPr>
-                </a:tc>
-                <a:tc>
-                  <a:txBody>
-                    <a:bodyPr/>
-                    <a:lstStyle/>
-                    <a:p>
-                      <a:pPr algn="ctr"/>
-                      <a:r>
-                        <a:rPr sz="1000" b="0">
-                          <a:solidFill>
-                            <a:srgbClr val="1F2D3D"/>
-                          </a:solidFill>
-                          <a:latin typeface="Calibri"/>
-                        </a:rPr>
-                        <a:t>0</a:t>
-                      </a:r>
-                    </a:p>
-                  </a:txBody>
-                  <a:tcPr anchor="ctr" marT="25400" marB="25400">
-                    <a:solidFill>
-                      <a:srgbClr val="F2F5F8"/>
-                    </a:solidFill>
-                  </a:tcPr>
-                </a:tc>
-              </a:tr>
-              <a:tr h="457200">
-                <a:tc>
-                  <a:txBody>
-                    <a:bodyPr/>
-                    <a:lstStyle/>
-                    <a:p>
-                      <a:pPr algn="l"/>
-                      <a:r>
-                        <a:rPr sz="1000" b="0">
-                          <a:solidFill>
-                            <a:srgbClr val="1F2D3D"/>
-                          </a:solidFill>
-                          <a:latin typeface="Calibri"/>
-                        </a:rPr>
-                        <a:t>ransac / eff_ransac / hough</a:t>
-                      </a:r>
-                    </a:p>
-                  </a:txBody>
-                  <a:tcPr anchor="ctr" marT="25400" marB="25400">
-                    <a:solidFill>
-                      <a:srgbClr val="FFFFFF"/>
-                    </a:solidFill>
-                  </a:tcPr>
-                </a:tc>
-                <a:tc>
-                  <a:txBody>
-                    <a:bodyPr/>
-                    <a:lstStyle/>
-                    <a:p>
-                      <a:pPr algn="ctr"/>
-                      <a:r>
-                        <a:rPr sz="1000" b="0">
-                          <a:solidFill>
-                            <a:srgbClr val="1F2D3D"/>
-                          </a:solidFill>
-                          <a:latin typeface="Calibri"/>
-                        </a:rPr>
-                        <a:t>69°/—/—</a:t>
-                      </a:r>
-                    </a:p>
-                  </a:txBody>
-                  <a:tcPr anchor="ctr" marT="25400" marB="25400">
-                    <a:solidFill>
-                      <a:srgbClr val="FFFFFF"/>
-                    </a:solidFill>
-                  </a:tcPr>
-                </a:tc>
-                <a:tc>
-                  <a:txBody>
-                    <a:bodyPr/>
-                    <a:lstStyle/>
-                    <a:p>
-                      <a:pPr algn="ctr"/>
-                      <a:r>
-                        <a:rPr sz="1000" b="0">
-                          <a:solidFill>
-                            <a:srgbClr val="1F2D3D"/>
-                          </a:solidFill>
-                          <a:latin typeface="Calibri"/>
-                        </a:rPr>
-                        <a:t>54 cm/—/—</a:t>
-                      </a:r>
-                    </a:p>
-                  </a:txBody>
-                  <a:tcPr anchor="ctr" marT="25400" marB="25400">
-                    <a:solidFill>
-                      <a:srgbClr val="FFFFFF"/>
-                    </a:solidFill>
-                  </a:tcPr>
-                </a:tc>
-                <a:tc>
-                  <a:txBody>
-                    <a:bodyPr/>
-                    <a:lstStyle/>
-                    <a:p>
-                      <a:pPr algn="ctr"/>
-                      <a:r>
-                        <a:rPr sz="1000" b="0">
-                          <a:solidFill>
-                            <a:srgbClr val="1F2D3D"/>
-                          </a:solidFill>
-                          <a:latin typeface="Calibri"/>
-                        </a:rPr>
-                        <a:t>0</a:t>
-                      </a:r>
-                    </a:p>
-                  </a:txBody>
-                  <a:tcPr anchor="ctr" marT="25400" marB="25400">
-                    <a:solidFill>
-                      <a:srgbClr val="FFFFFF"/>
-                    </a:solidFill>
-                  </a:tcPr>
-                </a:tc>
-              </a:tr>
-            </a:tbl>
-          </a:graphicData>
-        </a:graphic>
-      </p:graphicFrame>
-      <p:sp>
-        <p:nvSpPr>
-          <p:cNvPr id="9" name="TextBox 8"/>
+              <a:t>Detection and Robotic Manipulation of Partially Occluded Object(s)</a:t>
+            </a:r>
+          </a:p>
+        </p:txBody>
+      </p:sp>
+      <p:sp>
+        <p:nvSpPr>
+          <p:cNvPr id="7" name="TextBox 6"/>
           <p:cNvSpPr txBox="1"/>
           <p:nvPr/>
         </p:nvSpPr>
         <p:spPr>
           <a:xfrm>
-            <a:off x="365760" y="6446520"/>
-            <a:ext cx="10972800" cy="320040"/>
+            <a:off x="11521440" y="6473952"/>
+            <a:ext cx="548640" cy="320040"/>
           </a:xfrm>
           <a:prstGeom prst="rect">
             <a:avLst/>
@@ -6828,52 +9114,13 @@
           </a:bodyPr>
           <a:lstStyle/>
           <a:p>
-            <a:pPr algn="l">
-              <a:spcAft>
-                <a:spcPts val="600"/>
-              </a:spcAft>
-            </a:pPr>
-            <a:r>
-              <a:rPr sz="900" b="0" i="0">
-                <a:solidFill>
-                  <a:srgbClr val="555555"/>
-                </a:solidFill>
-                <a:latin typeface="Calibri"/>
-              </a:rPr>
-              <a:t>Detection and Robotic Manipulation of Partially Occluded Object(s)</a:t>
-            </a:r>
-          </a:p>
-        </p:txBody>
-      </p:sp>
-      <p:sp>
-        <p:nvSpPr>
-          <p:cNvPr id="10" name="TextBox 9"/>
-          <p:cNvSpPr txBox="1"/>
-          <p:nvPr/>
-        </p:nvSpPr>
-        <p:spPr>
-          <a:xfrm>
-            <a:off x="11521440" y="6446520"/>
-            <a:ext cx="548640" cy="320040"/>
-          </a:xfrm>
-          <a:prstGeom prst="rect">
-            <a:avLst/>
-          </a:prstGeom>
-          <a:noFill/>
-        </p:spPr>
-        <p:txBody>
-          <a:bodyPr wrap="square">
-            <a:spAutoFit/>
-          </a:bodyPr>
-          <a:lstStyle/>
-          <a:p>
             <a:pPr algn="r">
               <a:spcAft>
-                <a:spcPts val="600"/>
-              </a:spcAft>
-            </a:pPr>
-            <a:r>
-              <a:rPr sz="1000" b="0" i="0">
+                <a:spcPts val="800"/>
+              </a:spcAft>
+            </a:pPr>
+            <a:r>
+              <a:rPr sz="1100" b="0" i="0">
                 <a:solidFill>
                   <a:srgbClr val="555555"/>
                 </a:solidFill>
@@ -6954,8 +9201,8 @@
         </p:nvSpPr>
         <p:spPr>
           <a:xfrm>
-            <a:off x="457200" y="109728"/>
-            <a:ext cx="11247120" cy="868680"/>
+            <a:off x="457200" y="91440"/>
+            <a:ext cx="11247120" cy="914400"/>
           </a:xfrm>
           <a:prstGeom prst="rect">
             <a:avLst/>
@@ -6970,31 +9217,71 @@
           <a:p>
             <a:pPr algn="l">
               <a:spcAft>
-                <a:spcPts val="600"/>
-              </a:spcAft>
-            </a:pPr>
-            <a:r>
-              <a:rPr sz="2700" b="1" i="0">
+                <a:spcPts val="800"/>
+              </a:spcAft>
+            </a:pPr>
+            <a:r>
+              <a:rPr sz="3000" b="1" i="0">
                 <a:solidFill>
                   <a:srgbClr val="FFFFFF"/>
                 </a:solidFill>
                 <a:latin typeface="Calibri"/>
               </a:rPr>
-              <a:t>Problems with the pipeline — data &amp; methodology limits</a:t>
-            </a:r>
-          </a:p>
-        </p:txBody>
-      </p:sp>
-      <p:sp>
-        <p:nvSpPr>
-          <p:cNvPr id="4" name="TextBox 3"/>
+              <a:t>Experiment 1 — computer-generated test clouds</a:t>
+            </a:r>
+          </a:p>
+          <a:p>
+            <a:pPr algn="l">
+              <a:spcAft>
+                <a:spcPts val="800"/>
+              </a:spcAft>
+            </a:pPr>
+            <a:r>
+              <a:rPr sz="1700" b="0" i="0">
+                <a:solidFill>
+                  <a:srgbClr val="D6E6F0"/>
+                </a:solidFill>
+                <a:latin typeface="Calibri"/>
+              </a:rPr>
+              <a:t>Controlled conditions: we know the true cylinder exactly</a:t>
+            </a:r>
+          </a:p>
+        </p:txBody>
+      </p:sp>
+      <p:pic>
+        <p:nvPicPr>
+          <p:cNvPr id="4" name="Picture 3" descr="synth_data_example.png"/>
+          <p:cNvPicPr>
+            <a:picLocks noChangeAspect="1"/>
+          </p:cNvPicPr>
+          <p:nvPr/>
+        </p:nvPicPr>
+        <p:blipFill>
+          <a:blip r:embed="rId2"/>
+          <a:stretch>
+            <a:fillRect/>
+          </a:stretch>
+        </p:blipFill>
+        <p:spPr>
+          <a:xfrm>
+            <a:off x="1800940" y="1371600"/>
+            <a:ext cx="8605359" cy="3108960"/>
+          </a:xfrm>
+          <a:prstGeom prst="rect">
+            <a:avLst/>
+          </a:prstGeom>
+        </p:spPr>
+      </p:pic>
+      <p:sp>
+        <p:nvSpPr>
+          <p:cNvPr id="5" name="TextBox 4"/>
           <p:cNvSpPr txBox="1"/>
           <p:nvPr/>
         </p:nvSpPr>
         <p:spPr>
           <a:xfrm>
-            <a:off x="502920" y="1280160"/>
-            <a:ext cx="11247120" cy="5029200"/>
+            <a:off x="548640" y="4572000"/>
+            <a:ext cx="11155680" cy="1371600"/>
           </a:xfrm>
           <a:prstGeom prst="rect">
             <a:avLst/>
@@ -7009,94 +9296,105 @@
           <a:p>
             <a:pPr algn="l">
               <a:spcAft>
-                <a:spcPts val="600"/>
-              </a:spcAft>
-            </a:pPr>
-            <a:r>
-              <a:rPr sz="1500" b="1" i="0">
+                <a:spcPts val="1000"/>
+              </a:spcAft>
+            </a:pPr>
+            <a:r>
+              <a:rPr sz="1900" b="0" i="0">
                 <a:solidFill>
                   <a:srgbClr val="1F2D3D"/>
                 </a:solidFill>
                 <a:latin typeface="Calibri"/>
               </a:rPr>
-              <a:t>• Synthetic generator can't make genuinely occluded scenes — only a single idealized arc + Gaussian noise (no mutual occlusion, burial, clutter, multipath).</a:t>
+              <a:t>• 33 clouds of one barrel: only a 120° strip is visible (like a real half-hidden drum).</a:t>
             </a:r>
           </a:p>
           <a:p>
             <a:pPr algn="l">
               <a:spcAft>
-                <a:spcPts val="600"/>
-              </a:spcAft>
-            </a:pPr>
-            <a:r>
-              <a:rPr sz="1500" b="0" i="0">
+                <a:spcPts val="1000"/>
+              </a:spcAft>
+            </a:pPr>
+            <a:r>
+              <a:rPr sz="1900" b="0" i="0">
                 <a:solidFill>
                   <a:srgbClr val="1F2D3D"/>
                 </a:solidFill>
                 <a:latin typeface="Calibri"/>
               </a:rPr>
-              <a:t>• Synthetic noise is i.i.d. Gaussian; real Xtion / survey-LiDAR noise is structured (range-dependent, occlusion-shadow gaps) — real radius error ran ~6–8× synthetic, and all 4 scored F1=0 on the first real occluded drum.</a:t>
-            </a:r>
-          </a:p>
-          <a:p>
-            <a:pPr algn="l">
-              <a:spcAft>
-                <a:spcPts val="600"/>
-              </a:spcAft>
-            </a:pPr>
-            <a:r>
-              <a:rPr sz="1500" b="0" i="0">
-                <a:solidFill>
-                  <a:srgbClr val="1F2D3D"/>
-                </a:solidFill>
-                <a:latin typeface="Calibri"/>
-              </a:rPr>
-              <a:t>• Not enough data to train/validate learned methods — no labelled occluded real scenes; the synthetic set is essentially one occlusion level.</a:t>
-            </a:r>
-          </a:p>
-          <a:p>
-            <a:pPr algn="l">
-              <a:spcAft>
-                <a:spcPts val="600"/>
-              </a:spcAft>
-            </a:pPr>
-            <a:r>
-              <a:rPr sz="1500" b="0" i="0">
-                <a:solidFill>
-                  <a:srgbClr val="B76E00"/>
-                </a:solidFill>
-                <a:latin typeface="Calibri"/>
-              </a:rPr>
-              <a:t>• Can't yet accurately measure the geometric methods either — only one real occluded GT exists, and its coarse crop caught two coaxial drums as one blob, so the reference axis is itself suspect.</a:t>
-            </a:r>
-          </a:p>
-          <a:p>
-            <a:pPr algn="l">
-              <a:spcAft>
-                <a:spcPts val="600"/>
-              </a:spcAft>
-            </a:pPr>
-            <a:r>
-              <a:rPr sz="1500" b="1" i="0">
+              <a:t>• Only the measurement noise changes: 11 levels × 3 random repeats.</a:t>
+            </a:r>
+          </a:p>
+        </p:txBody>
+      </p:sp>
+      <p:sp>
+        <p:nvSpPr>
+          <p:cNvPr id="6" name="Rectangle 5"/>
+          <p:cNvSpPr/>
+          <p:nvPr/>
+        </p:nvSpPr>
+        <p:spPr>
+          <a:xfrm>
+            <a:off x="365760" y="5943600"/>
+            <a:ext cx="11475720" cy="502920"/>
+          </a:xfrm>
+          <a:prstGeom prst="rect">
+            <a:avLst/>
+          </a:prstGeom>
+          <a:solidFill>
+            <a:srgbClr val="E3EEF5"/>
+          </a:solidFill>
+          <a:ln w="19050">
+            <a:solidFill>
+              <a:srgbClr val="0B5C8A"/>
+            </a:solidFill>
+          </a:ln>
+          <a:effectLst/>
+        </p:spPr>
+        <p:style>
+          <a:lnRef idx="1">
+            <a:schemeClr val="accent1"/>
+          </a:lnRef>
+          <a:fillRef idx="3">
+            <a:schemeClr val="accent1"/>
+          </a:fillRef>
+          <a:effectRef idx="2">
+            <a:schemeClr val="accent1"/>
+          </a:effectRef>
+          <a:fontRef idx="minor">
+            <a:schemeClr val="lt1"/>
+          </a:fontRef>
+        </p:style>
+        <p:txBody>
+          <a:bodyPr rtlCol="0" anchor="ctr" wrap="square" tIns="25400" bIns="25400"/>
+          <a:lstStyle/>
+          <a:p>
+            <a:pPr algn="ctr">
+              <a:spcAft>
+                <a:spcPts val="800"/>
+              </a:spcAft>
+            </a:pPr>
+            <a:r>
+              <a:rPr sz="2000" b="1" i="0">
                 <a:solidFill>
                   <a:srgbClr val="0B5C8A"/>
                 </a:solidFill>
                 <a:latin typeface="Calibri"/>
               </a:rPr>
-              <a:t>• Net: the harness works, but it can't yet support "A beats B under occlusion" or "ready to train a detector" — both need the Isaac Sim data plan.</a:t>
-            </a:r>
-          </a:p>
-        </p:txBody>
-      </p:sp>
-      <p:sp>
-        <p:nvSpPr>
-          <p:cNvPr id="5" name="TextBox 4"/>
+              <a:t>Question: how much sensor noise can each method tolerate before it fails?</a:t>
+            </a:r>
+          </a:p>
+        </p:txBody>
+      </p:sp>
+      <p:sp>
+        <p:nvSpPr>
+          <p:cNvPr id="7" name="TextBox 6"/>
           <p:cNvSpPr txBox="1"/>
           <p:nvPr/>
         </p:nvSpPr>
         <p:spPr>
           <a:xfrm>
-            <a:off x="365760" y="6446520"/>
+            <a:off x="365760" y="6473952"/>
             <a:ext cx="10972800" cy="320040"/>
           </a:xfrm>
           <a:prstGeom prst="rect">
@@ -7112,11 +9410,11 @@
           <a:p>
             <a:pPr algn="l">
               <a:spcAft>
-                <a:spcPts val="600"/>
-              </a:spcAft>
-            </a:pPr>
-            <a:r>
-              <a:rPr sz="900" b="0" i="0">
+                <a:spcPts val="800"/>
+              </a:spcAft>
+            </a:pPr>
+            <a:r>
+              <a:rPr sz="1000" b="0" i="0">
                 <a:solidFill>
                   <a:srgbClr val="555555"/>
                 </a:solidFill>
@@ -7129,13 +9427,13 @@
       </p:sp>
       <p:sp>
         <p:nvSpPr>
-          <p:cNvPr id="6" name="TextBox 5"/>
+          <p:cNvPr id="8" name="TextBox 7"/>
           <p:cNvSpPr txBox="1"/>
           <p:nvPr/>
         </p:nvSpPr>
         <p:spPr>
           <a:xfrm>
-            <a:off x="11521440" y="6446520"/>
+            <a:off x="11521440" y="6473952"/>
             <a:ext cx="548640" cy="320040"/>
           </a:xfrm>
           <a:prstGeom prst="rect">
@@ -7151,11 +9449,11 @@
           <a:p>
             <a:pPr algn="r">
               <a:spcAft>
-                <a:spcPts val="600"/>
-              </a:spcAft>
-            </a:pPr>
-            <a:r>
-              <a:rPr sz="1000" b="0" i="0">
+                <a:spcPts val="800"/>
+              </a:spcAft>
+            </a:pPr>
+            <a:r>
+              <a:rPr sz="1100" b="0" i="0">
                 <a:solidFill>
                   <a:srgbClr val="555555"/>
                 </a:solidFill>
@@ -7236,8 +9534,8 @@
         </p:nvSpPr>
         <p:spPr>
           <a:xfrm>
-            <a:off x="457200" y="109728"/>
-            <a:ext cx="11247120" cy="868680"/>
+            <a:off x="457200" y="91440"/>
+            <a:ext cx="11247120" cy="914400"/>
           </a:xfrm>
           <a:prstGeom prst="rect">
             <a:avLst/>
@@ -7252,24 +9550,40 @@
           <a:p>
             <a:pPr algn="l">
               <a:spcAft>
-                <a:spcPts val="600"/>
-              </a:spcAft>
-            </a:pPr>
-            <a:r>
-              <a:rPr sz="2700" b="1" i="0">
+                <a:spcPts val="800"/>
+              </a:spcAft>
+            </a:pPr>
+            <a:r>
+              <a:rPr sz="3000" b="1" i="0">
                 <a:solidFill>
                   <a:srgbClr val="FFFFFF"/>
                 </a:solidFill>
                 <a:latin typeface="Calibri"/>
               </a:rPr>
-              <a:t>Future pipeline — Isaac Sim closes the data gap</a:t>
+              <a:t>Experiment 1 — results</a:t>
+            </a:r>
+          </a:p>
+          <a:p>
+            <a:pPr algn="l">
+              <a:spcAft>
+                <a:spcPts val="800"/>
+              </a:spcAft>
+            </a:pPr>
+            <a:r>
+              <a:rPr sz="1700" b="0" i="0">
+                <a:solidFill>
+                  <a:srgbClr val="D6E6F0"/>
+                </a:solidFill>
+                <a:latin typeface="Calibri"/>
+              </a:rPr>
+              <a:t>Lower error is better; F1 = 1 means the barrel was always found, with no false alarms</a:t>
             </a:r>
           </a:p>
         </p:txBody>
       </p:sp>
       <p:pic>
         <p:nvPicPr>
-          <p:cNvPr id="4" name="Picture 3" descr="roadmap.png"/>
+          <p:cNvPr id="4" name="Picture 3" descr="synth_noise_sweep.png"/>
           <p:cNvPicPr>
             <a:picLocks noChangeAspect="1"/>
           </p:cNvPicPr>
@@ -7283,8 +9597,8 @@
         </p:blipFill>
         <p:spPr>
           <a:xfrm>
-            <a:off x="365760" y="2725472"/>
-            <a:ext cx="6035040" cy="1955696"/>
+            <a:off x="549488" y="1325880"/>
+            <a:ext cx="11108263" cy="3749039"/>
           </a:xfrm>
           <a:prstGeom prst="rect">
             <a:avLst/>
@@ -7299,8 +9613,8 @@
         </p:nvSpPr>
         <p:spPr>
           <a:xfrm>
-            <a:off x="6629400" y="1463040"/>
-            <a:ext cx="5212080" cy="4846320"/>
+            <a:off x="548640" y="5074920"/>
+            <a:ext cx="11155680" cy="1371600"/>
           </a:xfrm>
           <a:prstGeom prst="rect">
             <a:avLst/>
@@ -7315,81 +9629,49 @@
           <a:p>
             <a:pPr algn="l">
               <a:spcAft>
-                <a:spcPts val="600"/>
-              </a:spcAft>
-            </a:pPr>
-            <a:r>
-              <a:rPr sz="1500" b="1" i="0">
-                <a:solidFill>
-                  <a:srgbClr val="1F2D3D"/>
-                </a:solidFill>
-                <a:latin typeface="Calibri"/>
-              </a:rPr>
-              <a:t>• Isaac Sim dataset: full ground truth, true occlusion % per barrel.</a:t>
+                <a:spcPts val="1000"/>
+              </a:spcAft>
+            </a:pPr>
+            <a:r>
+              <a:rPr sz="1800" b="1" i="0">
+                <a:solidFill>
+                  <a:srgbClr val="2E7D32"/>
+                </a:solidFill>
+                <a:latin typeface="Calibri"/>
+              </a:rPr>
+              <a:t>• RANSAC and least-squares find the barrel at every noise level (F1 = 1.00 / 1.00).</a:t>
             </a:r>
           </a:p>
           <a:p>
             <a:pPr algn="l">
               <a:spcAft>
-                <a:spcPts val="600"/>
-              </a:spcAft>
-            </a:pPr>
-            <a:r>
-              <a:rPr sz="1500" b="1" i="0">
-                <a:solidFill>
-                  <a:srgbClr val="0B5C8A"/>
-                </a:solidFill>
-                <a:latin typeface="Calibri"/>
-              </a:rPr>
-              <a:t>• Occlusion sweep: recall + pose error vs occlusion % — the headline result.</a:t>
+                <a:spcPts val="1000"/>
+              </a:spcAft>
+            </a:pPr>
+            <a:r>
+              <a:rPr sz="1800" b="0" i="0">
+                <a:solidFill>
+                  <a:srgbClr val="B76E00"/>
+                </a:solidFill>
+                <a:latin typeface="Calibri"/>
+              </a:rPr>
+              <a:t>• Efficient RANSAC degrades first; the Hough baseline is erratic — it even misses some clean scenes.</a:t>
             </a:r>
           </a:p>
           <a:p>
             <a:pPr algn="l">
               <a:spcAft>
-                <a:spcPts val="600"/>
-              </a:spcAft>
-            </a:pPr>
-            <a:r>
-              <a:rPr sz="1500" b="0" i="0">
-                <a:solidFill>
-                  <a:srgbClr val="1F2D3D"/>
-                </a:solidFill>
-                <a:latin typeface="Calibri"/>
-              </a:rPr>
-              <a:t>• Learned methods (PointNet++ / BarrelNet-style) once training data exists.</a:t>
-            </a:r>
-          </a:p>
-          <a:p>
-            <a:pPr algn="l">
-              <a:spcAft>
-                <a:spcPts val="600"/>
-              </a:spcAft>
-            </a:pPr>
-            <a:r>
-              <a:rPr sz="1500" b="0" i="0">
-                <a:solidFill>
-                  <a:srgbClr val="1F2D3D"/>
-                </a:solidFill>
-                <a:latin typeface="Calibri"/>
-              </a:rPr>
-              <a:t>• Camera + LiDAR fusion (camera-first frustum + LiDAR-first painting).</a:t>
-            </a:r>
-          </a:p>
-          <a:p>
-            <a:pPr algn="l">
-              <a:spcAft>
-                <a:spcPts val="600"/>
-              </a:spcAft>
-            </a:pPr>
-            <a:r>
-              <a:rPr sz="1500" b="0" i="0">
-                <a:solidFill>
-                  <a:srgbClr val="1F2D3D"/>
-                </a:solidFill>
-                <a:latin typeface="Calibri"/>
-              </a:rPr>
-              <a:t>• Calibration-noise injection — where does fusion's advantage degrade?</a:t>
+                <a:spcPts val="1000"/>
+              </a:spcAft>
+            </a:pPr>
+            <a:r>
+              <a:rPr sz="1800" b="0" i="0">
+                <a:solidFill>
+                  <a:srgbClr val="555555"/>
+                </a:solidFill>
+                <a:latin typeface="Calibri"/>
+              </a:rPr>
+              <a:t>• Least-squares is the most precise but ~5–10× slower than the others (~17 s per scene).</a:t>
             </a:r>
           </a:p>
         </p:txBody>
@@ -7402,7 +9684,7 @@
         </p:nvSpPr>
         <p:spPr>
           <a:xfrm>
-            <a:off x="365760" y="6446520"/>
+            <a:off x="365760" y="6473952"/>
             <a:ext cx="10972800" cy="320040"/>
           </a:xfrm>
           <a:prstGeom prst="rect">
@@ -7418,11 +9700,11 @@
           <a:p>
             <a:pPr algn="l">
               <a:spcAft>
-                <a:spcPts val="600"/>
-              </a:spcAft>
-            </a:pPr>
-            <a:r>
-              <a:rPr sz="900" b="0" i="0">
+                <a:spcPts val="800"/>
+              </a:spcAft>
+            </a:pPr>
+            <a:r>
+              <a:rPr sz="1000" b="0" i="0">
                 <a:solidFill>
                   <a:srgbClr val="555555"/>
                 </a:solidFill>
@@ -7441,7 +9723,7 @@
         </p:nvSpPr>
         <p:spPr>
           <a:xfrm>
-            <a:off x="11521440" y="6446520"/>
+            <a:off x="11521440" y="6473952"/>
             <a:ext cx="548640" cy="320040"/>
           </a:xfrm>
           <a:prstGeom prst="rect">
@@ -7457,11 +9739,11 @@
           <a:p>
             <a:pPr algn="r">
               <a:spcAft>
-                <a:spcPts val="600"/>
-              </a:spcAft>
-            </a:pPr>
-            <a:r>
-              <a:rPr sz="1000" b="0" i="0">
+                <a:spcPts val="800"/>
+              </a:spcAft>
+            </a:pPr>
+            <a:r>
+              <a:rPr sz="1100" b="0" i="0">
                 <a:solidFill>
                   <a:srgbClr val="555555"/>
                 </a:solidFill>

--- a/researchwrite/evaluation_presentation.pptx
+++ b/researchwrite/evaluation_presentation.pptx
@@ -3399,7 +3399,7 @@
                 </a:solidFill>
                 <a:latin typeface="Calibri"/>
               </a:rPr>
-              <a:t>Experiment 2 — a real barrel, no occlusion</a:t>
+              <a:t>Experiment 2 — the real lab barrel, no occlusion</a:t>
             </a:r>
           </a:p>
           <a:p>
@@ -3415,7 +3415,7 @@
                 </a:solidFill>
                 <a:latin typeface="Calibri"/>
               </a:rPr>
-              <a:t>Small lab barrel (radius 4.25 cm) seen by a depth camera</a:t>
+              <a:t>Depth-camera scan; true radius 4.25 cm</a:t>
             </a:r>
           </a:p>
         </p:txBody>
@@ -4677,7 +4677,7 @@
                 </a:solidFill>
                 <a:latin typeface="Calibri"/>
               </a:rPr>
-              <a:t>four examples of the computer-generated training data: simulated LiDAR points (red) on a drum surface (blue)</a:t>
+              <a:t>examples of the synthetic training patches: simulated LiDAR points (red) on the drum surface (blue)</a:t>
             </a:r>
           </a:p>
         </p:txBody>
@@ -4716,7 +4716,7 @@
                 </a:solidFill>
                 <a:latin typeface="Calibri"/>
               </a:rPr>
-              <a:t>• Trained on 12,000 randomly generated partial drums — buried, tilted, noisy, incomplete.</a:t>
+              <a:t>• Trained on 12,000 such patches — buried, tilted, noisy, incomplete.</a:t>
             </a:r>
           </a:p>
         </p:txBody>
@@ -5628,7 +5628,7 @@
                 </a:solidFill>
                 <a:latin typeface="Calibri"/>
               </a:rPr>
-              <a:t>• Real sensor noise is structured, not the clean random noise we simulate.</a:t>
+              <a:t>• Real sensor noise is harder than anything we simulate — Experiment 2 showed 6–8× larger errors.</a:t>
             </a:r>
           </a:p>
           <a:p>
@@ -7000,22 +7000,6 @@
               <a:t>The bin-picking problem</a:t>
             </a:r>
           </a:p>
-          <a:p>
-            <a:pPr algn="l">
-              <a:spcAft>
-                <a:spcPts val="800"/>
-              </a:spcAft>
-            </a:pPr>
-            <a:r>
-              <a:rPr sz="1700" b="0" i="0">
-                <a:solidFill>
-                  <a:srgbClr val="D6E6F0"/>
-                </a:solidFill>
-                <a:latin typeface="Calibri"/>
-              </a:rPr>
-              <a:t>A robot must pick objects out of an unordered pile</a:t>
-            </a:r>
-          </a:p>
         </p:txBody>
       </p:sp>
       <p:pic>
@@ -7034,8 +7018,8 @@
         </p:blipFill>
         <p:spPr>
           <a:xfrm>
-            <a:off x="1358122" y="1325880"/>
-            <a:ext cx="9445275" cy="4480560"/>
+            <a:off x="1133012" y="1325880"/>
+            <a:ext cx="9895496" cy="4480560"/>
           </a:xfrm>
           <a:prstGeom prst="rect">
             <a:avLst/>
@@ -7275,7 +7259,7 @@
                 </a:solidFill>
                 <a:latin typeface="Calibri"/>
               </a:rPr>
-              <a:t>Our case is harder: the objects are covered</a:t>
+              <a:t>Our task: fit a cylinder to the visible points</a:t>
             </a:r>
           </a:p>
           <a:p>
@@ -7291,14 +7275,14 @@
                 </a:solidFill>
                 <a:latin typeface="Calibri"/>
               </a:rPr>
-              <a:t>Real scan: 200-litre steel drums, tumbled and partially buried</a:t>
+              <a:t>“Fitting” = choosing model parameters so the model matches the measured points as well as possible</a:t>
             </a:r>
           </a:p>
         </p:txBody>
       </p:sp>
       <p:pic>
         <p:nvPicPr>
-          <p:cNvPr id="4" name="Picture 3" descr="station1_pile_raw.png"/>
+          <p:cNvPr id="4" name="Picture 3" descr="fitting_explained.png"/>
           <p:cNvPicPr>
             <a:picLocks noChangeAspect="1"/>
           </p:cNvPicPr>
@@ -7312,8 +7296,8 @@
         </p:blipFill>
         <p:spPr>
           <a:xfrm>
-            <a:off x="365760" y="1859280"/>
-            <a:ext cx="8229600" cy="3413760"/>
+            <a:off x="365760" y="1596169"/>
+            <a:ext cx="11475720" cy="3939981"/>
           </a:xfrm>
           <a:prstGeom prst="rect">
             <a:avLst/>
@@ -7322,78 +7306,7 @@
       </p:pic>
       <p:sp>
         <p:nvSpPr>
-          <p:cNvPr id="5" name="TextBox 4"/>
-          <p:cNvSpPr txBox="1"/>
-          <p:nvPr/>
-        </p:nvSpPr>
-        <p:spPr>
-          <a:xfrm>
-            <a:off x="8732520" y="1554480"/>
-            <a:ext cx="3246120" cy="4206240"/>
-          </a:xfrm>
-          <a:prstGeom prst="rect">
-            <a:avLst/>
-          </a:prstGeom>
-          <a:noFill/>
-        </p:spPr>
-        <p:txBody>
-          <a:bodyPr wrap="square">
-            <a:spAutoFit/>
-          </a:bodyPr>
-          <a:lstStyle/>
-          <a:p>
-            <a:pPr algn="l">
-              <a:spcAft>
-                <a:spcPts val="1000"/>
-              </a:spcAft>
-            </a:pPr>
-            <a:r>
-              <a:rPr sz="1900" b="0" i="0">
-                <a:solidFill>
-                  <a:srgbClr val="1F2D3D"/>
-                </a:solidFill>
-                <a:latin typeface="Calibri"/>
-              </a:rPr>
-              <a:t>• Drums lie in arbitrary directions.</a:t>
-            </a:r>
-          </a:p>
-          <a:p>
-            <a:pPr algn="l">
-              <a:spcAft>
-                <a:spcPts val="1000"/>
-              </a:spcAft>
-            </a:pPr>
-            <a:r>
-              <a:rPr sz="1900" b="0" i="0">
-                <a:solidFill>
-                  <a:srgbClr val="1F2D3D"/>
-                </a:solidFill>
-                <a:latin typeface="Calibri"/>
-              </a:rPr>
-              <a:t>• Sand and other drums hide most of each drum.</a:t>
-            </a:r>
-          </a:p>
-          <a:p>
-            <a:pPr algn="l">
-              <a:spcAft>
-                <a:spcPts val="1000"/>
-              </a:spcAft>
-            </a:pPr>
-            <a:r>
-              <a:rPr sz="1900" b="0" i="0">
-                <a:solidFill>
-                  <a:srgbClr val="1F2D3D"/>
-                </a:solidFill>
-                <a:latin typeface="Calibri"/>
-              </a:rPr>
-              <a:t>• The sensor sees the pile from one side only.</a:t>
-            </a:r>
-          </a:p>
-        </p:txBody>
-      </p:sp>
-      <p:sp>
-        <p:nvSpPr>
-          <p:cNvPr id="6" name="Rectangle 5"/>
+          <p:cNvPr id="5" name="Rectangle 4"/>
           <p:cNvSpPr/>
           <p:nvPr/>
         </p:nvSpPr>
@@ -7410,7 +7323,7 @@
           </a:solidFill>
           <a:ln w="19050">
             <a:solidFill>
-              <a:srgbClr val="B76E00"/>
+              <a:srgbClr val="0B5C8A"/>
             </a:solidFill>
           </a:ln>
           <a:effectLst/>
@@ -7441,18 +7354,18 @@
             <a:r>
               <a:rPr sz="2000" b="1" i="0">
                 <a:solidFill>
-                  <a:srgbClr val="B76E00"/>
-                </a:solidFill>
-                <a:latin typeface="Calibri"/>
-              </a:rPr>
-              <a:t>Each drum shows the sensor only a small patch of its surface.</a:t>
-            </a:r>
-          </a:p>
-        </p:txBody>
-      </p:sp>
-      <p:sp>
-        <p:nvSpPr>
-          <p:cNvPr id="7" name="TextBox 6"/>
+                  <a:srgbClr val="0B5C8A"/>
+                </a:solidFill>
+                <a:latin typeface="Calibri"/>
+              </a:rPr>
+              <a:t>With a full view, fitting is easy — the difficulty starts when most of the object is hidden.</a:t>
+            </a:r>
+          </a:p>
+        </p:txBody>
+      </p:sp>
+      <p:sp>
+        <p:nvSpPr>
+          <p:cNvPr id="6" name="TextBox 5"/>
           <p:cNvSpPr txBox="1"/>
           <p:nvPr/>
         </p:nvSpPr>
@@ -7491,7 +7404,7 @@
       </p:sp>
       <p:sp>
         <p:nvSpPr>
-          <p:cNvPr id="8" name="TextBox 7"/>
+          <p:cNvPr id="7" name="TextBox 6"/>
           <p:cNvSpPr txBox="1"/>
           <p:nvPr/>
         </p:nvSpPr>
@@ -7624,7 +7537,7 @@
                 </a:solidFill>
                 <a:latin typeface="Calibri"/>
               </a:rPr>
-              <a:t>Our task: fit a cylinder to the visible points</a:t>
+              <a:t>Our case is harder: the drums are covered</a:t>
             </a:r>
           </a:p>
           <a:p>
@@ -7640,14 +7553,14 @@
                 </a:solidFill>
                 <a:latin typeface="Calibri"/>
               </a:rPr>
-              <a:t>“Fitting” = choosing model parameters so the model matches the measured points as well as possible</a:t>
+              <a:t>Real scan: 200-litre steel drums, tumbled and partially buried</a:t>
             </a:r>
           </a:p>
         </p:txBody>
       </p:sp>
       <p:pic>
         <p:nvPicPr>
-          <p:cNvPr id="4" name="Picture 3" descr="fitting_explained.png"/>
+          <p:cNvPr id="4" name="Picture 3" descr="station1_pile_raw.png"/>
           <p:cNvPicPr>
             <a:picLocks noChangeAspect="1"/>
           </p:cNvPicPr>
@@ -7661,8 +7574,8 @@
         </p:blipFill>
         <p:spPr>
           <a:xfrm>
-            <a:off x="365760" y="1596169"/>
-            <a:ext cx="11475720" cy="3939981"/>
+            <a:off x="365760" y="1859280"/>
+            <a:ext cx="8229600" cy="3413760"/>
           </a:xfrm>
           <a:prstGeom prst="rect">
             <a:avLst/>
@@ -7671,7 +7584,78 @@
       </p:pic>
       <p:sp>
         <p:nvSpPr>
-          <p:cNvPr id="5" name="Rectangle 4"/>
+          <p:cNvPr id="5" name="TextBox 4"/>
+          <p:cNvSpPr txBox="1"/>
+          <p:nvPr/>
+        </p:nvSpPr>
+        <p:spPr>
+          <a:xfrm>
+            <a:off x="8732520" y="1554480"/>
+            <a:ext cx="3246120" cy="4206240"/>
+          </a:xfrm>
+          <a:prstGeom prst="rect">
+            <a:avLst/>
+          </a:prstGeom>
+          <a:noFill/>
+        </p:spPr>
+        <p:txBody>
+          <a:bodyPr wrap="square">
+            <a:spAutoFit/>
+          </a:bodyPr>
+          <a:lstStyle/>
+          <a:p>
+            <a:pPr algn="l">
+              <a:spcAft>
+                <a:spcPts val="1000"/>
+              </a:spcAft>
+            </a:pPr>
+            <a:r>
+              <a:rPr sz="1900" b="0" i="0">
+                <a:solidFill>
+                  <a:srgbClr val="1F2D3D"/>
+                </a:solidFill>
+                <a:latin typeface="Calibri"/>
+              </a:rPr>
+              <a:t>• Drums lie in arbitrary directions.</a:t>
+            </a:r>
+          </a:p>
+          <a:p>
+            <a:pPr algn="l">
+              <a:spcAft>
+                <a:spcPts val="1000"/>
+              </a:spcAft>
+            </a:pPr>
+            <a:r>
+              <a:rPr sz="1900" b="0" i="0">
+                <a:solidFill>
+                  <a:srgbClr val="1F2D3D"/>
+                </a:solidFill>
+                <a:latin typeface="Calibri"/>
+              </a:rPr>
+              <a:t>• Sand and other drums hide most of each drum.</a:t>
+            </a:r>
+          </a:p>
+          <a:p>
+            <a:pPr algn="l">
+              <a:spcAft>
+                <a:spcPts val="1000"/>
+              </a:spcAft>
+            </a:pPr>
+            <a:r>
+              <a:rPr sz="1900" b="0" i="0">
+                <a:solidFill>
+                  <a:srgbClr val="1F2D3D"/>
+                </a:solidFill>
+                <a:latin typeface="Calibri"/>
+              </a:rPr>
+              <a:t>• The sensor sees the pile from one side only.</a:t>
+            </a:r>
+          </a:p>
+        </p:txBody>
+      </p:sp>
+      <p:sp>
+        <p:nvSpPr>
+          <p:cNvPr id="6" name="Rectangle 5"/>
           <p:cNvSpPr/>
           <p:nvPr/>
         </p:nvSpPr>
@@ -7723,14 +7707,14 @@
                 </a:solidFill>
                 <a:latin typeface="Calibri"/>
               </a:rPr>
-              <a:t>The less of the barrel we see, the more cylinders explain the same points — that is the core difficulty.</a:t>
-            </a:r>
-          </a:p>
-        </p:txBody>
-      </p:sp>
-      <p:sp>
-        <p:nvSpPr>
-          <p:cNvPr id="6" name="TextBox 5"/>
+              <a:t>Each drum shows only a small patch — and a small patch fits many different cylinders.</a:t>
+            </a:r>
+          </a:p>
+        </p:txBody>
+      </p:sp>
+      <p:sp>
+        <p:nvSpPr>
+          <p:cNvPr id="7" name="TextBox 6"/>
           <p:cNvSpPr txBox="1"/>
           <p:nvPr/>
         </p:nvSpPr>
@@ -7769,7 +7753,7 @@
       </p:sp>
       <p:sp>
         <p:nvSpPr>
-          <p:cNvPr id="7" name="TextBox 6"/>
+          <p:cNvPr id="8" name="TextBox 7"/>
           <p:cNvSpPr txBox="1"/>
           <p:nvPr/>
         </p:nvSpPr>
@@ -8421,7 +8405,7 @@
                 </a:solidFill>
                 <a:latin typeface="Calibri"/>
               </a:rPr>
-              <a:t>Plan: start with the geometry-based family (no data needed), then add learning and fusion as data arrives.</a:t>
+              <a:t>We compare all three families on the same data — geometry first, since it needs no training data.</a:t>
             </a:r>
           </a:p>
         </p:txBody>
@@ -8600,7 +8584,7 @@
                 </a:solidFill>
                 <a:latin typeface="Calibri"/>
               </a:rPr>
-              <a:t>Four geometry-based methods implemented</a:t>
+              <a:t>The data we test every method on</a:t>
             </a:r>
           </a:p>
           <a:p>
@@ -8616,101 +8600,14 @@
                 </a:solidFill>
                 <a:latin typeface="Calibri"/>
               </a:rPr>
-              <a:t>Each explained in one sentence — details on request</a:t>
-            </a:r>
-          </a:p>
-        </p:txBody>
-      </p:sp>
-      <p:sp>
-        <p:nvSpPr>
-          <p:cNvPr id="4" name="TextBox 3"/>
-          <p:cNvSpPr txBox="1"/>
-          <p:nvPr/>
-        </p:nvSpPr>
-        <p:spPr>
-          <a:xfrm>
-            <a:off x="457200" y="1417320"/>
-            <a:ext cx="11338560" cy="2468880"/>
-          </a:xfrm>
-          <a:prstGeom prst="rect">
-            <a:avLst/>
-          </a:prstGeom>
-          <a:noFill/>
-        </p:spPr>
-        <p:txBody>
-          <a:bodyPr wrap="square">
-            <a:spAutoFit/>
-          </a:bodyPr>
-          <a:lstStyle/>
-          <a:p>
-            <a:pPr algn="l">
-              <a:spcAft>
-                <a:spcPts val="1000"/>
-              </a:spcAft>
-            </a:pPr>
-            <a:r>
-              <a:rPr sz="1900" b="0" i="0">
-                <a:solidFill>
-                  <a:srgbClr val="1F2D3D"/>
-                </a:solidFill>
-                <a:latin typeface="Calibri"/>
-              </a:rPr>
-              <a:t>• 3DTK Hough (baseline) — every point votes for the cylinders it could lie on; the strongest vote wins.</a:t>
-            </a:r>
-          </a:p>
-          <a:p>
-            <a:pPr algn="l">
-              <a:spcAft>
-                <a:spcPts val="1000"/>
-              </a:spcAft>
-            </a:pPr>
-            <a:r>
-              <a:rPr sz="1900" b="0" i="0">
-                <a:solidFill>
-                  <a:srgbClr val="1F2D3D"/>
-                </a:solidFill>
-                <a:latin typeface="Calibri"/>
-              </a:rPr>
-              <a:t>• RANSAC fit — try many random small point samples, keep the cylinder most points agree with.</a:t>
-            </a:r>
-          </a:p>
-          <a:p>
-            <a:pPr algn="l">
-              <a:spcAft>
-                <a:spcPts val="1000"/>
-              </a:spcAft>
-            </a:pPr>
-            <a:r>
-              <a:rPr sz="1900" b="0" i="0">
-                <a:solidFill>
-                  <a:srgbClr val="1F2D3D"/>
-                </a:solidFill>
-                <a:latin typeface="Calibri"/>
-              </a:rPr>
-              <a:t>• Least-squares fit — start from a rough guess, then adjust the cylinder until it matches the points best.</a:t>
-            </a:r>
-          </a:p>
-          <a:p>
-            <a:pPr algn="l">
-              <a:spcAft>
-                <a:spcPts val="1000"/>
-              </a:spcAft>
-            </a:pPr>
-            <a:r>
-              <a:rPr sz="1900" b="0" i="0">
-                <a:solidFill>
-                  <a:srgbClr val="1F2D3D"/>
-                </a:solidFill>
-                <a:latin typeface="Calibri"/>
-              </a:rPr>
-              <a:t>• Efficient RANSAC — a faster RANSAC variant that searches the whole scene for shapes in one pass.</a:t>
+              <a:t>Three data sets — difficulty increases left to right</a:t>
             </a:r>
           </a:p>
         </p:txBody>
       </p:sp>
       <p:pic>
         <p:nvPicPr>
-          <p:cNvPr id="5" name="Picture 4" descr="architecture_diagram.png"/>
+          <p:cNvPr id="4" name="Picture 3" descr="test_data_overview.png"/>
           <p:cNvPicPr>
             <a:picLocks noChangeAspect="1"/>
           </p:cNvPicPr>
@@ -8724,8 +8621,8 @@
         </p:blipFill>
         <p:spPr>
           <a:xfrm>
-            <a:off x="3589021" y="3977639"/>
-            <a:ext cx="4983477" cy="1874519"/>
+            <a:off x="274320" y="1504403"/>
+            <a:ext cx="11612880" cy="4123513"/>
           </a:xfrm>
           <a:prstGeom prst="rect">
             <a:avLst/>
@@ -8734,13 +8631,13 @@
       </p:pic>
       <p:sp>
         <p:nvSpPr>
-          <p:cNvPr id="6" name="Rectangle 5"/>
+          <p:cNvPr id="5" name="Rectangle 4"/>
           <p:cNvSpPr/>
           <p:nvPr/>
         </p:nvSpPr>
         <p:spPr>
           <a:xfrm>
-            <a:off x="365760" y="5943600"/>
+            <a:off x="365760" y="5897880"/>
             <a:ext cx="11475720" cy="502920"/>
           </a:xfrm>
           <a:prstGeom prst="rect">
@@ -8786,14 +8683,14 @@
                 </a:solidFill>
                 <a:latin typeface="Calibri"/>
               </a:rPr>
-              <a:t>All four: LiDAR points only · no training data · identical input and output — directly comparable.</a:t>
-            </a:r>
-          </a:p>
-        </p:txBody>
-      </p:sp>
-      <p:sp>
-        <p:nvSpPr>
-          <p:cNvPr id="7" name="TextBox 6"/>
+              <a:t>Synthetic clouds tell us the best case; the real pile tells us the truth.</a:t>
+            </a:r>
+          </a:p>
+        </p:txBody>
+      </p:sp>
+      <p:sp>
+        <p:nvSpPr>
+          <p:cNvPr id="6" name="TextBox 5"/>
           <p:cNvSpPr txBox="1"/>
           <p:nvPr/>
         </p:nvSpPr>
@@ -8832,7 +8729,7 @@
       </p:sp>
       <p:sp>
         <p:nvSpPr>
-          <p:cNvPr id="8" name="TextBox 7"/>
+          <p:cNvPr id="7" name="TextBox 6"/>
           <p:cNvSpPr txBox="1"/>
           <p:nvPr/>
         </p:nvSpPr>
@@ -8965,35 +8862,98 @@
                 </a:solidFill>
                 <a:latin typeface="Calibri"/>
               </a:rPr>
-              <a:t>How we evaluate — one pipeline for every method</a:t>
-            </a:r>
-          </a:p>
-        </p:txBody>
-      </p:sp>
-      <p:pic>
-        <p:nvPicPr>
-          <p:cNvPr id="4" name="Picture 3" descr="pipeline_flow.png"/>
-          <p:cNvPicPr>
-            <a:picLocks noChangeAspect="1"/>
-          </p:cNvPicPr>
-          <p:nvPr/>
-        </p:nvPicPr>
-        <p:blipFill>
-          <a:blip r:embed="rId2"/>
-          <a:stretch>
-            <a:fillRect/>
-          </a:stretch>
-        </p:blipFill>
-        <p:spPr>
-          <a:xfrm>
-            <a:off x="274320" y="1947238"/>
-            <a:ext cx="11612880" cy="3237844"/>
-          </a:xfrm>
-          <a:prstGeom prst="rect">
-            <a:avLst/>
-          </a:prstGeom>
-        </p:spPr>
-      </p:pic>
+              <a:t>Four geometry-based methods implemented</a:t>
+            </a:r>
+          </a:p>
+        </p:txBody>
+      </p:sp>
+      <p:sp>
+        <p:nvSpPr>
+          <p:cNvPr id="4" name="TextBox 3"/>
+          <p:cNvSpPr txBox="1"/>
+          <p:nvPr/>
+        </p:nvSpPr>
+        <p:spPr>
+          <a:xfrm>
+            <a:off x="457200" y="1645920"/>
+            <a:ext cx="11338560" cy="4023360"/>
+          </a:xfrm>
+          <a:prstGeom prst="rect">
+            <a:avLst/>
+          </a:prstGeom>
+          <a:noFill/>
+        </p:spPr>
+        <p:txBody>
+          <a:bodyPr wrap="square">
+            <a:spAutoFit/>
+          </a:bodyPr>
+          <a:lstStyle/>
+          <a:p>
+            <a:pPr algn="l">
+              <a:spcAft>
+                <a:spcPts val="2200"/>
+              </a:spcAft>
+            </a:pPr>
+            <a:r>
+              <a:rPr sz="2100" b="0" i="0">
+                <a:solidFill>
+                  <a:srgbClr val="1F2D3D"/>
+                </a:solidFill>
+                <a:latin typeface="Calibri"/>
+              </a:rPr>
+              <a:t>• 3DTK Hough (baseline) — every point votes for the cylinders it could lie on; the strongest vote wins.</a:t>
+            </a:r>
+          </a:p>
+          <a:p>
+            <a:pPr algn="l">
+              <a:spcAft>
+                <a:spcPts val="2200"/>
+              </a:spcAft>
+            </a:pPr>
+            <a:r>
+              <a:rPr sz="2100" b="0" i="0">
+                <a:solidFill>
+                  <a:srgbClr val="1F2D3D"/>
+                </a:solidFill>
+                <a:latin typeface="Calibri"/>
+              </a:rPr>
+              <a:t>• RANSAC fit — try many random small point samples, keep the cylinder most points agree with.</a:t>
+            </a:r>
+          </a:p>
+          <a:p>
+            <a:pPr algn="l">
+              <a:spcAft>
+                <a:spcPts val="2200"/>
+              </a:spcAft>
+            </a:pPr>
+            <a:r>
+              <a:rPr sz="2100" b="0" i="0">
+                <a:solidFill>
+                  <a:srgbClr val="1F2D3D"/>
+                </a:solidFill>
+                <a:latin typeface="Calibri"/>
+              </a:rPr>
+              <a:t>• Least-squares fit — start from a rough guess, then adjust the cylinder until it matches the points best.</a:t>
+            </a:r>
+          </a:p>
+          <a:p>
+            <a:pPr algn="l">
+              <a:spcAft>
+                <a:spcPts val="2200"/>
+              </a:spcAft>
+            </a:pPr>
+            <a:r>
+              <a:rPr sz="2100" b="0" i="0">
+                <a:solidFill>
+                  <a:srgbClr val="1F2D3D"/>
+                </a:solidFill>
+                <a:latin typeface="Calibri"/>
+              </a:rPr>
+              <a:t>• Efficient RANSAC — a faster RANSAC variant that searches the whole scene for shapes in one pass.</a:t>
+            </a:r>
+          </a:p>
+        </p:txBody>
+      </p:sp>
       <p:sp>
         <p:nvSpPr>
           <p:cNvPr id="5" name="Rectangle 4"/>
@@ -9002,7 +8962,7 @@
         </p:nvSpPr>
         <p:spPr>
           <a:xfrm>
-            <a:off x="365760" y="5852160"/>
+            <a:off x="365760" y="5943600"/>
             <a:ext cx="11475720" cy="502920"/>
           </a:xfrm>
           <a:prstGeom prst="rect">
@@ -9048,7 +9008,7 @@
                 </a:solidFill>
                 <a:latin typeface="Calibri"/>
               </a:rPr>
-              <a:t>A prediction counts as correct if direction is within 30° and the centre within 10 cm of the true drum.</a:t>
+              <a:t>All four: LiDAR points only · no training data · identical input and output — directly comparable.</a:t>
             </a:r>
           </a:p>
         </p:txBody>
@@ -9227,30 +9187,14 @@
                 </a:solidFill>
                 <a:latin typeface="Calibri"/>
               </a:rPr>
-              <a:t>Experiment 1 — computer-generated test clouds</a:t>
-            </a:r>
-          </a:p>
-          <a:p>
-            <a:pPr algn="l">
-              <a:spcAft>
-                <a:spcPts val="800"/>
-              </a:spcAft>
-            </a:pPr>
-            <a:r>
-              <a:rPr sz="1700" b="0" i="0">
-                <a:solidFill>
-                  <a:srgbClr val="D6E6F0"/>
-                </a:solidFill>
-                <a:latin typeface="Calibri"/>
-              </a:rPr>
-              <a:t>Controlled conditions: we know the true cylinder exactly</a:t>
+              <a:t>How we evaluate — one pipeline for every method</a:t>
             </a:r>
           </a:p>
         </p:txBody>
       </p:sp>
       <p:pic>
         <p:nvPicPr>
-          <p:cNvPr id="4" name="Picture 3" descr="synth_data_example.png"/>
+          <p:cNvPr id="4" name="Picture 3" descr="pipeline_flow.png"/>
           <p:cNvPicPr>
             <a:picLocks noChangeAspect="1"/>
           </p:cNvPicPr>
@@ -9264,8 +9208,8 @@
         </p:blipFill>
         <p:spPr>
           <a:xfrm>
-            <a:off x="1800940" y="1371600"/>
-            <a:ext cx="8605359" cy="3108960"/>
+            <a:off x="274320" y="2324279"/>
+            <a:ext cx="11612880" cy="2483761"/>
           </a:xfrm>
           <a:prstGeom prst="rect">
             <a:avLst/>
@@ -9274,68 +9218,13 @@
       </p:pic>
       <p:sp>
         <p:nvSpPr>
-          <p:cNvPr id="5" name="TextBox 4"/>
-          <p:cNvSpPr txBox="1"/>
-          <p:nvPr/>
-        </p:nvSpPr>
-        <p:spPr>
-          <a:xfrm>
-            <a:off x="548640" y="4572000"/>
-            <a:ext cx="11155680" cy="1371600"/>
-          </a:xfrm>
-          <a:prstGeom prst="rect">
-            <a:avLst/>
-          </a:prstGeom>
-          <a:noFill/>
-        </p:spPr>
-        <p:txBody>
-          <a:bodyPr wrap="square">
-            <a:spAutoFit/>
-          </a:bodyPr>
-          <a:lstStyle/>
-          <a:p>
-            <a:pPr algn="l">
-              <a:spcAft>
-                <a:spcPts val="1000"/>
-              </a:spcAft>
-            </a:pPr>
-            <a:r>
-              <a:rPr sz="1900" b="0" i="0">
-                <a:solidFill>
-                  <a:srgbClr val="1F2D3D"/>
-                </a:solidFill>
-                <a:latin typeface="Calibri"/>
-              </a:rPr>
-              <a:t>• 33 clouds of one barrel: only a 120° strip is visible (like a real half-hidden drum).</a:t>
-            </a:r>
-          </a:p>
-          <a:p>
-            <a:pPr algn="l">
-              <a:spcAft>
-                <a:spcPts val="1000"/>
-              </a:spcAft>
-            </a:pPr>
-            <a:r>
-              <a:rPr sz="1900" b="0" i="0">
-                <a:solidFill>
-                  <a:srgbClr val="1F2D3D"/>
-                </a:solidFill>
-                <a:latin typeface="Calibri"/>
-              </a:rPr>
-              <a:t>• Only the measurement noise changes: 11 levels × 3 random repeats.</a:t>
-            </a:r>
-          </a:p>
-        </p:txBody>
-      </p:sp>
-      <p:sp>
-        <p:nvSpPr>
-          <p:cNvPr id="6" name="Rectangle 5"/>
+          <p:cNvPr id="5" name="Rectangle 4"/>
           <p:cNvSpPr/>
           <p:nvPr/>
         </p:nvSpPr>
         <p:spPr>
           <a:xfrm>
-            <a:off x="365760" y="5943600"/>
+            <a:off x="365760" y="5852160"/>
             <a:ext cx="11475720" cy="502920"/>
           </a:xfrm>
           <a:prstGeom prst="rect">
@@ -9381,14 +9270,14 @@
                 </a:solidFill>
                 <a:latin typeface="Calibri"/>
               </a:rPr>
-              <a:t>Question: how much sensor noise can each method tolerate before it fails?</a:t>
-            </a:r>
-          </a:p>
-        </p:txBody>
-      </p:sp>
-      <p:sp>
-        <p:nvSpPr>
-          <p:cNvPr id="7" name="TextBox 6"/>
+              <a:t>A prediction counts as correct if direction is within 30° and the centre within 10 cm of the true drum.</a:t>
+            </a:r>
+          </a:p>
+        </p:txBody>
+      </p:sp>
+      <p:sp>
+        <p:nvSpPr>
+          <p:cNvPr id="6" name="TextBox 5"/>
           <p:cNvSpPr txBox="1"/>
           <p:nvPr/>
         </p:nvSpPr>
@@ -9427,7 +9316,7 @@
       </p:sp>
       <p:sp>
         <p:nvSpPr>
-          <p:cNvPr id="8" name="TextBox 7"/>
+          <p:cNvPr id="7" name="TextBox 6"/>
           <p:cNvSpPr txBox="1"/>
           <p:nvPr/>
         </p:nvSpPr>
@@ -9560,7 +9449,7 @@
                 </a:solidFill>
                 <a:latin typeface="Calibri"/>
               </a:rPr>
-              <a:t>Experiment 1 — results</a:t>
+              <a:t>Experiment 1 — how much noise can each method take?</a:t>
             </a:r>
           </a:p>
           <a:p>
@@ -9576,7 +9465,7 @@
                 </a:solidFill>
                 <a:latin typeface="Calibri"/>
               </a:rPr>
-              <a:t>Lower error is better; F1 = 1 means the barrel was always found, with no false alarms</a:t>
+              <a:t>The synthetic barrel (120° visible) at 11 noise levels × 3 repeats = 33 test clouds</a:t>
             </a:r>
           </a:p>
         </p:txBody>

--- a/researchwrite/evaluation_presentation.pptx
+++ b/researchwrite/evaluation_presentation.pptx
@@ -23,6 +23,7 @@
     <p:sldId id="271" r:id="rId22"/>
     <p:sldId id="272" r:id="rId23"/>
     <p:sldId id="273" r:id="rId24"/>
+    <p:sldId id="274" r:id="rId25"/>
   </p:sldIdLst>
   <p:sldSz cx="12191695" cy="6858000" type="screen4x3"/>
   <p:notesSz cx="6858000" cy="9144000"/>
@@ -3478,7 +3479,7 @@
                 </a:solidFill>
                 <a:latin typeface="Calibri"/>
               </a:rPr>
-              <a:t>camera points (coloured) with the fitted cylinder (red)</a:t>
+              <a:t>Camera points (coloured) with the fitted cylinder (red)</a:t>
             </a:r>
           </a:p>
         </p:txBody>
@@ -4289,7 +4290,7 @@
                 </a:solidFill>
                 <a:latin typeface="Calibri"/>
               </a:rPr>
-              <a:t>true drum (green) vs fitted cylinders on the real points</a:t>
+              <a:t>True drum (green) vs fitted cylinders on the real points</a:t>
             </a:r>
           </a:p>
         </p:txBody>
@@ -4677,7 +4678,7 @@
                 </a:solidFill>
                 <a:latin typeface="Calibri"/>
               </a:rPr>
-              <a:t>examples of the synthetic training patches: simulated LiDAR points (red) on the drum surface (blue)</a:t>
+              <a:t>Examples of the synthetic training patches: simulated LiDAR points (red) on the drum surface (blue)</a:t>
             </a:r>
           </a:p>
         </p:txBody>
@@ -5307,7 +5308,7 @@
                 </a:solidFill>
                 <a:latin typeface="Calibri"/>
               </a:rPr>
-              <a:t>annotated drums coloured; predicted cylinders: green = within gate, red = miss</a:t>
+              <a:t>Annotated drums coloured; predicted cylinders: green = within gate, red = miss</a:t>
             </a:r>
           </a:p>
         </p:txBody>
@@ -5898,296 +5899,6 @@
                 </a:solidFill>
                 <a:latin typeface="Calibri"/>
               </a:rPr>
-              <a:t>Next step: simulation closes the data gap</a:t>
-            </a:r>
-          </a:p>
-          <a:p>
-            <a:pPr algn="l">
-              <a:spcAft>
-                <a:spcPts val="800"/>
-              </a:spcAft>
-            </a:pPr>
-            <a:r>
-              <a:rPr sz="1700" b="0" i="0">
-                <a:solidFill>
-                  <a:srgbClr val="D6E6F0"/>
-                </a:solidFill>
-                <a:latin typeface="Calibri"/>
-              </a:rPr>
-              <a:t>NVIDIA Isaac Sim gives unlimited scenes with perfect ground truth</a:t>
-            </a:r>
-          </a:p>
-        </p:txBody>
-      </p:sp>
-      <p:pic>
-        <p:nvPicPr>
-          <p:cNvPr id="4" name="Picture 3" descr="roadmap.png"/>
-          <p:cNvPicPr>
-            <a:picLocks noChangeAspect="1"/>
-          </p:cNvPicPr>
-          <p:nvPr/>
-        </p:nvPicPr>
-        <p:blipFill>
-          <a:blip r:embed="rId2"/>
-          <a:stretch>
-            <a:fillRect/>
-          </a:stretch>
-        </p:blipFill>
-        <p:spPr>
-          <a:xfrm>
-            <a:off x="2412515" y="1463040"/>
-            <a:ext cx="7336489" cy="2377440"/>
-          </a:xfrm>
-          <a:prstGeom prst="rect">
-            <a:avLst/>
-          </a:prstGeom>
-        </p:spPr>
-      </p:pic>
-      <p:sp>
-        <p:nvSpPr>
-          <p:cNvPr id="5" name="TextBox 4"/>
-          <p:cNvSpPr txBox="1"/>
-          <p:nvPr/>
-        </p:nvSpPr>
-        <p:spPr>
-          <a:xfrm>
-            <a:off x="548640" y="3977639"/>
-            <a:ext cx="11155680" cy="1828800"/>
-          </a:xfrm>
-          <a:prstGeom prst="rect">
-            <a:avLst/>
-          </a:prstGeom>
-          <a:noFill/>
-        </p:spPr>
-        <p:txBody>
-          <a:bodyPr wrap="square">
-            <a:spAutoFit/>
-          </a:bodyPr>
-          <a:lstStyle/>
-          <a:p>
-            <a:pPr algn="l">
-              <a:spcAft>
-                <a:spcPts val="1000"/>
-              </a:spcAft>
-            </a:pPr>
-            <a:r>
-              <a:rPr sz="2000" b="0" i="0">
-                <a:solidFill>
-                  <a:srgbClr val="1F2D3D"/>
-                </a:solidFill>
-                <a:latin typeface="Calibri"/>
-              </a:rPr>
-              <a:t>• Every simulated drum comes with its exact pose and its exact degree of burial — labels for free.</a:t>
-            </a:r>
-          </a:p>
-          <a:p>
-            <a:pPr algn="l">
-              <a:spcAft>
-                <a:spcPts val="1000"/>
-              </a:spcAft>
-            </a:pPr>
-            <a:r>
-              <a:rPr sz="2000" b="0" i="0">
-                <a:solidFill>
-                  <a:srgbClr val="1F2D3D"/>
-                </a:solidFill>
-                <a:latin typeface="Calibri"/>
-              </a:rPr>
-              <a:t>• That enables the headline experiment: detection quality as a function of how much of the drum is hidden.</a:t>
-            </a:r>
-          </a:p>
-          <a:p>
-            <a:pPr algn="l">
-              <a:spcAft>
-                <a:spcPts val="1000"/>
-              </a:spcAft>
-            </a:pPr>
-            <a:r>
-              <a:rPr sz="2000" b="0" i="0">
-                <a:solidFill>
-                  <a:srgbClr val="1F2D3D"/>
-                </a:solidFill>
-                <a:latin typeface="Calibri"/>
-              </a:rPr>
-              <a:t>• And it unlocks the remaining families: more learned methods and camera + LiDAR fusion.</a:t>
-            </a:r>
-          </a:p>
-        </p:txBody>
-      </p:sp>
-      <p:sp>
-        <p:nvSpPr>
-          <p:cNvPr id="6" name="TextBox 5"/>
-          <p:cNvSpPr txBox="1"/>
-          <p:nvPr/>
-        </p:nvSpPr>
-        <p:spPr>
-          <a:xfrm>
-            <a:off x="365760" y="6473952"/>
-            <a:ext cx="10972800" cy="320040"/>
-          </a:xfrm>
-          <a:prstGeom prst="rect">
-            <a:avLst/>
-          </a:prstGeom>
-          <a:noFill/>
-        </p:spPr>
-        <p:txBody>
-          <a:bodyPr wrap="square">
-            <a:spAutoFit/>
-          </a:bodyPr>
-          <a:lstStyle/>
-          <a:p>
-            <a:pPr algn="l">
-              <a:spcAft>
-                <a:spcPts val="800"/>
-              </a:spcAft>
-            </a:pPr>
-            <a:r>
-              <a:rPr sz="1000" b="0" i="0">
-                <a:solidFill>
-                  <a:srgbClr val="555555"/>
-                </a:solidFill>
-                <a:latin typeface="Calibri"/>
-              </a:rPr>
-              <a:t>Detection and Robotic Manipulation of Partially Occluded Object(s)</a:t>
-            </a:r>
-          </a:p>
-        </p:txBody>
-      </p:sp>
-      <p:sp>
-        <p:nvSpPr>
-          <p:cNvPr id="7" name="TextBox 6"/>
-          <p:cNvSpPr txBox="1"/>
-          <p:nvPr/>
-        </p:nvSpPr>
-        <p:spPr>
-          <a:xfrm>
-            <a:off x="11521440" y="6473952"/>
-            <a:ext cx="548640" cy="320040"/>
-          </a:xfrm>
-          <a:prstGeom prst="rect">
-            <a:avLst/>
-          </a:prstGeom>
-          <a:noFill/>
-        </p:spPr>
-        <p:txBody>
-          <a:bodyPr wrap="square">
-            <a:spAutoFit/>
-          </a:bodyPr>
-          <a:lstStyle/>
-          <a:p>
-            <a:pPr algn="r">
-              <a:spcAft>
-                <a:spcPts val="800"/>
-              </a:spcAft>
-            </a:pPr>
-            <a:r>
-              <a:rPr sz="1100" b="0" i="0">
-                <a:solidFill>
-                  <a:srgbClr val="555555"/>
-                </a:solidFill>
-                <a:latin typeface="Calibri"/>
-              </a:rPr>
-              <a:t>15</a:t>
-            </a:r>
-          </a:p>
-        </p:txBody>
-      </p:sp>
-    </p:spTree>
-  </p:cSld>
-  <p:clrMapOvr>
-    <a:masterClrMapping/>
-  </p:clrMapOvr>
-</p:sld>
-</file>
-
-<file path=ppt/slides/slide17.xml><?xml version="1.0" encoding="utf-8"?>
-<p:sld xmlns:a="http://schemas.openxmlformats.org/drawingml/2006/main" xmlns:p="http://schemas.openxmlformats.org/presentationml/2006/main" xmlns:r="http://schemas.openxmlformats.org/officeDocument/2006/relationships">
-  <p:cSld>
-    <p:spTree>
-      <p:nvGrpSpPr>
-        <p:cNvPr id="1" name=""/>
-        <p:cNvGrpSpPr/>
-        <p:nvPr/>
-      </p:nvGrpSpPr>
-      <p:grpSpPr/>
-      <p:sp>
-        <p:nvSpPr>
-          <p:cNvPr id="2" name="Rectangle 1"/>
-          <p:cNvSpPr/>
-          <p:nvPr/>
-        </p:nvSpPr>
-        <p:spPr>
-          <a:xfrm>
-            <a:off x="0" y="0"/>
-            <a:ext cx="12191695" cy="1051560"/>
-          </a:xfrm>
-          <a:prstGeom prst="rect">
-            <a:avLst/>
-          </a:prstGeom>
-          <a:solidFill>
-            <a:srgbClr val="0B5C8A"/>
-          </a:solidFill>
-          <a:ln>
-            <a:noFill/>
-          </a:ln>
-          <a:effectLst/>
-        </p:spPr>
-        <p:style>
-          <a:lnRef idx="1">
-            <a:schemeClr val="accent1"/>
-          </a:lnRef>
-          <a:fillRef idx="3">
-            <a:schemeClr val="accent1"/>
-          </a:fillRef>
-          <a:effectRef idx="2">
-            <a:schemeClr val="accent1"/>
-          </a:effectRef>
-          <a:fontRef idx="minor">
-            <a:schemeClr val="lt1"/>
-          </a:fontRef>
-        </p:style>
-        <p:txBody>
-          <a:bodyPr rtlCol="0" anchor="ctr"/>
-          <a:lstStyle/>
-          <a:p>
-            <a:pPr algn="ctr"/>
-          </a:p>
-        </p:txBody>
-      </p:sp>
-      <p:sp>
-        <p:nvSpPr>
-          <p:cNvPr id="3" name="TextBox 2"/>
-          <p:cNvSpPr txBox="1"/>
-          <p:nvPr/>
-        </p:nvSpPr>
-        <p:spPr>
-          <a:xfrm>
-            <a:off x="457200" y="91440"/>
-            <a:ext cx="11247120" cy="914400"/>
-          </a:xfrm>
-          <a:prstGeom prst="rect">
-            <a:avLst/>
-          </a:prstGeom>
-          <a:noFill/>
-        </p:spPr>
-        <p:txBody>
-          <a:bodyPr wrap="square">
-            <a:spAutoFit/>
-          </a:bodyPr>
-          <a:lstStyle/>
-          <a:p>
-            <a:pPr algn="l">
-              <a:spcAft>
-                <a:spcPts val="800"/>
-              </a:spcAft>
-            </a:pPr>
-            <a:r>
-              <a:rPr sz="3000" b="1" i="0">
-                <a:solidFill>
-                  <a:srgbClr val="FFFFFF"/>
-                </a:solidFill>
-                <a:latin typeface="Calibri"/>
-              </a:rPr>
               <a:t>Open risks — and how we deal with them</a:t>
             </a:r>
           </a:p>
@@ -6202,8 +5913,8 @@
           <p:nvPr/>
         </p:nvGraphicFramePr>
         <p:xfrm>
-          <a:off x="411480" y="1371600"/>
-          <a:ext cx="11384280" cy="4297680"/>
+          <a:off x="411480" y="1463040"/>
+          <a:ext cx="11384280" cy="3840480"/>
         </p:xfrm>
         <a:graphic>
           <a:graphicData uri="http://schemas.openxmlformats.org/drawingml/2006/table">
@@ -6212,10 +5923,10 @@
                 <a:tableStyleId>{5C22544A-7EE6-4342-B048-85BDC9FD1C3A}</a:tableStyleId>
               </a:tblPr>
               <a:tblGrid>
-                <a:gridCol w="5212080"/>
-                <a:gridCol w="6172200"/>
+                <a:gridCol w="4754880"/>
+                <a:gridCol w="6629400"/>
               </a:tblGrid>
-              <a:tr h="859536">
+              <a:tr h="768096">
                 <a:tc>
                   <a:txBody>
                     <a:bodyPr/>
@@ -6223,7 +5934,7 @@
                     <a:p>
                       <a:pPr algn="l"/>
                       <a:r>
-                        <a:rPr sz="1700" b="1">
+                        <a:rPr sz="1900" b="1">
                           <a:solidFill>
                             <a:srgbClr val="FFFFFF"/>
                           </a:solidFill>
@@ -6246,7 +5957,7 @@
                     <a:p>
                       <a:pPr algn="ctr"/>
                       <a:r>
-                        <a:rPr sz="1700" b="1">
+                        <a:rPr sz="1900" b="1">
                           <a:solidFill>
                             <a:srgbClr val="FFFFFF"/>
                           </a:solidFill>
@@ -6263,7 +5974,7 @@
                   </a:tcPr>
                 </a:tc>
               </a:tr>
-              <a:tr h="859536">
+              <a:tr h="768096">
                 <a:tc>
                   <a:txBody>
                     <a:bodyPr/>
@@ -6271,13 +5982,13 @@
                     <a:p>
                       <a:pPr algn="l"/>
                       <a:r>
-                        <a:rPr sz="1600" b="0">
+                        <a:rPr sz="1800" b="0">
                           <a:solidFill>
                             <a:srgbClr val="1F2D3D"/>
                           </a:solidFill>
                           <a:latin typeface="Calibri"/>
                         </a:rPr>
-                        <a:t>Detection accuracy collapses under occlusion (seen across the field, e.g. −47% for LiDAR-only in a 2025 study)</a:t>
+                        <a:t>Accuracy collapses under occlusion</a:t>
                       </a:r>
                     </a:p>
                   </a:txBody>
@@ -6294,13 +6005,13 @@
                     <a:p>
                       <a:pPr algn="ctr"/>
                       <a:r>
-                        <a:rPr sz="1600" b="0">
+                        <a:rPr sz="1800" b="0">
                           <a:solidFill>
                             <a:srgbClr val="1F2D3D"/>
                           </a:solidFill>
                           <a:latin typeface="Calibri"/>
                         </a:rPr>
-                        <a:t>Measure it systematically per method (occlusion sweep) instead of assuming — that comparison IS the thesis.</a:t>
+                        <a:t>Measure it per method — that comparison IS the thesis.</a:t>
                       </a:r>
                     </a:p>
                   </a:txBody>
@@ -6311,7 +6022,7 @@
                   </a:tcPr>
                 </a:tc>
               </a:tr>
-              <a:tr h="859536">
+              <a:tr h="768096">
                 <a:tc>
                   <a:txBody>
                     <a:bodyPr/>
@@ -6319,13 +6030,13 @@
                     <a:p>
                       <a:pPr algn="l"/>
                       <a:r>
-                        <a:rPr sz="1600" b="0">
+                        <a:rPr sz="1800" b="0">
                           <a:solidFill>
                             <a:srgbClr val="1F2D3D"/>
                           </a:solidFill>
                           <a:latin typeface="Calibri"/>
                         </a:rPr>
-                        <a:t>One sensor alone may never be reliable enough</a:t>
+                        <a:t>One sensor alone may not be enough</a:t>
                       </a:r>
                     </a:p>
                   </a:txBody>
@@ -6342,13 +6053,13 @@
                     <a:p>
                       <a:pPr algn="ctr"/>
                       <a:r>
-                        <a:rPr sz="1600" b="0">
+                        <a:rPr sz="1800" b="0">
                           <a:solidFill>
                             <a:srgbClr val="1F2D3D"/>
                           </a:solidFill>
                           <a:latin typeface="Calibri"/>
                         </a:rPr>
-                        <a:t>Camera + LiDAR fusion is planned; literature shows fusion degrades far more gracefully.</a:t>
+                        <a:t>Add camera + LiDAR fusion — it degrades far more gracefully.</a:t>
                       </a:r>
                     </a:p>
                   </a:txBody>
@@ -6359,7 +6070,7 @@
                   </a:tcPr>
                 </a:tc>
               </a:tr>
-              <a:tr h="859536">
+              <a:tr h="768096">
                 <a:tc>
                   <a:txBody>
                     <a:bodyPr/>
@@ -6367,13 +6078,13 @@
                     <a:p>
                       <a:pPr algn="l"/>
                       <a:r>
-                        <a:rPr sz="1600" b="0">
+                        <a:rPr sz="1800" b="0">
                           <a:solidFill>
                             <a:srgbClr val="1F2D3D"/>
                           </a:solidFill>
                           <a:latin typeface="Calibri"/>
                         </a:rPr>
-                        <a:t>Models trained in simulation may not transfer to reality</a:t>
+                        <a:t>Sim-trained models may not transfer</a:t>
                       </a:r>
                     </a:p>
                   </a:txBody>
@@ -6390,13 +6101,13 @@
                     <a:p>
                       <a:pPr algn="ctr"/>
                       <a:r>
-                        <a:rPr sz="1600" b="0">
+                        <a:rPr sz="1800" b="0">
                           <a:solidFill>
                             <a:srgbClr val="1F2D3D"/>
                           </a:solidFill>
                           <a:latin typeface="Calibri"/>
                         </a:rPr>
-                        <a:t>BarrelNet already measures this transfer on 21 real drums (12/21); next: fine-tune on a handful of real drums.</a:t>
+                        <a:t>Measured: 12 of 21 real drums; next, fine-tune on a few real ones.</a:t>
                       </a:r>
                     </a:p>
                   </a:txBody>
@@ -6407,7 +6118,7 @@
                   </a:tcPr>
                 </a:tc>
               </a:tr>
-              <a:tr h="859536">
+              <a:tr h="768096">
                 <a:tc>
                   <a:txBody>
                     <a:bodyPr/>
@@ -6415,13 +6126,13 @@
                     <a:p>
                       <a:pPr algn="l"/>
                       <a:r>
-                        <a:rPr sz="1600" b="0">
+                        <a:rPr sz="1800" b="0">
                           <a:solidFill>
                             <a:srgbClr val="1F2D3D"/>
                           </a:solidFill>
                           <a:latin typeface="Calibri"/>
                         </a:rPr>
-                        <a:t>The manipulation half of the title is not started yet</a:t>
+                        <a:t>Manipulation not started yet</a:t>
                       </a:r>
                     </a:p>
                   </a:txBody>
@@ -6438,13 +6149,13 @@
                     <a:p>
                       <a:pPr algn="ctr"/>
                       <a:r>
-                        <a:rPr sz="1600" b="0">
+                        <a:rPr sz="1800" b="0">
                           <a:solidFill>
                             <a:srgbClr val="1F2D3D"/>
                           </a:solidFill>
                           <a:latin typeface="Calibri"/>
                         </a:rPr>
-                        <a:t>Detection outputs exactly the pose a grasp planner needs; manipulation follows the method comparison.</a:t>
+                        <a:t>Detection delivers exactly the pose a grasp planner needs.</a:t>
                       </a:r>
                     </a:p>
                   </a:txBody>
@@ -6493,7 +6204,297 @@
                 </a:solidFill>
                 <a:latin typeface="Calibri"/>
               </a:rPr>
-              <a:t>occlusion numbers: [Shi'19] arXiv:1812.04244 · [Kumar'25] arXiv:2511.04347 · [Wang'25] Sensors 25(9):2794</a:t>
+              <a:t>Occlusion numbers: [Shi'19] arXiv:1812.04244 · [Kumar'25] arXiv:2511.04347 · [Wang'25] Sensors 25(9):2794</a:t>
+            </a:r>
+          </a:p>
+        </p:txBody>
+      </p:sp>
+      <p:sp>
+        <p:nvSpPr>
+          <p:cNvPr id="6" name="TextBox 5"/>
+          <p:cNvSpPr txBox="1"/>
+          <p:nvPr/>
+        </p:nvSpPr>
+        <p:spPr>
+          <a:xfrm>
+            <a:off x="365760" y="6473952"/>
+            <a:ext cx="10972800" cy="320040"/>
+          </a:xfrm>
+          <a:prstGeom prst="rect">
+            <a:avLst/>
+          </a:prstGeom>
+          <a:noFill/>
+        </p:spPr>
+        <p:txBody>
+          <a:bodyPr wrap="square">
+            <a:spAutoFit/>
+          </a:bodyPr>
+          <a:lstStyle/>
+          <a:p>
+            <a:pPr algn="l">
+              <a:spcAft>
+                <a:spcPts val="800"/>
+              </a:spcAft>
+            </a:pPr>
+            <a:r>
+              <a:rPr sz="1000" b="0" i="0">
+                <a:solidFill>
+                  <a:srgbClr val="555555"/>
+                </a:solidFill>
+                <a:latin typeface="Calibri"/>
+              </a:rPr>
+              <a:t>Detection and Robotic Manipulation of Partially Occluded Object(s)</a:t>
+            </a:r>
+          </a:p>
+        </p:txBody>
+      </p:sp>
+      <p:sp>
+        <p:nvSpPr>
+          <p:cNvPr id="7" name="TextBox 6"/>
+          <p:cNvSpPr txBox="1"/>
+          <p:nvPr/>
+        </p:nvSpPr>
+        <p:spPr>
+          <a:xfrm>
+            <a:off x="11521440" y="6473952"/>
+            <a:ext cx="548640" cy="320040"/>
+          </a:xfrm>
+          <a:prstGeom prst="rect">
+            <a:avLst/>
+          </a:prstGeom>
+          <a:noFill/>
+        </p:spPr>
+        <p:txBody>
+          <a:bodyPr wrap="square">
+            <a:spAutoFit/>
+          </a:bodyPr>
+          <a:lstStyle/>
+          <a:p>
+            <a:pPr algn="r">
+              <a:spcAft>
+                <a:spcPts val="800"/>
+              </a:spcAft>
+            </a:pPr>
+            <a:r>
+              <a:rPr sz="1100" b="0" i="0">
+                <a:solidFill>
+                  <a:srgbClr val="555555"/>
+                </a:solidFill>
+                <a:latin typeface="Calibri"/>
+              </a:rPr>
+              <a:t>15</a:t>
+            </a:r>
+          </a:p>
+        </p:txBody>
+      </p:sp>
+    </p:spTree>
+  </p:cSld>
+  <p:clrMapOvr>
+    <a:masterClrMapping/>
+  </p:clrMapOvr>
+</p:sld>
+</file>
+
+<file path=ppt/slides/slide17.xml><?xml version="1.0" encoding="utf-8"?>
+<p:sld xmlns:a="http://schemas.openxmlformats.org/drawingml/2006/main" xmlns:p="http://schemas.openxmlformats.org/presentationml/2006/main" xmlns:r="http://schemas.openxmlformats.org/officeDocument/2006/relationships">
+  <p:cSld>
+    <p:spTree>
+      <p:nvGrpSpPr>
+        <p:cNvPr id="1" name=""/>
+        <p:cNvGrpSpPr/>
+        <p:nvPr/>
+      </p:nvGrpSpPr>
+      <p:grpSpPr/>
+      <p:sp>
+        <p:nvSpPr>
+          <p:cNvPr id="2" name="Rectangle 1"/>
+          <p:cNvSpPr/>
+          <p:nvPr/>
+        </p:nvSpPr>
+        <p:spPr>
+          <a:xfrm>
+            <a:off x="0" y="0"/>
+            <a:ext cx="12191695" cy="1051560"/>
+          </a:xfrm>
+          <a:prstGeom prst="rect">
+            <a:avLst/>
+          </a:prstGeom>
+          <a:solidFill>
+            <a:srgbClr val="0B5C8A"/>
+          </a:solidFill>
+          <a:ln>
+            <a:noFill/>
+          </a:ln>
+          <a:effectLst/>
+        </p:spPr>
+        <p:style>
+          <a:lnRef idx="1">
+            <a:schemeClr val="accent1"/>
+          </a:lnRef>
+          <a:fillRef idx="3">
+            <a:schemeClr val="accent1"/>
+          </a:fillRef>
+          <a:effectRef idx="2">
+            <a:schemeClr val="accent1"/>
+          </a:effectRef>
+          <a:fontRef idx="minor">
+            <a:schemeClr val="lt1"/>
+          </a:fontRef>
+        </p:style>
+        <p:txBody>
+          <a:bodyPr rtlCol="0" anchor="ctr"/>
+          <a:lstStyle/>
+          <a:p>
+            <a:pPr algn="ctr"/>
+          </a:p>
+        </p:txBody>
+      </p:sp>
+      <p:sp>
+        <p:nvSpPr>
+          <p:cNvPr id="3" name="TextBox 2"/>
+          <p:cNvSpPr txBox="1"/>
+          <p:nvPr/>
+        </p:nvSpPr>
+        <p:spPr>
+          <a:xfrm>
+            <a:off x="457200" y="91440"/>
+            <a:ext cx="11247120" cy="914400"/>
+          </a:xfrm>
+          <a:prstGeom prst="rect">
+            <a:avLst/>
+          </a:prstGeom>
+          <a:noFill/>
+        </p:spPr>
+        <p:txBody>
+          <a:bodyPr wrap="square">
+            <a:spAutoFit/>
+          </a:bodyPr>
+          <a:lstStyle/>
+          <a:p>
+            <a:pPr algn="l">
+              <a:spcAft>
+                <a:spcPts val="800"/>
+              </a:spcAft>
+            </a:pPr>
+            <a:r>
+              <a:rPr sz="3000" b="1" i="0">
+                <a:solidFill>
+                  <a:srgbClr val="FFFFFF"/>
+                </a:solidFill>
+                <a:latin typeface="Calibri"/>
+              </a:rPr>
+              <a:t>Next step: simulation closes the data gap</a:t>
+            </a:r>
+          </a:p>
+          <a:p>
+            <a:pPr algn="l">
+              <a:spcAft>
+                <a:spcPts val="800"/>
+              </a:spcAft>
+            </a:pPr>
+            <a:r>
+              <a:rPr sz="1700" b="0" i="0">
+                <a:solidFill>
+                  <a:srgbClr val="D6E6F0"/>
+                </a:solidFill>
+                <a:latin typeface="Calibri"/>
+              </a:rPr>
+              <a:t>NVIDIA Isaac Sim gives unlimited scenes with perfect ground truth</a:t>
+            </a:r>
+          </a:p>
+        </p:txBody>
+      </p:sp>
+      <p:pic>
+        <p:nvPicPr>
+          <p:cNvPr id="4" name="Picture 3" descr="roadmap.png"/>
+          <p:cNvPicPr>
+            <a:picLocks noChangeAspect="1"/>
+          </p:cNvPicPr>
+          <p:nvPr/>
+        </p:nvPicPr>
+        <p:blipFill>
+          <a:blip r:embed="rId2"/>
+          <a:stretch>
+            <a:fillRect/>
+          </a:stretch>
+        </p:blipFill>
+        <p:spPr>
+          <a:xfrm>
+            <a:off x="2412515" y="1463040"/>
+            <a:ext cx="7336489" cy="2377440"/>
+          </a:xfrm>
+          <a:prstGeom prst="rect">
+            <a:avLst/>
+          </a:prstGeom>
+        </p:spPr>
+      </p:pic>
+      <p:sp>
+        <p:nvSpPr>
+          <p:cNvPr id="5" name="TextBox 4"/>
+          <p:cNvSpPr txBox="1"/>
+          <p:nvPr/>
+        </p:nvSpPr>
+        <p:spPr>
+          <a:xfrm>
+            <a:off x="548640" y="3977639"/>
+            <a:ext cx="11155680" cy="1828800"/>
+          </a:xfrm>
+          <a:prstGeom prst="rect">
+            <a:avLst/>
+          </a:prstGeom>
+          <a:noFill/>
+        </p:spPr>
+        <p:txBody>
+          <a:bodyPr wrap="square">
+            <a:spAutoFit/>
+          </a:bodyPr>
+          <a:lstStyle/>
+          <a:p>
+            <a:pPr algn="l">
+              <a:spcAft>
+                <a:spcPts val="1000"/>
+              </a:spcAft>
+            </a:pPr>
+            <a:r>
+              <a:rPr sz="2000" b="0" i="0">
+                <a:solidFill>
+                  <a:srgbClr val="1F2D3D"/>
+                </a:solidFill>
+                <a:latin typeface="Calibri"/>
+              </a:rPr>
+              <a:t>• Every simulated drum comes with its exact pose and its exact degree of burial — labels for free.</a:t>
+            </a:r>
+          </a:p>
+          <a:p>
+            <a:pPr algn="l">
+              <a:spcAft>
+                <a:spcPts val="1000"/>
+              </a:spcAft>
+            </a:pPr>
+            <a:r>
+              <a:rPr sz="2000" b="0" i="0">
+                <a:solidFill>
+                  <a:srgbClr val="1F2D3D"/>
+                </a:solidFill>
+                <a:latin typeface="Calibri"/>
+              </a:rPr>
+              <a:t>• That enables the headline experiment: detection quality as a function of how much of the drum is hidden.</a:t>
+            </a:r>
+          </a:p>
+          <a:p>
+            <a:pPr algn="l">
+              <a:spcAft>
+                <a:spcPts val="1000"/>
+              </a:spcAft>
+            </a:pPr>
+            <a:r>
+              <a:rPr sz="2000" b="0" i="0">
+                <a:solidFill>
+                  <a:srgbClr val="1F2D3D"/>
+                </a:solidFill>
+                <a:latin typeface="Calibri"/>
+              </a:rPr>
+              <a:t>• And it unlocks the remaining families: more learned methods and camera + LiDAR fusion.</a:t>
             </a:r>
           </a:p>
         </p:txBody>
@@ -6909,6 +6910,167 @@
 </p:sld>
 </file>
 
+<file path=ppt/slides/slide19.xml><?xml version="1.0" encoding="utf-8"?>
+<p:sld xmlns:a="http://schemas.openxmlformats.org/drawingml/2006/main" xmlns:p="http://schemas.openxmlformats.org/presentationml/2006/main" xmlns:r="http://schemas.openxmlformats.org/officeDocument/2006/relationships">
+  <p:cSld>
+    <p:spTree>
+      <p:nvGrpSpPr>
+        <p:cNvPr id="1" name=""/>
+        <p:cNvGrpSpPr/>
+        <p:nvPr/>
+      </p:nvGrpSpPr>
+      <p:grpSpPr/>
+      <p:sp>
+        <p:nvSpPr>
+          <p:cNvPr id="2" name="Rectangle 1"/>
+          <p:cNvSpPr/>
+          <p:nvPr/>
+        </p:nvSpPr>
+        <p:spPr>
+          <a:xfrm>
+            <a:off x="0" y="0"/>
+            <a:ext cx="12191695" cy="6858000"/>
+          </a:xfrm>
+          <a:prstGeom prst="rect">
+            <a:avLst/>
+          </a:prstGeom>
+          <a:solidFill>
+            <a:srgbClr val="1F2D3D"/>
+          </a:solidFill>
+          <a:ln>
+            <a:noFill/>
+          </a:ln>
+          <a:effectLst/>
+        </p:spPr>
+        <p:style>
+          <a:lnRef idx="1">
+            <a:schemeClr val="accent1"/>
+          </a:lnRef>
+          <a:fillRef idx="3">
+            <a:schemeClr val="accent1"/>
+          </a:fillRef>
+          <a:effectRef idx="2">
+            <a:schemeClr val="accent1"/>
+          </a:effectRef>
+          <a:fontRef idx="minor">
+            <a:schemeClr val="lt1"/>
+          </a:fontRef>
+        </p:style>
+        <p:txBody>
+          <a:bodyPr rtlCol="0" anchor="ctr"/>
+          <a:lstStyle/>
+          <a:p>
+            <a:pPr algn="ctr"/>
+          </a:p>
+        </p:txBody>
+      </p:sp>
+      <p:sp>
+        <p:nvSpPr>
+          <p:cNvPr id="3" name="Rectangle 2"/>
+          <p:cNvSpPr/>
+          <p:nvPr/>
+        </p:nvSpPr>
+        <p:spPr>
+          <a:xfrm>
+            <a:off x="0" y="0"/>
+            <a:ext cx="12191695" cy="164592"/>
+          </a:xfrm>
+          <a:prstGeom prst="rect">
+            <a:avLst/>
+          </a:prstGeom>
+          <a:solidFill>
+            <a:srgbClr val="0B5C8A"/>
+          </a:solidFill>
+          <a:ln>
+            <a:noFill/>
+          </a:ln>
+          <a:effectLst/>
+        </p:spPr>
+        <p:style>
+          <a:lnRef idx="1">
+            <a:schemeClr val="accent1"/>
+          </a:lnRef>
+          <a:fillRef idx="3">
+            <a:schemeClr val="accent1"/>
+          </a:fillRef>
+          <a:effectRef idx="2">
+            <a:schemeClr val="accent1"/>
+          </a:effectRef>
+          <a:fontRef idx="minor">
+            <a:schemeClr val="lt1"/>
+          </a:fontRef>
+        </p:style>
+        <p:txBody>
+          <a:bodyPr rtlCol="0" anchor="ctr"/>
+          <a:lstStyle/>
+          <a:p>
+            <a:pPr algn="ctr"/>
+          </a:p>
+        </p:txBody>
+      </p:sp>
+      <p:sp>
+        <p:nvSpPr>
+          <p:cNvPr id="4" name="TextBox 3"/>
+          <p:cNvSpPr txBox="1"/>
+          <p:nvPr/>
+        </p:nvSpPr>
+        <p:spPr>
+          <a:xfrm>
+            <a:off x="822960" y="2560320"/>
+            <a:ext cx="10607040" cy="1828800"/>
+          </a:xfrm>
+          <a:prstGeom prst="rect">
+            <a:avLst/>
+          </a:prstGeom>
+          <a:noFill/>
+        </p:spPr>
+        <p:txBody>
+          <a:bodyPr wrap="square">
+            <a:spAutoFit/>
+          </a:bodyPr>
+          <a:lstStyle/>
+          <a:p>
+            <a:pPr algn="ctr">
+              <a:spcAft>
+                <a:spcPts val="800"/>
+              </a:spcAft>
+            </a:pPr>
+            <a:r>
+              <a:rPr sz="4800" b="1" i="0">
+                <a:solidFill>
+                  <a:srgbClr val="FFFFFF"/>
+                </a:solidFill>
+                <a:latin typeface="Calibri"/>
+              </a:rPr>
+              <a:t>Thank you!</a:t>
+            </a:r>
+          </a:p>
+          <a:p>
+            <a:pPr algn="ctr">
+              <a:spcAft>
+                <a:spcPts val="800"/>
+              </a:spcAft>
+            </a:pPr>
+            <a:r>
+              <a:rPr sz="2400" b="0" i="0">
+                <a:solidFill>
+                  <a:srgbClr val="9FC5DD"/>
+                </a:solidFill>
+                <a:latin typeface="Calibri"/>
+              </a:rPr>
+              <a:t>Questions?</a:t>
+            </a:r>
+          </a:p>
+        </p:txBody>
+      </p:sp>
+    </p:spTree>
+  </p:cSld>
+  <p:clrMapOvr>
+    <a:masterClrMapping/>
+  </p:clrMapOvr>
+</p:sld>
+</file>
+
 <file path=ppt/slides/slide2.xml><?xml version="1.0" encoding="utf-8"?>
 <p:sld xmlns:a="http://schemas.openxmlformats.org/drawingml/2006/main" xmlns:p="http://schemas.openxmlformats.org/presentationml/2006/main" xmlns:r="http://schemas.openxmlformats.org/officeDocument/2006/relationships">
   <p:cSld>
@@ -8621,8 +8783,8 @@
         </p:blipFill>
         <p:spPr>
           <a:xfrm>
-            <a:off x="274320" y="1504403"/>
-            <a:ext cx="11612880" cy="4123513"/>
+            <a:off x="274320" y="1507659"/>
+            <a:ext cx="11612880" cy="4117002"/>
           </a:xfrm>
           <a:prstGeom prst="rect">
             <a:avLst/>
